--- a/presentations/Положение, контроль и психологическая поддержка.pptx
+++ b/presentations/Положение, контроль и психологическая поддержка.pptx
@@ -15,6 +15,11 @@
     <p:sldId id="263" r:id="rId14"/>
     <p:sldId id="264" r:id="rId15"/>
     <p:sldId id="265" r:id="rId16"/>
+    <p:sldId id="266" r:id="rId17"/>
+    <p:sldId id="267" r:id="rId18"/>
+    <p:sldId id="268" r:id="rId19"/>
+    <p:sldId id="269" r:id="rId20"/>
+    <p:sldId id="270" r:id="rId21"/>
   </p:sldIdLst>
   <p:sldSz cx="12191695" cy="6858000" type="screen4x3"/>
   <p:notesSz cx="6858000" cy="9144000"/>
@@ -3371,6 +3376,3136 @@
         <p:spPr>
           <a:xfrm>
             <a:off x="0" y="0"/>
+            <a:ext cx="12191695" cy="6858000"/>
+          </a:xfrm>
+          <a:prstGeom prst="rect">
+            <a:avLst/>
+          </a:prstGeom>
+          <a:solidFill>
+            <a:srgbClr val="FFFFFF"/>
+          </a:solidFill>
+          <a:ln>
+            <a:noFill/>
+          </a:ln>
+        </p:spPr>
+        <p:style>
+          <a:lnRef idx="1">
+            <a:schemeClr val="accent1"/>
+          </a:lnRef>
+          <a:fillRef idx="3">
+            <a:schemeClr val="accent1"/>
+          </a:fillRef>
+          <a:effectRef idx="2">
+            <a:schemeClr val="accent1"/>
+          </a:effectRef>
+          <a:fontRef idx="minor">
+            <a:schemeClr val="lt1"/>
+          </a:fontRef>
+        </p:style>
+        <p:txBody>
+          <a:bodyPr rtlCol="0" anchor="ctr"/>
+          <a:lstStyle/>
+          <a:p>
+            <a:pPr algn="ctr"/>
+          </a:p>
+        </p:txBody>
+      </p:sp>
+      <p:sp>
+        <p:nvSpPr>
+          <p:cNvPr id="3" name="TextBox 2"/>
+          <p:cNvSpPr txBox="1"/>
+          <p:nvPr/>
+        </p:nvSpPr>
+        <p:spPr>
+          <a:xfrm>
+            <a:off x="700000" y="250000"/>
+            <a:ext cx="11200000" cy="550000"/>
+          </a:xfrm>
+          <a:prstGeom prst="rect">
+            <a:avLst/>
+          </a:prstGeom>
+          <a:noFill/>
+        </p:spPr>
+        <p:txBody>
+          <a:bodyPr wrap="square" anchor="t">
+            <a:spAutoFit/>
+          </a:bodyPr>
+          <a:lstStyle/>
+          <a:p>
+            <a:pPr algn="l"/>
+            <a:r>
+              <a:rPr sz="2200" b="1">
+                <a:solidFill>
+                  <a:srgbClr val="333333"/>
+                </a:solidFill>
+                <a:latin typeface="Open Sans"/>
+                <a:ea typeface="Open Sans"/>
+                <a:cs typeface="Open Sans"/>
+              </a:rPr>
+              <a:t>ОСНОВЫ ПСИХОЛОГИЧЕСКОЙ ПОДДЕРЖКИ</a:t>
+            </a:r>
+          </a:p>
+        </p:txBody>
+      </p:sp>
+      <p:sp>
+        <p:nvSpPr>
+          <p:cNvPr id="4" name="Rectangle 3"/>
+          <p:cNvSpPr/>
+          <p:nvPr/>
+        </p:nvSpPr>
+        <p:spPr>
+          <a:xfrm>
+            <a:off x="700000" y="850000"/>
+            <a:ext cx="9000000" cy="28000"/>
+          </a:xfrm>
+          <a:prstGeom prst="rect">
+            <a:avLst/>
+          </a:prstGeom>
+          <a:solidFill>
+            <a:srgbClr val="555555"/>
+          </a:solidFill>
+          <a:ln>
+            <a:noFill/>
+          </a:ln>
+        </p:spPr>
+        <p:style>
+          <a:lnRef idx="1">
+            <a:schemeClr val="accent1"/>
+          </a:lnRef>
+          <a:fillRef idx="3">
+            <a:schemeClr val="accent1"/>
+          </a:fillRef>
+          <a:effectRef idx="2">
+            <a:schemeClr val="accent1"/>
+          </a:effectRef>
+          <a:fontRef idx="minor">
+            <a:schemeClr val="lt1"/>
+          </a:fontRef>
+        </p:style>
+        <p:txBody>
+          <a:bodyPr rtlCol="0" anchor="ctr"/>
+          <a:lstStyle/>
+          <a:p>
+            <a:pPr algn="ctr"/>
+          </a:p>
+        </p:txBody>
+      </p:sp>
+      <p:sp>
+        <p:nvSpPr>
+          <p:cNvPr id="5" name="TextBox 4"/>
+          <p:cNvSpPr txBox="1"/>
+          <p:nvPr/>
+        </p:nvSpPr>
+        <p:spPr>
+          <a:xfrm>
+            <a:off x="700000" y="920000"/>
+            <a:ext cx="11000000" cy="350000"/>
+          </a:xfrm>
+          <a:prstGeom prst="rect">
+            <a:avLst/>
+          </a:prstGeom>
+          <a:noFill/>
+        </p:spPr>
+        <p:txBody>
+          <a:bodyPr wrap="square" anchor="t">
+            <a:spAutoFit/>
+          </a:bodyPr>
+          <a:lstStyle/>
+          <a:p>
+            <a:pPr algn="l"/>
+            <a:r>
+              <a:rPr sz="1200" b="0">
+                <a:solidFill>
+                  <a:srgbClr val="666666"/>
+                </a:solidFill>
+                <a:latin typeface="Open Sans"/>
+                <a:ea typeface="Open Sans"/>
+                <a:cs typeface="Open Sans"/>
+              </a:rPr>
+              <a:t>Оказание первой помощи при травмах, ранениях и поражениях, прочих состояниях</a:t>
+            </a:r>
+          </a:p>
+        </p:txBody>
+      </p:sp>
+      <p:sp>
+        <p:nvSpPr>
+          <p:cNvPr id="6" name="Rectangle 5"/>
+          <p:cNvSpPr/>
+          <p:nvPr/>
+        </p:nvSpPr>
+        <p:spPr>
+          <a:xfrm>
+            <a:off x="0" y="2800000"/>
+            <a:ext cx="420000" cy="420000"/>
+          </a:xfrm>
+          <a:prstGeom prst="rect">
+            <a:avLst/>
+          </a:prstGeom>
+          <a:solidFill>
+            <a:srgbClr val="555555"/>
+          </a:solidFill>
+          <a:ln>
+            <a:noFill/>
+          </a:ln>
+        </p:spPr>
+        <p:style>
+          <a:lnRef idx="1">
+            <a:schemeClr val="accent1"/>
+          </a:lnRef>
+          <a:fillRef idx="3">
+            <a:schemeClr val="accent1"/>
+          </a:fillRef>
+          <a:effectRef idx="2">
+            <a:schemeClr val="accent1"/>
+          </a:effectRef>
+          <a:fontRef idx="minor">
+            <a:schemeClr val="lt1"/>
+          </a:fontRef>
+        </p:style>
+        <p:txBody>
+          <a:bodyPr rtlCol="0" anchor="ctr"/>
+          <a:lstStyle/>
+          <a:p>
+            <a:pPr algn="ctr"/>
+          </a:p>
+        </p:txBody>
+      </p:sp>
+      <p:sp>
+        <p:nvSpPr>
+          <p:cNvPr id="7" name="TextBox 6"/>
+          <p:cNvSpPr txBox="1"/>
+          <p:nvPr/>
+        </p:nvSpPr>
+        <p:spPr>
+          <a:xfrm>
+            <a:off x="0" y="2800000"/>
+            <a:ext cx="420000" cy="420000"/>
+          </a:xfrm>
+          <a:prstGeom prst="rect">
+            <a:avLst/>
+          </a:prstGeom>
+          <a:noFill/>
+        </p:spPr>
+        <p:txBody>
+          <a:bodyPr wrap="square" anchor="ctr">
+            <a:spAutoFit/>
+          </a:bodyPr>
+          <a:lstStyle/>
+          <a:p>
+            <a:pPr algn="ctr"/>
+            <a:r>
+              <a:rPr sz="1400" b="1">
+                <a:solidFill>
+                  <a:srgbClr val="FFFFFF"/>
+                </a:solidFill>
+                <a:latin typeface="Open Sans"/>
+                <a:ea typeface="Open Sans"/>
+                <a:cs typeface="Open Sans"/>
+              </a:rPr>
+              <a:t>10</a:t>
+            </a:r>
+          </a:p>
+        </p:txBody>
+      </p:sp>
+      <p:sp>
+        <p:nvSpPr>
+          <p:cNvPr id="8" name="Rectangle 7"/>
+          <p:cNvSpPr/>
+          <p:nvPr/>
+        </p:nvSpPr>
+        <p:spPr>
+          <a:xfrm>
+            <a:off x="700000" y="1400000"/>
+            <a:ext cx="5400000" cy="2420000"/>
+          </a:xfrm>
+          <a:prstGeom prst="rect">
+            <a:avLst/>
+          </a:prstGeom>
+          <a:solidFill>
+            <a:srgbClr val="FFFFFF"/>
+          </a:solidFill>
+          <a:ln w="12700">
+            <a:solidFill>
+              <a:srgbClr val="999999"/>
+            </a:solidFill>
+          </a:ln>
+        </p:spPr>
+        <p:style>
+          <a:lnRef idx="1">
+            <a:schemeClr val="accent1"/>
+          </a:lnRef>
+          <a:fillRef idx="3">
+            <a:schemeClr val="accent1"/>
+          </a:fillRef>
+          <a:effectRef idx="2">
+            <a:schemeClr val="accent1"/>
+          </a:effectRef>
+          <a:fontRef idx="minor">
+            <a:schemeClr val="lt1"/>
+          </a:fontRef>
+        </p:style>
+        <p:txBody>
+          <a:bodyPr rtlCol="0" anchor="ctr"/>
+          <a:lstStyle/>
+          <a:p>
+            <a:pPr algn="ctr"/>
+          </a:p>
+        </p:txBody>
+      </p:sp>
+      <p:sp>
+        <p:nvSpPr>
+          <p:cNvPr id="9" name="Oval 8"/>
+          <p:cNvSpPr/>
+          <p:nvPr/>
+        </p:nvSpPr>
+        <p:spPr>
+          <a:xfrm>
+            <a:off x="820000" y="1550000"/>
+            <a:ext cx="450000" cy="450000"/>
+          </a:xfrm>
+          <a:prstGeom prst="ellipse">
+            <a:avLst/>
+          </a:prstGeom>
+          <a:solidFill>
+            <a:srgbClr val="555555"/>
+          </a:solidFill>
+          <a:ln>
+            <a:noFill/>
+          </a:ln>
+        </p:spPr>
+        <p:style>
+          <a:lnRef idx="1">
+            <a:schemeClr val="accent1"/>
+          </a:lnRef>
+          <a:fillRef idx="3">
+            <a:schemeClr val="accent1"/>
+          </a:fillRef>
+          <a:effectRef idx="2">
+            <a:schemeClr val="accent1"/>
+          </a:effectRef>
+          <a:fontRef idx="minor">
+            <a:schemeClr val="lt1"/>
+          </a:fontRef>
+        </p:style>
+        <p:txBody>
+          <a:bodyPr rtlCol="0" anchor="ctr"/>
+          <a:lstStyle/>
+          <a:p>
+            <a:pPr algn="ctr"/>
+          </a:p>
+        </p:txBody>
+      </p:sp>
+      <p:sp>
+        <p:nvSpPr>
+          <p:cNvPr id="10" name="TextBox 9"/>
+          <p:cNvSpPr txBox="1"/>
+          <p:nvPr/>
+        </p:nvSpPr>
+        <p:spPr>
+          <a:xfrm>
+            <a:off x="820000" y="1550000"/>
+            <a:ext cx="450000" cy="450000"/>
+          </a:xfrm>
+          <a:prstGeom prst="rect">
+            <a:avLst/>
+          </a:prstGeom>
+          <a:noFill/>
+        </p:spPr>
+        <p:txBody>
+          <a:bodyPr wrap="square" anchor="ctr">
+            <a:spAutoFit/>
+          </a:bodyPr>
+          <a:lstStyle/>
+          <a:p>
+            <a:pPr algn="ctr"/>
+            <a:r>
+              <a:rPr sz="1300" b="1">
+                <a:solidFill>
+                  <a:srgbClr val="FFFFFF"/>
+                </a:solidFill>
+                <a:latin typeface="Open Sans"/>
+                <a:ea typeface="Open Sans"/>
+                <a:cs typeface="Open Sans"/>
+              </a:rPr>
+              <a:t>1</a:t>
+            </a:r>
+          </a:p>
+        </p:txBody>
+      </p:sp>
+      <p:sp>
+        <p:nvSpPr>
+          <p:cNvPr id="11" name="TextBox 10"/>
+          <p:cNvSpPr txBox="1"/>
+          <p:nvPr/>
+        </p:nvSpPr>
+        <p:spPr>
+          <a:xfrm>
+            <a:off x="1350000" y="1580000"/>
+            <a:ext cx="4600000" cy="400000"/>
+          </a:xfrm>
+          <a:prstGeom prst="rect">
+            <a:avLst/>
+          </a:prstGeom>
+          <a:noFill/>
+        </p:spPr>
+        <p:txBody>
+          <a:bodyPr wrap="square" anchor="t">
+            <a:spAutoFit/>
+          </a:bodyPr>
+          <a:lstStyle/>
+          <a:p>
+            <a:pPr algn="l"/>
+            <a:r>
+              <a:rPr sz="1200" b="1">
+                <a:solidFill>
+                  <a:srgbClr val="333333"/>
+                </a:solidFill>
+                <a:latin typeface="Open Sans"/>
+                <a:ea typeface="Open Sans"/>
+                <a:cs typeface="Open Sans"/>
+              </a:rPr>
+              <a:t>Контакт</a:t>
+            </a:r>
+          </a:p>
+        </p:txBody>
+      </p:sp>
+      <p:sp>
+        <p:nvSpPr>
+          <p:cNvPr id="12" name="TextBox 11"/>
+          <p:cNvSpPr txBox="1"/>
+          <p:nvPr/>
+        </p:nvSpPr>
+        <p:spPr>
+          <a:xfrm>
+            <a:off x="820000" y="2100000"/>
+            <a:ext cx="5160000" cy="1570000"/>
+          </a:xfrm>
+          <a:prstGeom prst="rect">
+            <a:avLst/>
+          </a:prstGeom>
+          <a:noFill/>
+        </p:spPr>
+        <p:txBody>
+          <a:bodyPr wrap="square" anchor="t">
+            <a:spAutoFit/>
+          </a:bodyPr>
+          <a:lstStyle/>
+          <a:p>
+            <a:pPr algn="l"/>
+            <a:r>
+              <a:rPr sz="1200" b="0">
+                <a:solidFill>
+                  <a:srgbClr val="666666"/>
+                </a:solidFill>
+                <a:latin typeface="Open Sans"/>
+                <a:ea typeface="Open Sans"/>
+                <a:cs typeface="Open Sans"/>
+              </a:rPr>
+              <a:t>Представьтесь, спросите имя и получите согласие на помощь, если это возможно.</a:t>
+            </a:r>
+          </a:p>
+        </p:txBody>
+      </p:sp>
+      <p:sp>
+        <p:nvSpPr>
+          <p:cNvPr id="13" name="Rectangle 12"/>
+          <p:cNvSpPr/>
+          <p:nvPr/>
+        </p:nvSpPr>
+        <p:spPr>
+          <a:xfrm>
+            <a:off x="6300000" y="1400000"/>
+            <a:ext cx="5400000" cy="2420000"/>
+          </a:xfrm>
+          <a:prstGeom prst="rect">
+            <a:avLst/>
+          </a:prstGeom>
+          <a:solidFill>
+            <a:srgbClr val="FFFFFF"/>
+          </a:solidFill>
+          <a:ln w="12700">
+            <a:solidFill>
+              <a:srgbClr val="999999"/>
+            </a:solidFill>
+          </a:ln>
+        </p:spPr>
+        <p:style>
+          <a:lnRef idx="1">
+            <a:schemeClr val="accent1"/>
+          </a:lnRef>
+          <a:fillRef idx="3">
+            <a:schemeClr val="accent1"/>
+          </a:fillRef>
+          <a:effectRef idx="2">
+            <a:schemeClr val="accent1"/>
+          </a:effectRef>
+          <a:fontRef idx="minor">
+            <a:schemeClr val="lt1"/>
+          </a:fontRef>
+        </p:style>
+        <p:txBody>
+          <a:bodyPr rtlCol="0" anchor="ctr"/>
+          <a:lstStyle/>
+          <a:p>
+            <a:pPr algn="ctr"/>
+          </a:p>
+        </p:txBody>
+      </p:sp>
+      <p:sp>
+        <p:nvSpPr>
+          <p:cNvPr id="14" name="Oval 13"/>
+          <p:cNvSpPr/>
+          <p:nvPr/>
+        </p:nvSpPr>
+        <p:spPr>
+          <a:xfrm>
+            <a:off x="6420000" y="1550000"/>
+            <a:ext cx="450000" cy="450000"/>
+          </a:xfrm>
+          <a:prstGeom prst="ellipse">
+            <a:avLst/>
+          </a:prstGeom>
+          <a:solidFill>
+            <a:srgbClr val="555555"/>
+          </a:solidFill>
+          <a:ln>
+            <a:noFill/>
+          </a:ln>
+        </p:spPr>
+        <p:style>
+          <a:lnRef idx="1">
+            <a:schemeClr val="accent1"/>
+          </a:lnRef>
+          <a:fillRef idx="3">
+            <a:schemeClr val="accent1"/>
+          </a:fillRef>
+          <a:effectRef idx="2">
+            <a:schemeClr val="accent1"/>
+          </a:effectRef>
+          <a:fontRef idx="minor">
+            <a:schemeClr val="lt1"/>
+          </a:fontRef>
+        </p:style>
+        <p:txBody>
+          <a:bodyPr rtlCol="0" anchor="ctr"/>
+          <a:lstStyle/>
+          <a:p>
+            <a:pPr algn="ctr"/>
+          </a:p>
+        </p:txBody>
+      </p:sp>
+      <p:sp>
+        <p:nvSpPr>
+          <p:cNvPr id="15" name="TextBox 14"/>
+          <p:cNvSpPr txBox="1"/>
+          <p:nvPr/>
+        </p:nvSpPr>
+        <p:spPr>
+          <a:xfrm>
+            <a:off x="6420000" y="1550000"/>
+            <a:ext cx="450000" cy="450000"/>
+          </a:xfrm>
+          <a:prstGeom prst="rect">
+            <a:avLst/>
+          </a:prstGeom>
+          <a:noFill/>
+        </p:spPr>
+        <p:txBody>
+          <a:bodyPr wrap="square" anchor="ctr">
+            <a:spAutoFit/>
+          </a:bodyPr>
+          <a:lstStyle/>
+          <a:p>
+            <a:pPr algn="ctr"/>
+            <a:r>
+              <a:rPr sz="1300" b="1">
+                <a:solidFill>
+                  <a:srgbClr val="FFFFFF"/>
+                </a:solidFill>
+                <a:latin typeface="Open Sans"/>
+                <a:ea typeface="Open Sans"/>
+                <a:cs typeface="Open Sans"/>
+              </a:rPr>
+              <a:t>2</a:t>
+            </a:r>
+          </a:p>
+        </p:txBody>
+      </p:sp>
+      <p:sp>
+        <p:nvSpPr>
+          <p:cNvPr id="16" name="TextBox 15"/>
+          <p:cNvSpPr txBox="1"/>
+          <p:nvPr/>
+        </p:nvSpPr>
+        <p:spPr>
+          <a:xfrm>
+            <a:off x="6950000" y="1580000"/>
+            <a:ext cx="4600000" cy="400000"/>
+          </a:xfrm>
+          <a:prstGeom prst="rect">
+            <a:avLst/>
+          </a:prstGeom>
+          <a:noFill/>
+        </p:spPr>
+        <p:txBody>
+          <a:bodyPr wrap="square" anchor="t">
+            <a:spAutoFit/>
+          </a:bodyPr>
+          <a:lstStyle/>
+          <a:p>
+            <a:pPr algn="l"/>
+            <a:r>
+              <a:rPr sz="1200" b="1">
+                <a:solidFill>
+                  <a:srgbClr val="333333"/>
+                </a:solidFill>
+                <a:latin typeface="Open Sans"/>
+                <a:ea typeface="Open Sans"/>
+                <a:cs typeface="Open Sans"/>
+              </a:rPr>
+              <a:t>Спокойная речь</a:t>
+            </a:r>
+          </a:p>
+        </p:txBody>
+      </p:sp>
+      <p:sp>
+        <p:nvSpPr>
+          <p:cNvPr id="17" name="TextBox 16"/>
+          <p:cNvSpPr txBox="1"/>
+          <p:nvPr/>
+        </p:nvSpPr>
+        <p:spPr>
+          <a:xfrm>
+            <a:off x="6420000" y="2100000"/>
+            <a:ext cx="5160000" cy="1570000"/>
+          </a:xfrm>
+          <a:prstGeom prst="rect">
+            <a:avLst/>
+          </a:prstGeom>
+          <a:noFill/>
+        </p:spPr>
+        <p:txBody>
+          <a:bodyPr wrap="square" anchor="t">
+            <a:spAutoFit/>
+          </a:bodyPr>
+          <a:lstStyle/>
+          <a:p>
+            <a:pPr algn="l"/>
+            <a:r>
+              <a:rPr sz="1200" b="0">
+                <a:solidFill>
+                  <a:srgbClr val="666666"/>
+                </a:solidFill>
+                <a:latin typeface="Open Sans"/>
+                <a:ea typeface="Open Sans"/>
+                <a:cs typeface="Open Sans"/>
+              </a:rPr>
+              <a:t>Говорите короткими понятными фразами, не повышайте голос и объясняйте каждое действие.</a:t>
+            </a:r>
+          </a:p>
+        </p:txBody>
+      </p:sp>
+      <p:sp>
+        <p:nvSpPr>
+          <p:cNvPr id="18" name="Rectangle 17"/>
+          <p:cNvSpPr/>
+          <p:nvPr/>
+        </p:nvSpPr>
+        <p:spPr>
+          <a:xfrm>
+            <a:off x="700000" y="3980000"/>
+            <a:ext cx="5400000" cy="2420000"/>
+          </a:xfrm>
+          <a:prstGeom prst="rect">
+            <a:avLst/>
+          </a:prstGeom>
+          <a:solidFill>
+            <a:srgbClr val="FFFFFF"/>
+          </a:solidFill>
+          <a:ln w="12700">
+            <a:solidFill>
+              <a:srgbClr val="999999"/>
+            </a:solidFill>
+          </a:ln>
+        </p:spPr>
+        <p:style>
+          <a:lnRef idx="1">
+            <a:schemeClr val="accent1"/>
+          </a:lnRef>
+          <a:fillRef idx="3">
+            <a:schemeClr val="accent1"/>
+          </a:fillRef>
+          <a:effectRef idx="2">
+            <a:schemeClr val="accent1"/>
+          </a:effectRef>
+          <a:fontRef idx="minor">
+            <a:schemeClr val="lt1"/>
+          </a:fontRef>
+        </p:style>
+        <p:txBody>
+          <a:bodyPr rtlCol="0" anchor="ctr"/>
+          <a:lstStyle/>
+          <a:p>
+            <a:pPr algn="ctr"/>
+          </a:p>
+        </p:txBody>
+      </p:sp>
+      <p:sp>
+        <p:nvSpPr>
+          <p:cNvPr id="19" name="Oval 18"/>
+          <p:cNvSpPr/>
+          <p:nvPr/>
+        </p:nvSpPr>
+        <p:spPr>
+          <a:xfrm>
+            <a:off x="820000" y="4130000"/>
+            <a:ext cx="450000" cy="450000"/>
+          </a:xfrm>
+          <a:prstGeom prst="ellipse">
+            <a:avLst/>
+          </a:prstGeom>
+          <a:solidFill>
+            <a:srgbClr val="555555"/>
+          </a:solidFill>
+          <a:ln>
+            <a:noFill/>
+          </a:ln>
+        </p:spPr>
+        <p:style>
+          <a:lnRef idx="1">
+            <a:schemeClr val="accent1"/>
+          </a:lnRef>
+          <a:fillRef idx="3">
+            <a:schemeClr val="accent1"/>
+          </a:fillRef>
+          <a:effectRef idx="2">
+            <a:schemeClr val="accent1"/>
+          </a:effectRef>
+          <a:fontRef idx="minor">
+            <a:schemeClr val="lt1"/>
+          </a:fontRef>
+        </p:style>
+        <p:txBody>
+          <a:bodyPr rtlCol="0" anchor="ctr"/>
+          <a:lstStyle/>
+          <a:p>
+            <a:pPr algn="ctr"/>
+          </a:p>
+        </p:txBody>
+      </p:sp>
+      <p:sp>
+        <p:nvSpPr>
+          <p:cNvPr id="20" name="TextBox 19"/>
+          <p:cNvSpPr txBox="1"/>
+          <p:nvPr/>
+        </p:nvSpPr>
+        <p:spPr>
+          <a:xfrm>
+            <a:off x="820000" y="4130000"/>
+            <a:ext cx="450000" cy="450000"/>
+          </a:xfrm>
+          <a:prstGeom prst="rect">
+            <a:avLst/>
+          </a:prstGeom>
+          <a:noFill/>
+        </p:spPr>
+        <p:txBody>
+          <a:bodyPr wrap="square" anchor="ctr">
+            <a:spAutoFit/>
+          </a:bodyPr>
+          <a:lstStyle/>
+          <a:p>
+            <a:pPr algn="ctr"/>
+            <a:r>
+              <a:rPr sz="1300" b="1">
+                <a:solidFill>
+                  <a:srgbClr val="FFFFFF"/>
+                </a:solidFill>
+                <a:latin typeface="Open Sans"/>
+                <a:ea typeface="Open Sans"/>
+                <a:cs typeface="Open Sans"/>
+              </a:rPr>
+              <a:t>3</a:t>
+            </a:r>
+          </a:p>
+        </p:txBody>
+      </p:sp>
+      <p:sp>
+        <p:nvSpPr>
+          <p:cNvPr id="21" name="TextBox 20"/>
+          <p:cNvSpPr txBox="1"/>
+          <p:nvPr/>
+        </p:nvSpPr>
+        <p:spPr>
+          <a:xfrm>
+            <a:off x="1350000" y="4160000"/>
+            <a:ext cx="4600000" cy="400000"/>
+          </a:xfrm>
+          <a:prstGeom prst="rect">
+            <a:avLst/>
+          </a:prstGeom>
+          <a:noFill/>
+        </p:spPr>
+        <p:txBody>
+          <a:bodyPr wrap="square" anchor="t">
+            <a:spAutoFit/>
+          </a:bodyPr>
+          <a:lstStyle/>
+          <a:p>
+            <a:pPr algn="l"/>
+            <a:r>
+              <a:rPr sz="1200" b="1">
+                <a:solidFill>
+                  <a:srgbClr val="333333"/>
+                </a:solidFill>
+                <a:latin typeface="Open Sans"/>
+                <a:ea typeface="Open Sans"/>
+                <a:cs typeface="Open Sans"/>
+              </a:rPr>
+              <a:t>Опора на факты</a:t>
+            </a:r>
+          </a:p>
+        </p:txBody>
+      </p:sp>
+      <p:sp>
+        <p:nvSpPr>
+          <p:cNvPr id="22" name="TextBox 21"/>
+          <p:cNvSpPr txBox="1"/>
+          <p:nvPr/>
+        </p:nvSpPr>
+        <p:spPr>
+          <a:xfrm>
+            <a:off x="820000" y="4680000"/>
+            <a:ext cx="5160000" cy="1570000"/>
+          </a:xfrm>
+          <a:prstGeom prst="rect">
+            <a:avLst/>
+          </a:prstGeom>
+          <a:noFill/>
+        </p:spPr>
+        <p:txBody>
+          <a:bodyPr wrap="square" anchor="t">
+            <a:spAutoFit/>
+          </a:bodyPr>
+          <a:lstStyle/>
+          <a:p>
+            <a:pPr algn="l"/>
+            <a:r>
+              <a:rPr sz="1200" b="0">
+                <a:solidFill>
+                  <a:srgbClr val="666666"/>
+                </a:solidFill>
+                <a:latin typeface="Open Sans"/>
+                <a:ea typeface="Open Sans"/>
+                <a:cs typeface="Open Sans"/>
+              </a:rPr>
+              <a:t>Сообщайте, какая помощь вызвана и что происходит сейчас, не делайте пугающих прогнозов.</a:t>
+            </a:r>
+          </a:p>
+        </p:txBody>
+      </p:sp>
+      <p:sp>
+        <p:nvSpPr>
+          <p:cNvPr id="23" name="Rectangle 22"/>
+          <p:cNvSpPr/>
+          <p:nvPr/>
+        </p:nvSpPr>
+        <p:spPr>
+          <a:xfrm>
+            <a:off x="6300000" y="3980000"/>
+            <a:ext cx="5400000" cy="2420000"/>
+          </a:xfrm>
+          <a:prstGeom prst="rect">
+            <a:avLst/>
+          </a:prstGeom>
+          <a:solidFill>
+            <a:srgbClr val="FFFFFF"/>
+          </a:solidFill>
+          <a:ln w="12700">
+            <a:solidFill>
+              <a:srgbClr val="999999"/>
+            </a:solidFill>
+          </a:ln>
+        </p:spPr>
+        <p:style>
+          <a:lnRef idx="1">
+            <a:schemeClr val="accent1"/>
+          </a:lnRef>
+          <a:fillRef idx="3">
+            <a:schemeClr val="accent1"/>
+          </a:fillRef>
+          <a:effectRef idx="2">
+            <a:schemeClr val="accent1"/>
+          </a:effectRef>
+          <a:fontRef idx="minor">
+            <a:schemeClr val="lt1"/>
+          </a:fontRef>
+        </p:style>
+        <p:txBody>
+          <a:bodyPr rtlCol="0" anchor="ctr"/>
+          <a:lstStyle/>
+          <a:p>
+            <a:pPr algn="ctr"/>
+          </a:p>
+        </p:txBody>
+      </p:sp>
+      <p:sp>
+        <p:nvSpPr>
+          <p:cNvPr id="24" name="Oval 23"/>
+          <p:cNvSpPr/>
+          <p:nvPr/>
+        </p:nvSpPr>
+        <p:spPr>
+          <a:xfrm>
+            <a:off x="6420000" y="4130000"/>
+            <a:ext cx="450000" cy="450000"/>
+          </a:xfrm>
+          <a:prstGeom prst="ellipse">
+            <a:avLst/>
+          </a:prstGeom>
+          <a:solidFill>
+            <a:srgbClr val="555555"/>
+          </a:solidFill>
+          <a:ln>
+            <a:noFill/>
+          </a:ln>
+        </p:spPr>
+        <p:style>
+          <a:lnRef idx="1">
+            <a:schemeClr val="accent1"/>
+          </a:lnRef>
+          <a:fillRef idx="3">
+            <a:schemeClr val="accent1"/>
+          </a:fillRef>
+          <a:effectRef idx="2">
+            <a:schemeClr val="accent1"/>
+          </a:effectRef>
+          <a:fontRef idx="minor">
+            <a:schemeClr val="lt1"/>
+          </a:fontRef>
+        </p:style>
+        <p:txBody>
+          <a:bodyPr rtlCol="0" anchor="ctr"/>
+          <a:lstStyle/>
+          <a:p>
+            <a:pPr algn="ctr"/>
+          </a:p>
+        </p:txBody>
+      </p:sp>
+      <p:sp>
+        <p:nvSpPr>
+          <p:cNvPr id="25" name="TextBox 24"/>
+          <p:cNvSpPr txBox="1"/>
+          <p:nvPr/>
+        </p:nvSpPr>
+        <p:spPr>
+          <a:xfrm>
+            <a:off x="6420000" y="4130000"/>
+            <a:ext cx="450000" cy="450000"/>
+          </a:xfrm>
+          <a:prstGeom prst="rect">
+            <a:avLst/>
+          </a:prstGeom>
+          <a:noFill/>
+        </p:spPr>
+        <p:txBody>
+          <a:bodyPr wrap="square" anchor="ctr">
+            <a:spAutoFit/>
+          </a:bodyPr>
+          <a:lstStyle/>
+          <a:p>
+            <a:pPr algn="ctr"/>
+            <a:r>
+              <a:rPr sz="1300" b="1">
+                <a:solidFill>
+                  <a:srgbClr val="FFFFFF"/>
+                </a:solidFill>
+                <a:latin typeface="Open Sans"/>
+                <a:ea typeface="Open Sans"/>
+                <a:cs typeface="Open Sans"/>
+              </a:rPr>
+              <a:t>4</a:t>
+            </a:r>
+          </a:p>
+        </p:txBody>
+      </p:sp>
+      <p:sp>
+        <p:nvSpPr>
+          <p:cNvPr id="26" name="TextBox 25"/>
+          <p:cNvSpPr txBox="1"/>
+          <p:nvPr/>
+        </p:nvSpPr>
+        <p:spPr>
+          <a:xfrm>
+            <a:off x="6950000" y="4160000"/>
+            <a:ext cx="4600000" cy="400000"/>
+          </a:xfrm>
+          <a:prstGeom prst="rect">
+            <a:avLst/>
+          </a:prstGeom>
+          <a:noFill/>
+        </p:spPr>
+        <p:txBody>
+          <a:bodyPr wrap="square" anchor="t">
+            <a:spAutoFit/>
+          </a:bodyPr>
+          <a:lstStyle/>
+          <a:p>
+            <a:pPr algn="l"/>
+            <a:r>
+              <a:rPr sz="1200" b="1">
+                <a:solidFill>
+                  <a:srgbClr val="333333"/>
+                </a:solidFill>
+                <a:latin typeface="Open Sans"/>
+                <a:ea typeface="Open Sans"/>
+                <a:cs typeface="Open Sans"/>
+              </a:rPr>
+              <a:t>Присутствие</a:t>
+            </a:r>
+          </a:p>
+        </p:txBody>
+      </p:sp>
+      <p:sp>
+        <p:nvSpPr>
+          <p:cNvPr id="27" name="TextBox 26"/>
+          <p:cNvSpPr txBox="1"/>
+          <p:nvPr/>
+        </p:nvSpPr>
+        <p:spPr>
+          <a:xfrm>
+            <a:off x="6420000" y="4680000"/>
+            <a:ext cx="5160000" cy="1570000"/>
+          </a:xfrm>
+          <a:prstGeom prst="rect">
+            <a:avLst/>
+          </a:prstGeom>
+          <a:noFill/>
+        </p:spPr>
+        <p:txBody>
+          <a:bodyPr wrap="square" anchor="t">
+            <a:spAutoFit/>
+          </a:bodyPr>
+          <a:lstStyle/>
+          <a:p>
+            <a:pPr algn="l"/>
+            <a:r>
+              <a:rPr sz="1200" b="0">
+                <a:solidFill>
+                  <a:srgbClr val="666666"/>
+                </a:solidFill>
+                <a:latin typeface="Open Sans"/>
+                <a:ea typeface="Open Sans"/>
+                <a:cs typeface="Open Sans"/>
+              </a:rPr>
+              <a:t>Оставайтесь рядом, защищайте личное пространство и привлекайте близкого человека по желанию пострадавшего.</a:t>
+            </a:r>
+          </a:p>
+        </p:txBody>
+      </p:sp>
+    </p:spTree>
+  </p:cSld>
+  <p:clrMapOvr>
+    <a:masterClrMapping/>
+  </p:clrMapOvr>
+</p:sld>
+</file>
+
+<file path=ppt/slides/slide11.xml><?xml version="1.0" encoding="utf-8"?>
+<p:sld xmlns:a="http://schemas.openxmlformats.org/drawingml/2006/main" xmlns:p="http://schemas.openxmlformats.org/presentationml/2006/main" xmlns:r="http://schemas.openxmlformats.org/officeDocument/2006/relationships">
+  <p:cSld>
+    <p:spTree>
+      <p:nvGrpSpPr>
+        <p:cNvPr id="1" name=""/>
+        <p:cNvGrpSpPr/>
+        <p:nvPr/>
+      </p:nvGrpSpPr>
+      <p:grpSpPr/>
+      <p:sp>
+        <p:nvSpPr>
+          <p:cNvPr id="2" name="Rectangle 1"/>
+          <p:cNvSpPr/>
+          <p:nvPr/>
+        </p:nvSpPr>
+        <p:spPr>
+          <a:xfrm>
+            <a:off x="0" y="0"/>
+            <a:ext cx="12191695" cy="6858000"/>
+          </a:xfrm>
+          <a:prstGeom prst="rect">
+            <a:avLst/>
+          </a:prstGeom>
+          <a:solidFill>
+            <a:srgbClr val="FFFFFF"/>
+          </a:solidFill>
+          <a:ln>
+            <a:noFill/>
+          </a:ln>
+        </p:spPr>
+        <p:style>
+          <a:lnRef idx="1">
+            <a:schemeClr val="accent1"/>
+          </a:lnRef>
+          <a:fillRef idx="3">
+            <a:schemeClr val="accent1"/>
+          </a:fillRef>
+          <a:effectRef idx="2">
+            <a:schemeClr val="accent1"/>
+          </a:effectRef>
+          <a:fontRef idx="minor">
+            <a:schemeClr val="lt1"/>
+          </a:fontRef>
+        </p:style>
+        <p:txBody>
+          <a:bodyPr rtlCol="0" anchor="ctr"/>
+          <a:lstStyle/>
+          <a:p>
+            <a:pPr algn="ctr"/>
+          </a:p>
+        </p:txBody>
+      </p:sp>
+      <p:sp>
+        <p:nvSpPr>
+          <p:cNvPr id="3" name="TextBox 2"/>
+          <p:cNvSpPr txBox="1"/>
+          <p:nvPr/>
+        </p:nvSpPr>
+        <p:spPr>
+          <a:xfrm>
+            <a:off x="700000" y="250000"/>
+            <a:ext cx="11200000" cy="550000"/>
+          </a:xfrm>
+          <a:prstGeom prst="rect">
+            <a:avLst/>
+          </a:prstGeom>
+          <a:noFill/>
+        </p:spPr>
+        <p:txBody>
+          <a:bodyPr wrap="square" anchor="t">
+            <a:spAutoFit/>
+          </a:bodyPr>
+          <a:lstStyle/>
+          <a:p>
+            <a:pPr algn="l"/>
+            <a:r>
+              <a:rPr sz="2200" b="1">
+                <a:solidFill>
+                  <a:srgbClr val="333333"/>
+                </a:solidFill>
+                <a:latin typeface="Open Sans"/>
+                <a:ea typeface="Open Sans"/>
+                <a:cs typeface="Open Sans"/>
+              </a:rPr>
+              <a:t>ОСТРЫЕ РЕАКЦИИ НА СТРЕСС</a:t>
+            </a:r>
+          </a:p>
+        </p:txBody>
+      </p:sp>
+      <p:sp>
+        <p:nvSpPr>
+          <p:cNvPr id="4" name="Rectangle 3"/>
+          <p:cNvSpPr/>
+          <p:nvPr/>
+        </p:nvSpPr>
+        <p:spPr>
+          <a:xfrm>
+            <a:off x="700000" y="850000"/>
+            <a:ext cx="9000000" cy="28000"/>
+          </a:xfrm>
+          <a:prstGeom prst="rect">
+            <a:avLst/>
+          </a:prstGeom>
+          <a:solidFill>
+            <a:srgbClr val="555555"/>
+          </a:solidFill>
+          <a:ln>
+            <a:noFill/>
+          </a:ln>
+        </p:spPr>
+        <p:style>
+          <a:lnRef idx="1">
+            <a:schemeClr val="accent1"/>
+          </a:lnRef>
+          <a:fillRef idx="3">
+            <a:schemeClr val="accent1"/>
+          </a:fillRef>
+          <a:effectRef idx="2">
+            <a:schemeClr val="accent1"/>
+          </a:effectRef>
+          <a:fontRef idx="minor">
+            <a:schemeClr val="lt1"/>
+          </a:fontRef>
+        </p:style>
+        <p:txBody>
+          <a:bodyPr rtlCol="0" anchor="ctr"/>
+          <a:lstStyle/>
+          <a:p>
+            <a:pPr algn="ctr"/>
+          </a:p>
+        </p:txBody>
+      </p:sp>
+      <p:sp>
+        <p:nvSpPr>
+          <p:cNvPr id="5" name="TextBox 4"/>
+          <p:cNvSpPr txBox="1"/>
+          <p:nvPr/>
+        </p:nvSpPr>
+        <p:spPr>
+          <a:xfrm>
+            <a:off x="700000" y="920000"/>
+            <a:ext cx="11000000" cy="350000"/>
+          </a:xfrm>
+          <a:prstGeom prst="rect">
+            <a:avLst/>
+          </a:prstGeom>
+          <a:noFill/>
+        </p:spPr>
+        <p:txBody>
+          <a:bodyPr wrap="square" anchor="t">
+            <a:spAutoFit/>
+          </a:bodyPr>
+          <a:lstStyle/>
+          <a:p>
+            <a:pPr algn="l"/>
+            <a:r>
+              <a:rPr sz="1200" b="0">
+                <a:solidFill>
+                  <a:srgbClr val="666666"/>
+                </a:solidFill>
+                <a:latin typeface="Open Sans"/>
+                <a:ea typeface="Open Sans"/>
+                <a:cs typeface="Open Sans"/>
+              </a:rPr>
+              <a:t>Оказание первой помощи при травмах, ранениях и поражениях, прочих состояниях</a:t>
+            </a:r>
+          </a:p>
+        </p:txBody>
+      </p:sp>
+      <p:sp>
+        <p:nvSpPr>
+          <p:cNvPr id="6" name="Rectangle 5"/>
+          <p:cNvSpPr/>
+          <p:nvPr/>
+        </p:nvSpPr>
+        <p:spPr>
+          <a:xfrm>
+            <a:off x="0" y="2800000"/>
+            <a:ext cx="420000" cy="420000"/>
+          </a:xfrm>
+          <a:prstGeom prst="rect">
+            <a:avLst/>
+          </a:prstGeom>
+          <a:solidFill>
+            <a:srgbClr val="555555"/>
+          </a:solidFill>
+          <a:ln>
+            <a:noFill/>
+          </a:ln>
+        </p:spPr>
+        <p:style>
+          <a:lnRef idx="1">
+            <a:schemeClr val="accent1"/>
+          </a:lnRef>
+          <a:fillRef idx="3">
+            <a:schemeClr val="accent1"/>
+          </a:fillRef>
+          <a:effectRef idx="2">
+            <a:schemeClr val="accent1"/>
+          </a:effectRef>
+          <a:fontRef idx="minor">
+            <a:schemeClr val="lt1"/>
+          </a:fontRef>
+        </p:style>
+        <p:txBody>
+          <a:bodyPr rtlCol="0" anchor="ctr"/>
+          <a:lstStyle/>
+          <a:p>
+            <a:pPr algn="ctr"/>
+          </a:p>
+        </p:txBody>
+      </p:sp>
+      <p:sp>
+        <p:nvSpPr>
+          <p:cNvPr id="7" name="TextBox 6"/>
+          <p:cNvSpPr txBox="1"/>
+          <p:nvPr/>
+        </p:nvSpPr>
+        <p:spPr>
+          <a:xfrm>
+            <a:off x="0" y="2800000"/>
+            <a:ext cx="420000" cy="420000"/>
+          </a:xfrm>
+          <a:prstGeom prst="rect">
+            <a:avLst/>
+          </a:prstGeom>
+          <a:noFill/>
+        </p:spPr>
+        <p:txBody>
+          <a:bodyPr wrap="square" anchor="ctr">
+            <a:spAutoFit/>
+          </a:bodyPr>
+          <a:lstStyle/>
+          <a:p>
+            <a:pPr algn="ctr"/>
+            <a:r>
+              <a:rPr sz="1400" b="1">
+                <a:solidFill>
+                  <a:srgbClr val="FFFFFF"/>
+                </a:solidFill>
+                <a:latin typeface="Open Sans"/>
+                <a:ea typeface="Open Sans"/>
+                <a:cs typeface="Open Sans"/>
+              </a:rPr>
+              <a:t>11</a:t>
+            </a:r>
+          </a:p>
+        </p:txBody>
+      </p:sp>
+      <p:sp>
+        <p:nvSpPr>
+          <p:cNvPr id="8" name="TextBox 7"/>
+          <p:cNvSpPr txBox="1"/>
+          <p:nvPr/>
+        </p:nvSpPr>
+        <p:spPr>
+          <a:xfrm>
+            <a:off x="700000" y="1400000"/>
+            <a:ext cx="5400000" cy="400000"/>
+          </a:xfrm>
+          <a:prstGeom prst="rect">
+            <a:avLst/>
+          </a:prstGeom>
+          <a:noFill/>
+        </p:spPr>
+        <p:txBody>
+          <a:bodyPr wrap="square" anchor="t">
+            <a:spAutoFit/>
+          </a:bodyPr>
+          <a:lstStyle/>
+          <a:p>
+            <a:pPr algn="l"/>
+            <a:r>
+              <a:rPr sz="1400" b="1">
+                <a:solidFill>
+                  <a:srgbClr val="333333"/>
+                </a:solidFill>
+                <a:latin typeface="Open Sans"/>
+                <a:ea typeface="Open Sans"/>
+                <a:cs typeface="Open Sans"/>
+              </a:rPr>
+              <a:t>Возможные реакции</a:t>
+            </a:r>
+          </a:p>
+        </p:txBody>
+      </p:sp>
+      <p:sp>
+        <p:nvSpPr>
+          <p:cNvPr id="9" name="TextBox 8"/>
+          <p:cNvSpPr txBox="1"/>
+          <p:nvPr/>
+        </p:nvSpPr>
+        <p:spPr>
+          <a:xfrm>
+            <a:off x="6600000" y="1400000"/>
+            <a:ext cx="5400000" cy="400000"/>
+          </a:xfrm>
+          <a:prstGeom prst="rect">
+            <a:avLst/>
+          </a:prstGeom>
+          <a:noFill/>
+        </p:spPr>
+        <p:txBody>
+          <a:bodyPr wrap="square" anchor="t">
+            <a:spAutoFit/>
+          </a:bodyPr>
+          <a:lstStyle/>
+          <a:p>
+            <a:pPr algn="l"/>
+            <a:r>
+              <a:rPr sz="1400" b="1">
+                <a:solidFill>
+                  <a:srgbClr val="333333"/>
+                </a:solidFill>
+                <a:latin typeface="Open Sans"/>
+                <a:ea typeface="Open Sans"/>
+                <a:cs typeface="Open Sans"/>
+              </a:rPr>
+              <a:t>Как отвечать</a:t>
+            </a:r>
+          </a:p>
+        </p:txBody>
+      </p:sp>
+      <p:sp>
+        <p:nvSpPr>
+          <p:cNvPr id="10" name="TextBox 9"/>
+          <p:cNvSpPr txBox="1"/>
+          <p:nvPr/>
+        </p:nvSpPr>
+        <p:spPr>
+          <a:xfrm>
+            <a:off x="700000" y="1850000"/>
+            <a:ext cx="5400000" cy="4000000"/>
+          </a:xfrm>
+          <a:prstGeom prst="rect">
+            <a:avLst/>
+          </a:prstGeom>
+          <a:noFill/>
+        </p:spPr>
+        <p:txBody>
+          <a:bodyPr wrap="square">
+            <a:spAutoFit/>
+          </a:bodyPr>
+          <a:lstStyle/>
+          <a:p>
+            <a:pPr algn="l">
+              <a:spcAft>
+                <a:spcPts val="800"/>
+              </a:spcAft>
+            </a:pPr>
+            <a:r>
+              <a:rPr sz="1300" b="0">
+                <a:solidFill>
+                  <a:srgbClr val="333333"/>
+                </a:solidFill>
+                <a:latin typeface="Open Sans"/>
+                <a:ea typeface="Open Sans"/>
+                <a:cs typeface="Open Sans"/>
+              </a:rPr>
+              <a:t>•  страх, плач, тревога и дрожь</a:t>
+            </a:r>
+          </a:p>
+          <a:p>
+            <a:pPr algn="l">
+              <a:spcAft>
+                <a:spcPts val="800"/>
+              </a:spcAft>
+            </a:pPr>
+            <a:r>
+              <a:rPr sz="1300" b="0">
+                <a:solidFill>
+                  <a:srgbClr val="333333"/>
+                </a:solidFill>
+                <a:latin typeface="Open Sans"/>
+                <a:ea typeface="Open Sans"/>
+                <a:cs typeface="Open Sans"/>
+              </a:rPr>
+              <a:t>•  растерянность, молчание или заторможенность</a:t>
+            </a:r>
+          </a:p>
+          <a:p>
+            <a:pPr algn="l">
+              <a:spcAft>
+                <a:spcPts val="800"/>
+              </a:spcAft>
+            </a:pPr>
+            <a:r>
+              <a:rPr sz="1300" b="0">
+                <a:solidFill>
+                  <a:srgbClr val="333333"/>
+                </a:solidFill>
+                <a:latin typeface="Open Sans"/>
+                <a:ea typeface="Open Sans"/>
+                <a:cs typeface="Open Sans"/>
+              </a:rPr>
+              <a:t>•  возбуждение, повторяющиеся действия или агрессия</a:t>
+            </a:r>
+          </a:p>
+          <a:p>
+            <a:pPr algn="l">
+              <a:spcAft>
+                <a:spcPts val="800"/>
+              </a:spcAft>
+            </a:pPr>
+            <a:r>
+              <a:rPr sz="1300" b="0">
+                <a:solidFill>
+                  <a:srgbClr val="333333"/>
+                </a:solidFill>
+                <a:latin typeface="Open Sans"/>
+                <a:ea typeface="Open Sans"/>
+                <a:cs typeface="Open Sans"/>
+              </a:rPr>
+              <a:t>•  сужение внимания и трудности с выполнением инструкций</a:t>
+            </a:r>
+          </a:p>
+        </p:txBody>
+      </p:sp>
+      <p:sp>
+        <p:nvSpPr>
+          <p:cNvPr id="11" name="TextBox 10"/>
+          <p:cNvSpPr txBox="1"/>
+          <p:nvPr/>
+        </p:nvSpPr>
+        <p:spPr>
+          <a:xfrm>
+            <a:off x="6600000" y="1850000"/>
+            <a:ext cx="5400000" cy="4000000"/>
+          </a:xfrm>
+          <a:prstGeom prst="rect">
+            <a:avLst/>
+          </a:prstGeom>
+          <a:noFill/>
+        </p:spPr>
+        <p:txBody>
+          <a:bodyPr wrap="square">
+            <a:spAutoFit/>
+          </a:bodyPr>
+          <a:lstStyle/>
+          <a:p>
+            <a:pPr algn="l">
+              <a:spcAft>
+                <a:spcPts val="800"/>
+              </a:spcAft>
+            </a:pPr>
+            <a:r>
+              <a:rPr sz="1300" b="0">
+                <a:solidFill>
+                  <a:srgbClr val="333333"/>
+                </a:solidFill>
+                <a:latin typeface="Open Sans"/>
+                <a:ea typeface="Open Sans"/>
+                <a:cs typeface="Open Sans"/>
+              </a:rPr>
+              <a:t>•  обеспечьте физическую безопасность и уменьшите число раздражителей</a:t>
+            </a:r>
+          </a:p>
+          <a:p>
+            <a:pPr algn="l">
+              <a:spcAft>
+                <a:spcPts val="800"/>
+              </a:spcAft>
+            </a:pPr>
+            <a:r>
+              <a:rPr sz="1300" b="0">
+                <a:solidFill>
+                  <a:srgbClr val="333333"/>
+                </a:solidFill>
+                <a:latin typeface="Open Sans"/>
+                <a:ea typeface="Open Sans"/>
+                <a:cs typeface="Open Sans"/>
+              </a:rPr>
+              <a:t>•  говорите по одному действию за раз</a:t>
+            </a:r>
+          </a:p>
+          <a:p>
+            <a:pPr algn="l">
+              <a:spcAft>
+                <a:spcPts val="800"/>
+              </a:spcAft>
+            </a:pPr>
+            <a:r>
+              <a:rPr sz="1300" b="0">
+                <a:solidFill>
+                  <a:srgbClr val="333333"/>
+                </a:solidFill>
+                <a:latin typeface="Open Sans"/>
+                <a:ea typeface="Open Sans"/>
+                <a:cs typeface="Open Sans"/>
+              </a:rPr>
+              <a:t>•  выслушивайте без давления и спора</a:t>
+            </a:r>
+          </a:p>
+          <a:p>
+            <a:pPr algn="l">
+              <a:spcAft>
+                <a:spcPts val="800"/>
+              </a:spcAft>
+            </a:pPr>
+            <a:r>
+              <a:rPr sz="1300" b="0">
+                <a:solidFill>
+                  <a:srgbClr val="333333"/>
+                </a:solidFill>
+                <a:latin typeface="Open Sans"/>
+                <a:ea typeface="Open Sans"/>
+                <a:cs typeface="Open Sans"/>
+              </a:rPr>
+              <a:t>•  сохраняйте уважительную дистанцию и привлекайте помощь при угрозе</a:t>
+            </a:r>
+          </a:p>
+        </p:txBody>
+      </p:sp>
+    </p:spTree>
+  </p:cSld>
+  <p:clrMapOvr>
+    <a:masterClrMapping/>
+  </p:clrMapOvr>
+</p:sld>
+</file>
+
+<file path=ppt/slides/slide12.xml><?xml version="1.0" encoding="utf-8"?>
+<p:sld xmlns:a="http://schemas.openxmlformats.org/drawingml/2006/main" xmlns:p="http://schemas.openxmlformats.org/presentationml/2006/main" xmlns:r="http://schemas.openxmlformats.org/officeDocument/2006/relationships">
+  <p:cSld>
+    <p:spTree>
+      <p:nvGrpSpPr>
+        <p:cNvPr id="1" name=""/>
+        <p:cNvGrpSpPr/>
+        <p:nvPr/>
+      </p:nvGrpSpPr>
+      <p:grpSpPr/>
+      <p:sp>
+        <p:nvSpPr>
+          <p:cNvPr id="2" name="Rectangle 1"/>
+          <p:cNvSpPr/>
+          <p:nvPr/>
+        </p:nvSpPr>
+        <p:spPr>
+          <a:xfrm>
+            <a:off x="0" y="0"/>
+            <a:ext cx="12191695" cy="6858000"/>
+          </a:xfrm>
+          <a:prstGeom prst="rect">
+            <a:avLst/>
+          </a:prstGeom>
+          <a:solidFill>
+            <a:srgbClr val="FFFFFF"/>
+          </a:solidFill>
+          <a:ln>
+            <a:noFill/>
+          </a:ln>
+        </p:spPr>
+        <p:style>
+          <a:lnRef idx="1">
+            <a:schemeClr val="accent1"/>
+          </a:lnRef>
+          <a:fillRef idx="3">
+            <a:schemeClr val="accent1"/>
+          </a:fillRef>
+          <a:effectRef idx="2">
+            <a:schemeClr val="accent1"/>
+          </a:effectRef>
+          <a:fontRef idx="minor">
+            <a:schemeClr val="lt1"/>
+          </a:fontRef>
+        </p:style>
+        <p:txBody>
+          <a:bodyPr rtlCol="0" anchor="ctr"/>
+          <a:lstStyle/>
+          <a:p>
+            <a:pPr algn="ctr"/>
+          </a:p>
+        </p:txBody>
+      </p:sp>
+      <p:sp>
+        <p:nvSpPr>
+          <p:cNvPr id="3" name="TextBox 2"/>
+          <p:cNvSpPr txBox="1"/>
+          <p:nvPr/>
+        </p:nvSpPr>
+        <p:spPr>
+          <a:xfrm>
+            <a:off x="700000" y="250000"/>
+            <a:ext cx="11200000" cy="550000"/>
+          </a:xfrm>
+          <a:prstGeom prst="rect">
+            <a:avLst/>
+          </a:prstGeom>
+          <a:noFill/>
+        </p:spPr>
+        <p:txBody>
+          <a:bodyPr wrap="square" anchor="t">
+            <a:spAutoFit/>
+          </a:bodyPr>
+          <a:lstStyle/>
+          <a:p>
+            <a:pPr algn="l"/>
+            <a:r>
+              <a:rPr sz="2200" b="1">
+                <a:solidFill>
+                  <a:srgbClr val="333333"/>
+                </a:solidFill>
+                <a:latin typeface="Open Sans"/>
+                <a:ea typeface="Open Sans"/>
+                <a:cs typeface="Open Sans"/>
+              </a:rPr>
+              <a:t>ЧЕГО ИЗБЕГАТЬ ПРИ ПОДДЕРЖКЕ</a:t>
+            </a:r>
+          </a:p>
+        </p:txBody>
+      </p:sp>
+      <p:sp>
+        <p:nvSpPr>
+          <p:cNvPr id="4" name="Rectangle 3"/>
+          <p:cNvSpPr/>
+          <p:nvPr/>
+        </p:nvSpPr>
+        <p:spPr>
+          <a:xfrm>
+            <a:off x="700000" y="850000"/>
+            <a:ext cx="9000000" cy="28000"/>
+          </a:xfrm>
+          <a:prstGeom prst="rect">
+            <a:avLst/>
+          </a:prstGeom>
+          <a:solidFill>
+            <a:srgbClr val="555555"/>
+          </a:solidFill>
+          <a:ln>
+            <a:noFill/>
+          </a:ln>
+        </p:spPr>
+        <p:style>
+          <a:lnRef idx="1">
+            <a:schemeClr val="accent1"/>
+          </a:lnRef>
+          <a:fillRef idx="3">
+            <a:schemeClr val="accent1"/>
+          </a:fillRef>
+          <a:effectRef idx="2">
+            <a:schemeClr val="accent1"/>
+          </a:effectRef>
+          <a:fontRef idx="minor">
+            <a:schemeClr val="lt1"/>
+          </a:fontRef>
+        </p:style>
+        <p:txBody>
+          <a:bodyPr rtlCol="0" anchor="ctr"/>
+          <a:lstStyle/>
+          <a:p>
+            <a:pPr algn="ctr"/>
+          </a:p>
+        </p:txBody>
+      </p:sp>
+      <p:sp>
+        <p:nvSpPr>
+          <p:cNvPr id="5" name="TextBox 4"/>
+          <p:cNvSpPr txBox="1"/>
+          <p:nvPr/>
+        </p:nvSpPr>
+        <p:spPr>
+          <a:xfrm>
+            <a:off x="700000" y="920000"/>
+            <a:ext cx="11000000" cy="350000"/>
+          </a:xfrm>
+          <a:prstGeom prst="rect">
+            <a:avLst/>
+          </a:prstGeom>
+          <a:noFill/>
+        </p:spPr>
+        <p:txBody>
+          <a:bodyPr wrap="square" anchor="t">
+            <a:spAutoFit/>
+          </a:bodyPr>
+          <a:lstStyle/>
+          <a:p>
+            <a:pPr algn="l"/>
+            <a:r>
+              <a:rPr sz="1200" b="0">
+                <a:solidFill>
+                  <a:srgbClr val="666666"/>
+                </a:solidFill>
+                <a:latin typeface="Open Sans"/>
+                <a:ea typeface="Open Sans"/>
+                <a:cs typeface="Open Sans"/>
+              </a:rPr>
+              <a:t>Оказание первой помощи при травмах, ранениях и поражениях, прочих состояниях</a:t>
+            </a:r>
+          </a:p>
+        </p:txBody>
+      </p:sp>
+      <p:sp>
+        <p:nvSpPr>
+          <p:cNvPr id="6" name="Rectangle 5"/>
+          <p:cNvSpPr/>
+          <p:nvPr/>
+        </p:nvSpPr>
+        <p:spPr>
+          <a:xfrm>
+            <a:off x="0" y="2800000"/>
+            <a:ext cx="420000" cy="420000"/>
+          </a:xfrm>
+          <a:prstGeom prst="rect">
+            <a:avLst/>
+          </a:prstGeom>
+          <a:solidFill>
+            <a:srgbClr val="555555"/>
+          </a:solidFill>
+          <a:ln>
+            <a:noFill/>
+          </a:ln>
+        </p:spPr>
+        <p:style>
+          <a:lnRef idx="1">
+            <a:schemeClr val="accent1"/>
+          </a:lnRef>
+          <a:fillRef idx="3">
+            <a:schemeClr val="accent1"/>
+          </a:fillRef>
+          <a:effectRef idx="2">
+            <a:schemeClr val="accent1"/>
+          </a:effectRef>
+          <a:fontRef idx="minor">
+            <a:schemeClr val="lt1"/>
+          </a:fontRef>
+        </p:style>
+        <p:txBody>
+          <a:bodyPr rtlCol="0" anchor="ctr"/>
+          <a:lstStyle/>
+          <a:p>
+            <a:pPr algn="ctr"/>
+          </a:p>
+        </p:txBody>
+      </p:sp>
+      <p:sp>
+        <p:nvSpPr>
+          <p:cNvPr id="7" name="TextBox 6"/>
+          <p:cNvSpPr txBox="1"/>
+          <p:nvPr/>
+        </p:nvSpPr>
+        <p:spPr>
+          <a:xfrm>
+            <a:off x="0" y="2800000"/>
+            <a:ext cx="420000" cy="420000"/>
+          </a:xfrm>
+          <a:prstGeom prst="rect">
+            <a:avLst/>
+          </a:prstGeom>
+          <a:noFill/>
+        </p:spPr>
+        <p:txBody>
+          <a:bodyPr wrap="square" anchor="ctr">
+            <a:spAutoFit/>
+          </a:bodyPr>
+          <a:lstStyle/>
+          <a:p>
+            <a:pPr algn="ctr"/>
+            <a:r>
+              <a:rPr sz="1400" b="1">
+                <a:solidFill>
+                  <a:srgbClr val="FFFFFF"/>
+                </a:solidFill>
+                <a:latin typeface="Open Sans"/>
+                <a:ea typeface="Open Sans"/>
+                <a:cs typeface="Open Sans"/>
+              </a:rPr>
+              <a:t>12</a:t>
+            </a:r>
+          </a:p>
+        </p:txBody>
+      </p:sp>
+      <p:sp>
+        <p:nvSpPr>
+          <p:cNvPr id="8" name="TextBox 7"/>
+          <p:cNvSpPr txBox="1"/>
+          <p:nvPr/>
+        </p:nvSpPr>
+        <p:spPr>
+          <a:xfrm>
+            <a:off x="700000" y="1450000"/>
+            <a:ext cx="11000000" cy="4000000"/>
+          </a:xfrm>
+          <a:prstGeom prst="rect">
+            <a:avLst/>
+          </a:prstGeom>
+          <a:noFill/>
+        </p:spPr>
+        <p:txBody>
+          <a:bodyPr wrap="square">
+            <a:spAutoFit/>
+          </a:bodyPr>
+          <a:lstStyle/>
+          <a:p>
+            <a:pPr algn="l">
+              <a:spcAft>
+                <a:spcPts val="800"/>
+              </a:spcAft>
+            </a:pPr>
+            <a:r>
+              <a:rPr sz="1400" b="1">
+                <a:solidFill>
+                  <a:srgbClr val="CC0000"/>
+                </a:solidFill>
+                <a:latin typeface="Open Sans"/>
+                <a:ea typeface="Open Sans"/>
+                <a:cs typeface="Open Sans"/>
+              </a:rPr>
+              <a:t>•  Не обесценивайте страх, боль и переживания.</a:t>
+            </a:r>
+          </a:p>
+          <a:p>
+            <a:pPr algn="l">
+              <a:spcAft>
+                <a:spcPts val="800"/>
+              </a:spcAft>
+            </a:pPr>
+            <a:r>
+              <a:rPr sz="1400" b="1">
+                <a:solidFill>
+                  <a:srgbClr val="CC0000"/>
+                </a:solidFill>
+                <a:latin typeface="Open Sans"/>
+                <a:ea typeface="Open Sans"/>
+                <a:cs typeface="Open Sans"/>
+              </a:rPr>
+              <a:t>•  Не требуйте «взять себя в руки» и не спорьте с чувствами.</a:t>
+            </a:r>
+          </a:p>
+          <a:p>
+            <a:pPr algn="l">
+              <a:spcAft>
+                <a:spcPts val="800"/>
+              </a:spcAft>
+            </a:pPr>
+            <a:r>
+              <a:rPr sz="1400" b="1">
+                <a:solidFill>
+                  <a:srgbClr val="CC0000"/>
+                </a:solidFill>
+                <a:latin typeface="Open Sans"/>
+                <a:ea typeface="Open Sans"/>
+                <a:cs typeface="Open Sans"/>
+              </a:rPr>
+              <a:t>•  Не заставляйте подробно рассказывать о происшествии.</a:t>
+            </a:r>
+          </a:p>
+          <a:p>
+            <a:pPr algn="l">
+              <a:spcAft>
+                <a:spcPts val="800"/>
+              </a:spcAft>
+            </a:pPr>
+            <a:r>
+              <a:rPr sz="1400" b="1">
+                <a:solidFill>
+                  <a:srgbClr val="CC0000"/>
+                </a:solidFill>
+                <a:latin typeface="Open Sans"/>
+                <a:ea typeface="Open Sans"/>
+                <a:cs typeface="Open Sans"/>
+              </a:rPr>
+              <a:t>•  Не обещайте результат, в котором не уверены.</a:t>
+            </a:r>
+          </a:p>
+          <a:p>
+            <a:pPr algn="l">
+              <a:spcAft>
+                <a:spcPts val="800"/>
+              </a:spcAft>
+            </a:pPr>
+            <a:r>
+              <a:rPr sz="1400" b="1">
+                <a:solidFill>
+                  <a:srgbClr val="CC0000"/>
+                </a:solidFill>
+                <a:latin typeface="Open Sans"/>
+                <a:ea typeface="Open Sans"/>
+                <a:cs typeface="Open Sans"/>
+              </a:rPr>
+              <a:t>•  Не сообщайте диагнозы и пугающие предположения.</a:t>
+            </a:r>
+          </a:p>
+          <a:p>
+            <a:pPr algn="l">
+              <a:spcAft>
+                <a:spcPts val="800"/>
+              </a:spcAft>
+            </a:pPr>
+            <a:r>
+              <a:rPr sz="1400" b="1">
+                <a:solidFill>
+                  <a:srgbClr val="CC0000"/>
+                </a:solidFill>
+                <a:latin typeface="Open Sans"/>
+                <a:ea typeface="Open Sans"/>
+                <a:cs typeface="Open Sans"/>
+              </a:rPr>
+              <a:t>•  Не оставляйте человека одного без необходимости.</a:t>
+            </a:r>
+          </a:p>
+        </p:txBody>
+      </p:sp>
+    </p:spTree>
+  </p:cSld>
+  <p:clrMapOvr>
+    <a:masterClrMapping/>
+  </p:clrMapOvr>
+</p:sld>
+</file>
+
+<file path=ppt/slides/slide13.xml><?xml version="1.0" encoding="utf-8"?>
+<p:sld xmlns:a="http://schemas.openxmlformats.org/drawingml/2006/main" xmlns:p="http://schemas.openxmlformats.org/presentationml/2006/main" xmlns:r="http://schemas.openxmlformats.org/officeDocument/2006/relationships">
+  <p:cSld>
+    <p:spTree>
+      <p:nvGrpSpPr>
+        <p:cNvPr id="1" name=""/>
+        <p:cNvGrpSpPr/>
+        <p:nvPr/>
+      </p:nvGrpSpPr>
+      <p:grpSpPr/>
+      <p:sp>
+        <p:nvSpPr>
+          <p:cNvPr id="2" name="Rectangle 1"/>
+          <p:cNvSpPr/>
+          <p:nvPr/>
+        </p:nvSpPr>
+        <p:spPr>
+          <a:xfrm>
+            <a:off x="0" y="0"/>
+            <a:ext cx="12191695" cy="6858000"/>
+          </a:xfrm>
+          <a:prstGeom prst="rect">
+            <a:avLst/>
+          </a:prstGeom>
+          <a:solidFill>
+            <a:srgbClr val="FFFFFF"/>
+          </a:solidFill>
+          <a:ln>
+            <a:noFill/>
+          </a:ln>
+        </p:spPr>
+        <p:style>
+          <a:lnRef idx="1">
+            <a:schemeClr val="accent1"/>
+          </a:lnRef>
+          <a:fillRef idx="3">
+            <a:schemeClr val="accent1"/>
+          </a:fillRef>
+          <a:effectRef idx="2">
+            <a:schemeClr val="accent1"/>
+          </a:effectRef>
+          <a:fontRef idx="minor">
+            <a:schemeClr val="lt1"/>
+          </a:fontRef>
+        </p:style>
+        <p:txBody>
+          <a:bodyPr rtlCol="0" anchor="ctr"/>
+          <a:lstStyle/>
+          <a:p>
+            <a:pPr algn="ctr"/>
+          </a:p>
+        </p:txBody>
+      </p:sp>
+      <p:sp>
+        <p:nvSpPr>
+          <p:cNvPr id="3" name="TextBox 2"/>
+          <p:cNvSpPr txBox="1"/>
+          <p:nvPr/>
+        </p:nvSpPr>
+        <p:spPr>
+          <a:xfrm>
+            <a:off x="700000" y="250000"/>
+            <a:ext cx="11200000" cy="550000"/>
+          </a:xfrm>
+          <a:prstGeom prst="rect">
+            <a:avLst/>
+          </a:prstGeom>
+          <a:noFill/>
+        </p:spPr>
+        <p:txBody>
+          <a:bodyPr wrap="square" anchor="t">
+            <a:spAutoFit/>
+          </a:bodyPr>
+          <a:lstStyle/>
+          <a:p>
+            <a:pPr algn="l"/>
+            <a:r>
+              <a:rPr sz="2200" b="1">
+                <a:solidFill>
+                  <a:srgbClr val="333333"/>
+                </a:solidFill>
+                <a:latin typeface="Open Sans"/>
+                <a:ea typeface="Open Sans"/>
+                <a:cs typeface="Open Sans"/>
+              </a:rPr>
+              <a:t>ГЛАВНОЕ ЗАПОМНИТЬ</a:t>
+            </a:r>
+          </a:p>
+        </p:txBody>
+      </p:sp>
+      <p:sp>
+        <p:nvSpPr>
+          <p:cNvPr id="4" name="Rectangle 3"/>
+          <p:cNvSpPr/>
+          <p:nvPr/>
+        </p:nvSpPr>
+        <p:spPr>
+          <a:xfrm>
+            <a:off x="700000" y="850000"/>
+            <a:ext cx="9000000" cy="28000"/>
+          </a:xfrm>
+          <a:prstGeom prst="rect">
+            <a:avLst/>
+          </a:prstGeom>
+          <a:solidFill>
+            <a:srgbClr val="555555"/>
+          </a:solidFill>
+          <a:ln>
+            <a:noFill/>
+          </a:ln>
+        </p:spPr>
+        <p:style>
+          <a:lnRef idx="1">
+            <a:schemeClr val="accent1"/>
+          </a:lnRef>
+          <a:fillRef idx="3">
+            <a:schemeClr val="accent1"/>
+          </a:fillRef>
+          <a:effectRef idx="2">
+            <a:schemeClr val="accent1"/>
+          </a:effectRef>
+          <a:fontRef idx="minor">
+            <a:schemeClr val="lt1"/>
+          </a:fontRef>
+        </p:style>
+        <p:txBody>
+          <a:bodyPr rtlCol="0" anchor="ctr"/>
+          <a:lstStyle/>
+          <a:p>
+            <a:pPr algn="ctr"/>
+          </a:p>
+        </p:txBody>
+      </p:sp>
+      <p:sp>
+        <p:nvSpPr>
+          <p:cNvPr id="5" name="TextBox 4"/>
+          <p:cNvSpPr txBox="1"/>
+          <p:nvPr/>
+        </p:nvSpPr>
+        <p:spPr>
+          <a:xfrm>
+            <a:off x="700000" y="920000"/>
+            <a:ext cx="11000000" cy="350000"/>
+          </a:xfrm>
+          <a:prstGeom prst="rect">
+            <a:avLst/>
+          </a:prstGeom>
+          <a:noFill/>
+        </p:spPr>
+        <p:txBody>
+          <a:bodyPr wrap="square" anchor="t">
+            <a:spAutoFit/>
+          </a:bodyPr>
+          <a:lstStyle/>
+          <a:p>
+            <a:pPr algn="l"/>
+            <a:r>
+              <a:rPr sz="1200" b="0">
+                <a:solidFill>
+                  <a:srgbClr val="666666"/>
+                </a:solidFill>
+                <a:latin typeface="Open Sans"/>
+                <a:ea typeface="Open Sans"/>
+                <a:cs typeface="Open Sans"/>
+              </a:rPr>
+              <a:t>Оказание первой помощи при травмах, ранениях и поражениях, прочих состояниях</a:t>
+            </a:r>
+          </a:p>
+        </p:txBody>
+      </p:sp>
+      <p:sp>
+        <p:nvSpPr>
+          <p:cNvPr id="6" name="Rectangle 5"/>
+          <p:cNvSpPr/>
+          <p:nvPr/>
+        </p:nvSpPr>
+        <p:spPr>
+          <a:xfrm>
+            <a:off x="0" y="2800000"/>
+            <a:ext cx="420000" cy="420000"/>
+          </a:xfrm>
+          <a:prstGeom prst="rect">
+            <a:avLst/>
+          </a:prstGeom>
+          <a:solidFill>
+            <a:srgbClr val="555555"/>
+          </a:solidFill>
+          <a:ln>
+            <a:noFill/>
+          </a:ln>
+        </p:spPr>
+        <p:style>
+          <a:lnRef idx="1">
+            <a:schemeClr val="accent1"/>
+          </a:lnRef>
+          <a:fillRef idx="3">
+            <a:schemeClr val="accent1"/>
+          </a:fillRef>
+          <a:effectRef idx="2">
+            <a:schemeClr val="accent1"/>
+          </a:effectRef>
+          <a:fontRef idx="minor">
+            <a:schemeClr val="lt1"/>
+          </a:fontRef>
+        </p:style>
+        <p:txBody>
+          <a:bodyPr rtlCol="0" anchor="ctr"/>
+          <a:lstStyle/>
+          <a:p>
+            <a:pPr algn="ctr"/>
+          </a:p>
+        </p:txBody>
+      </p:sp>
+      <p:sp>
+        <p:nvSpPr>
+          <p:cNvPr id="7" name="TextBox 6"/>
+          <p:cNvSpPr txBox="1"/>
+          <p:nvPr/>
+        </p:nvSpPr>
+        <p:spPr>
+          <a:xfrm>
+            <a:off x="0" y="2800000"/>
+            <a:ext cx="420000" cy="420000"/>
+          </a:xfrm>
+          <a:prstGeom prst="rect">
+            <a:avLst/>
+          </a:prstGeom>
+          <a:noFill/>
+        </p:spPr>
+        <p:txBody>
+          <a:bodyPr wrap="square" anchor="ctr">
+            <a:spAutoFit/>
+          </a:bodyPr>
+          <a:lstStyle/>
+          <a:p>
+            <a:pPr algn="ctr"/>
+            <a:r>
+              <a:rPr sz="1400" b="1">
+                <a:solidFill>
+                  <a:srgbClr val="FFFFFF"/>
+                </a:solidFill>
+                <a:latin typeface="Open Sans"/>
+                <a:ea typeface="Open Sans"/>
+                <a:cs typeface="Open Sans"/>
+              </a:rPr>
+              <a:t>13</a:t>
+            </a:r>
+          </a:p>
+        </p:txBody>
+      </p:sp>
+      <p:sp>
+        <p:nvSpPr>
+          <p:cNvPr id="8" name="Rectangle 7"/>
+          <p:cNvSpPr/>
+          <p:nvPr/>
+        </p:nvSpPr>
+        <p:spPr>
+          <a:xfrm>
+            <a:off x="700000" y="1450000"/>
+            <a:ext cx="11000000" cy="850000"/>
+          </a:xfrm>
+          <a:prstGeom prst="rect">
+            <a:avLst/>
+          </a:prstGeom>
+          <a:solidFill>
+            <a:srgbClr val="FFFFFF"/>
+          </a:solidFill>
+          <a:ln w="12700">
+            <a:solidFill>
+              <a:srgbClr val="999999"/>
+            </a:solidFill>
+          </a:ln>
+        </p:spPr>
+        <p:style>
+          <a:lnRef idx="1">
+            <a:schemeClr val="accent1"/>
+          </a:lnRef>
+          <a:fillRef idx="3">
+            <a:schemeClr val="accent1"/>
+          </a:fillRef>
+          <a:effectRef idx="2">
+            <a:schemeClr val="accent1"/>
+          </a:effectRef>
+          <a:fontRef idx="minor">
+            <a:schemeClr val="lt1"/>
+          </a:fontRef>
+        </p:style>
+        <p:txBody>
+          <a:bodyPr rtlCol="0" anchor="ctr"/>
+          <a:lstStyle/>
+          <a:p>
+            <a:pPr algn="ctr"/>
+          </a:p>
+        </p:txBody>
+      </p:sp>
+      <p:sp>
+        <p:nvSpPr>
+          <p:cNvPr id="9" name="Rectangle 8"/>
+          <p:cNvSpPr/>
+          <p:nvPr/>
+        </p:nvSpPr>
+        <p:spPr>
+          <a:xfrm>
+            <a:off x="700000" y="1450000"/>
+            <a:ext cx="90000" cy="850000"/>
+          </a:xfrm>
+          <a:prstGeom prst="rect">
+            <a:avLst/>
+          </a:prstGeom>
+          <a:solidFill>
+            <a:srgbClr val="CC0000"/>
+          </a:solidFill>
+          <a:ln>
+            <a:noFill/>
+          </a:ln>
+        </p:spPr>
+        <p:style>
+          <a:lnRef idx="1">
+            <a:schemeClr val="accent1"/>
+          </a:lnRef>
+          <a:fillRef idx="3">
+            <a:schemeClr val="accent1"/>
+          </a:fillRef>
+          <a:effectRef idx="2">
+            <a:schemeClr val="accent1"/>
+          </a:effectRef>
+          <a:fontRef idx="minor">
+            <a:schemeClr val="lt1"/>
+          </a:fontRef>
+        </p:style>
+        <p:txBody>
+          <a:bodyPr rtlCol="0" anchor="ctr"/>
+          <a:lstStyle/>
+          <a:p>
+            <a:pPr algn="ctr"/>
+          </a:p>
+        </p:txBody>
+      </p:sp>
+      <p:sp>
+        <p:nvSpPr>
+          <p:cNvPr id="10" name="TextBox 9"/>
+          <p:cNvSpPr txBox="1"/>
+          <p:nvPr/>
+        </p:nvSpPr>
+        <p:spPr>
+          <a:xfrm>
+            <a:off x="1000000" y="1530000"/>
+            <a:ext cx="10400000" cy="690000"/>
+          </a:xfrm>
+          <a:prstGeom prst="rect">
+            <a:avLst/>
+          </a:prstGeom>
+          <a:noFill/>
+        </p:spPr>
+        <p:txBody>
+          <a:bodyPr wrap="square" anchor="ctr">
+            <a:spAutoFit/>
+          </a:bodyPr>
+          <a:lstStyle/>
+          <a:p>
+            <a:pPr algn="l"/>
+            <a:r>
+              <a:rPr sz="1300" b="0">
+                <a:solidFill>
+                  <a:srgbClr val="333333"/>
+                </a:solidFill>
+                <a:latin typeface="Open Sans"/>
+                <a:ea typeface="Open Sans"/>
+                <a:cs typeface="Open Sans"/>
+              </a:rPr>
+              <a:t>Положение должно облегчать дыхание и не усиливать травму</a:t>
+            </a:r>
+          </a:p>
+        </p:txBody>
+      </p:sp>
+      <p:sp>
+        <p:nvSpPr>
+          <p:cNvPr id="11" name="Rectangle 10"/>
+          <p:cNvSpPr/>
+          <p:nvPr/>
+        </p:nvSpPr>
+        <p:spPr>
+          <a:xfrm>
+            <a:off x="700000" y="2380000"/>
+            <a:ext cx="11000000" cy="850000"/>
+          </a:xfrm>
+          <a:prstGeom prst="rect">
+            <a:avLst/>
+          </a:prstGeom>
+          <a:solidFill>
+            <a:srgbClr val="FFFFFF"/>
+          </a:solidFill>
+          <a:ln w="12700">
+            <a:solidFill>
+              <a:srgbClr val="999999"/>
+            </a:solidFill>
+          </a:ln>
+        </p:spPr>
+        <p:style>
+          <a:lnRef idx="1">
+            <a:schemeClr val="accent1"/>
+          </a:lnRef>
+          <a:fillRef idx="3">
+            <a:schemeClr val="accent1"/>
+          </a:fillRef>
+          <a:effectRef idx="2">
+            <a:schemeClr val="accent1"/>
+          </a:effectRef>
+          <a:fontRef idx="minor">
+            <a:schemeClr val="lt1"/>
+          </a:fontRef>
+        </p:style>
+        <p:txBody>
+          <a:bodyPr rtlCol="0" anchor="ctr"/>
+          <a:lstStyle/>
+          <a:p>
+            <a:pPr algn="ctr"/>
+          </a:p>
+        </p:txBody>
+      </p:sp>
+      <p:sp>
+        <p:nvSpPr>
+          <p:cNvPr id="12" name="Rectangle 11"/>
+          <p:cNvSpPr/>
+          <p:nvPr/>
+        </p:nvSpPr>
+        <p:spPr>
+          <a:xfrm>
+            <a:off x="700000" y="2380000"/>
+            <a:ext cx="90000" cy="850000"/>
+          </a:xfrm>
+          <a:prstGeom prst="rect">
+            <a:avLst/>
+          </a:prstGeom>
+          <a:solidFill>
+            <a:srgbClr val="CC0000"/>
+          </a:solidFill>
+          <a:ln>
+            <a:noFill/>
+          </a:ln>
+        </p:spPr>
+        <p:style>
+          <a:lnRef idx="1">
+            <a:schemeClr val="accent1"/>
+          </a:lnRef>
+          <a:fillRef idx="3">
+            <a:schemeClr val="accent1"/>
+          </a:fillRef>
+          <a:effectRef idx="2">
+            <a:schemeClr val="accent1"/>
+          </a:effectRef>
+          <a:fontRef idx="minor">
+            <a:schemeClr val="lt1"/>
+          </a:fontRef>
+        </p:style>
+        <p:txBody>
+          <a:bodyPr rtlCol="0" anchor="ctr"/>
+          <a:lstStyle/>
+          <a:p>
+            <a:pPr algn="ctr"/>
+          </a:p>
+        </p:txBody>
+      </p:sp>
+      <p:sp>
+        <p:nvSpPr>
+          <p:cNvPr id="13" name="TextBox 12"/>
+          <p:cNvSpPr txBox="1"/>
+          <p:nvPr/>
+        </p:nvSpPr>
+        <p:spPr>
+          <a:xfrm>
+            <a:off x="1000000" y="2460000"/>
+            <a:ext cx="10400000" cy="690000"/>
+          </a:xfrm>
+          <a:prstGeom prst="rect">
+            <a:avLst/>
+          </a:prstGeom>
+          <a:noFill/>
+        </p:spPr>
+        <p:txBody>
+          <a:bodyPr wrap="square" anchor="ctr">
+            <a:spAutoFit/>
+          </a:bodyPr>
+          <a:lstStyle/>
+          <a:p>
+            <a:pPr algn="l"/>
+            <a:r>
+              <a:rPr sz="1300" b="0">
+                <a:solidFill>
+                  <a:srgbClr val="333333"/>
+                </a:solidFill>
+                <a:latin typeface="Open Sans"/>
+                <a:ea typeface="Open Sans"/>
+                <a:cs typeface="Open Sans"/>
+              </a:rPr>
+              <a:t>Без сознания, но при нормальном дыхании — на бок</a:t>
+            </a:r>
+          </a:p>
+        </p:txBody>
+      </p:sp>
+      <p:sp>
+        <p:nvSpPr>
+          <p:cNvPr id="14" name="Rectangle 13"/>
+          <p:cNvSpPr/>
+          <p:nvPr/>
+        </p:nvSpPr>
+        <p:spPr>
+          <a:xfrm>
+            <a:off x="700000" y="3310000"/>
+            <a:ext cx="11000000" cy="850000"/>
+          </a:xfrm>
+          <a:prstGeom prst="rect">
+            <a:avLst/>
+          </a:prstGeom>
+          <a:solidFill>
+            <a:srgbClr val="FFFFFF"/>
+          </a:solidFill>
+          <a:ln w="12700">
+            <a:solidFill>
+              <a:srgbClr val="999999"/>
+            </a:solidFill>
+          </a:ln>
+        </p:spPr>
+        <p:style>
+          <a:lnRef idx="1">
+            <a:schemeClr val="accent1"/>
+          </a:lnRef>
+          <a:fillRef idx="3">
+            <a:schemeClr val="accent1"/>
+          </a:fillRef>
+          <a:effectRef idx="2">
+            <a:schemeClr val="accent1"/>
+          </a:effectRef>
+          <a:fontRef idx="minor">
+            <a:schemeClr val="lt1"/>
+          </a:fontRef>
+        </p:style>
+        <p:txBody>
+          <a:bodyPr rtlCol="0" anchor="ctr"/>
+          <a:lstStyle/>
+          <a:p>
+            <a:pPr algn="ctr"/>
+          </a:p>
+        </p:txBody>
+      </p:sp>
+      <p:sp>
+        <p:nvSpPr>
+          <p:cNvPr id="15" name="Rectangle 14"/>
+          <p:cNvSpPr/>
+          <p:nvPr/>
+        </p:nvSpPr>
+        <p:spPr>
+          <a:xfrm>
+            <a:off x="700000" y="3310000"/>
+            <a:ext cx="90000" cy="850000"/>
+          </a:xfrm>
+          <a:prstGeom prst="rect">
+            <a:avLst/>
+          </a:prstGeom>
+          <a:solidFill>
+            <a:srgbClr val="CC0000"/>
+          </a:solidFill>
+          <a:ln>
+            <a:noFill/>
+          </a:ln>
+        </p:spPr>
+        <p:style>
+          <a:lnRef idx="1">
+            <a:schemeClr val="accent1"/>
+          </a:lnRef>
+          <a:fillRef idx="3">
+            <a:schemeClr val="accent1"/>
+          </a:fillRef>
+          <a:effectRef idx="2">
+            <a:schemeClr val="accent1"/>
+          </a:effectRef>
+          <a:fontRef idx="minor">
+            <a:schemeClr val="lt1"/>
+          </a:fontRef>
+        </p:style>
+        <p:txBody>
+          <a:bodyPr rtlCol="0" anchor="ctr"/>
+          <a:lstStyle/>
+          <a:p>
+            <a:pPr algn="ctr"/>
+          </a:p>
+        </p:txBody>
+      </p:sp>
+      <p:sp>
+        <p:nvSpPr>
+          <p:cNvPr id="16" name="TextBox 15"/>
+          <p:cNvSpPr txBox="1"/>
+          <p:nvPr/>
+        </p:nvSpPr>
+        <p:spPr>
+          <a:xfrm>
+            <a:off x="1000000" y="3390000"/>
+            <a:ext cx="10400000" cy="690000"/>
+          </a:xfrm>
+          <a:prstGeom prst="rect">
+            <a:avLst/>
+          </a:prstGeom>
+          <a:noFill/>
+        </p:spPr>
+        <p:txBody>
+          <a:bodyPr wrap="square" anchor="ctr">
+            <a:spAutoFit/>
+          </a:bodyPr>
+          <a:lstStyle/>
+          <a:p>
+            <a:pPr algn="l"/>
+            <a:r>
+              <a:rPr sz="1300" b="0">
+                <a:solidFill>
+                  <a:srgbClr val="333333"/>
+                </a:solidFill>
+                <a:latin typeface="Open Sans"/>
+                <a:ea typeface="Open Sans"/>
+                <a:cs typeface="Open Sans"/>
+              </a:rPr>
+              <a:t>Регулярно проверяйте дыхание, повязки и жалобы</a:t>
+            </a:r>
+          </a:p>
+        </p:txBody>
+      </p:sp>
+      <p:sp>
+        <p:nvSpPr>
+          <p:cNvPr id="17" name="Rectangle 16"/>
+          <p:cNvSpPr/>
+          <p:nvPr/>
+        </p:nvSpPr>
+        <p:spPr>
+          <a:xfrm>
+            <a:off x="700000" y="4240000"/>
+            <a:ext cx="11000000" cy="850000"/>
+          </a:xfrm>
+          <a:prstGeom prst="rect">
+            <a:avLst/>
+          </a:prstGeom>
+          <a:solidFill>
+            <a:srgbClr val="FFFFFF"/>
+          </a:solidFill>
+          <a:ln w="12700">
+            <a:solidFill>
+              <a:srgbClr val="999999"/>
+            </a:solidFill>
+          </a:ln>
+        </p:spPr>
+        <p:style>
+          <a:lnRef idx="1">
+            <a:schemeClr val="accent1"/>
+          </a:lnRef>
+          <a:fillRef idx="3">
+            <a:schemeClr val="accent1"/>
+          </a:fillRef>
+          <a:effectRef idx="2">
+            <a:schemeClr val="accent1"/>
+          </a:effectRef>
+          <a:fontRef idx="minor">
+            <a:schemeClr val="lt1"/>
+          </a:fontRef>
+        </p:style>
+        <p:txBody>
+          <a:bodyPr rtlCol="0" anchor="ctr"/>
+          <a:lstStyle/>
+          <a:p>
+            <a:pPr algn="ctr"/>
+          </a:p>
+        </p:txBody>
+      </p:sp>
+      <p:sp>
+        <p:nvSpPr>
+          <p:cNvPr id="18" name="Rectangle 17"/>
+          <p:cNvSpPr/>
+          <p:nvPr/>
+        </p:nvSpPr>
+        <p:spPr>
+          <a:xfrm>
+            <a:off x="700000" y="4240000"/>
+            <a:ext cx="90000" cy="850000"/>
+          </a:xfrm>
+          <a:prstGeom prst="rect">
+            <a:avLst/>
+          </a:prstGeom>
+          <a:solidFill>
+            <a:srgbClr val="CC0000"/>
+          </a:solidFill>
+          <a:ln>
+            <a:noFill/>
+          </a:ln>
+        </p:spPr>
+        <p:style>
+          <a:lnRef idx="1">
+            <a:schemeClr val="accent1"/>
+          </a:lnRef>
+          <a:fillRef idx="3">
+            <a:schemeClr val="accent1"/>
+          </a:fillRef>
+          <a:effectRef idx="2">
+            <a:schemeClr val="accent1"/>
+          </a:effectRef>
+          <a:fontRef idx="minor">
+            <a:schemeClr val="lt1"/>
+          </a:fontRef>
+        </p:style>
+        <p:txBody>
+          <a:bodyPr rtlCol="0" anchor="ctr"/>
+          <a:lstStyle/>
+          <a:p>
+            <a:pPr algn="ctr"/>
+          </a:p>
+        </p:txBody>
+      </p:sp>
+      <p:sp>
+        <p:nvSpPr>
+          <p:cNvPr id="19" name="TextBox 18"/>
+          <p:cNvSpPr txBox="1"/>
+          <p:nvPr/>
+        </p:nvSpPr>
+        <p:spPr>
+          <a:xfrm>
+            <a:off x="1000000" y="4320000"/>
+            <a:ext cx="10400000" cy="690000"/>
+          </a:xfrm>
+          <a:prstGeom prst="rect">
+            <a:avLst/>
+          </a:prstGeom>
+          <a:noFill/>
+        </p:spPr>
+        <p:txBody>
+          <a:bodyPr wrap="square" anchor="ctr">
+            <a:spAutoFit/>
+          </a:bodyPr>
+          <a:lstStyle/>
+          <a:p>
+            <a:pPr algn="l"/>
+            <a:r>
+              <a:rPr sz="1300" b="0">
+                <a:solidFill>
+                  <a:srgbClr val="333333"/>
+                </a:solidFill>
+                <a:latin typeface="Open Sans"/>
+                <a:ea typeface="Open Sans"/>
+                <a:cs typeface="Open Sans"/>
+              </a:rPr>
+              <a:t>Говорите спокойно, кратко и объясняйте действия</a:t>
+            </a:r>
+          </a:p>
+        </p:txBody>
+      </p:sp>
+      <p:sp>
+        <p:nvSpPr>
+          <p:cNvPr id="20" name="Rectangle 19"/>
+          <p:cNvSpPr/>
+          <p:nvPr/>
+        </p:nvSpPr>
+        <p:spPr>
+          <a:xfrm>
+            <a:off x="700000" y="5170000"/>
+            <a:ext cx="11000000" cy="850000"/>
+          </a:xfrm>
+          <a:prstGeom prst="rect">
+            <a:avLst/>
+          </a:prstGeom>
+          <a:solidFill>
+            <a:srgbClr val="FFFFFF"/>
+          </a:solidFill>
+          <a:ln w="12700">
+            <a:solidFill>
+              <a:srgbClr val="999999"/>
+            </a:solidFill>
+          </a:ln>
+        </p:spPr>
+        <p:style>
+          <a:lnRef idx="1">
+            <a:schemeClr val="accent1"/>
+          </a:lnRef>
+          <a:fillRef idx="3">
+            <a:schemeClr val="accent1"/>
+          </a:fillRef>
+          <a:effectRef idx="2">
+            <a:schemeClr val="accent1"/>
+          </a:effectRef>
+          <a:fontRef idx="minor">
+            <a:schemeClr val="lt1"/>
+          </a:fontRef>
+        </p:style>
+        <p:txBody>
+          <a:bodyPr rtlCol="0" anchor="ctr"/>
+          <a:lstStyle/>
+          <a:p>
+            <a:pPr algn="ctr"/>
+          </a:p>
+        </p:txBody>
+      </p:sp>
+      <p:sp>
+        <p:nvSpPr>
+          <p:cNvPr id="21" name="Rectangle 20"/>
+          <p:cNvSpPr/>
+          <p:nvPr/>
+        </p:nvSpPr>
+        <p:spPr>
+          <a:xfrm>
+            <a:off x="700000" y="5170000"/>
+            <a:ext cx="90000" cy="850000"/>
+          </a:xfrm>
+          <a:prstGeom prst="rect">
+            <a:avLst/>
+          </a:prstGeom>
+          <a:solidFill>
+            <a:srgbClr val="CC0000"/>
+          </a:solidFill>
+          <a:ln>
+            <a:noFill/>
+          </a:ln>
+        </p:spPr>
+        <p:style>
+          <a:lnRef idx="1">
+            <a:schemeClr val="accent1"/>
+          </a:lnRef>
+          <a:fillRef idx="3">
+            <a:schemeClr val="accent1"/>
+          </a:fillRef>
+          <a:effectRef idx="2">
+            <a:schemeClr val="accent1"/>
+          </a:effectRef>
+          <a:fontRef idx="minor">
+            <a:schemeClr val="lt1"/>
+          </a:fontRef>
+        </p:style>
+        <p:txBody>
+          <a:bodyPr rtlCol="0" anchor="ctr"/>
+          <a:lstStyle/>
+          <a:p>
+            <a:pPr algn="ctr"/>
+          </a:p>
+        </p:txBody>
+      </p:sp>
+      <p:sp>
+        <p:nvSpPr>
+          <p:cNvPr id="22" name="TextBox 21"/>
+          <p:cNvSpPr txBox="1"/>
+          <p:nvPr/>
+        </p:nvSpPr>
+        <p:spPr>
+          <a:xfrm>
+            <a:off x="1000000" y="5250000"/>
+            <a:ext cx="10400000" cy="690000"/>
+          </a:xfrm>
+          <a:prstGeom prst="rect">
+            <a:avLst/>
+          </a:prstGeom>
+          <a:noFill/>
+        </p:spPr>
+        <p:txBody>
+          <a:bodyPr wrap="square" anchor="ctr">
+            <a:spAutoFit/>
+          </a:bodyPr>
+          <a:lstStyle/>
+          <a:p>
+            <a:pPr algn="l"/>
+            <a:r>
+              <a:rPr sz="1300" b="0">
+                <a:solidFill>
+                  <a:srgbClr val="333333"/>
+                </a:solidFill>
+                <a:latin typeface="Open Sans"/>
+                <a:ea typeface="Open Sans"/>
+                <a:cs typeface="Open Sans"/>
+              </a:rPr>
+              <a:t>Не оставляйте пострадавшего одного</a:t>
+            </a:r>
+          </a:p>
+        </p:txBody>
+      </p:sp>
+    </p:spTree>
+  </p:cSld>
+  <p:clrMapOvr>
+    <a:masterClrMapping/>
+  </p:clrMapOvr>
+</p:sld>
+</file>
+
+<file path=ppt/slides/slide14.xml><?xml version="1.0" encoding="utf-8"?>
+<p:sld xmlns:a="http://schemas.openxmlformats.org/drawingml/2006/main" xmlns:p="http://schemas.openxmlformats.org/presentationml/2006/main" xmlns:r="http://schemas.openxmlformats.org/officeDocument/2006/relationships">
+  <p:cSld>
+    <p:spTree>
+      <p:nvGrpSpPr>
+        <p:cNvPr id="1" name=""/>
+        <p:cNvGrpSpPr/>
+        <p:nvPr/>
+      </p:nvGrpSpPr>
+      <p:grpSpPr/>
+      <p:sp>
+        <p:nvSpPr>
+          <p:cNvPr id="2" name="Rectangle 1"/>
+          <p:cNvSpPr/>
+          <p:nvPr/>
+        </p:nvSpPr>
+        <p:spPr>
+          <a:xfrm>
+            <a:off x="0" y="0"/>
+            <a:ext cx="12191695" cy="6858000"/>
+          </a:xfrm>
+          <a:prstGeom prst="rect">
+            <a:avLst/>
+          </a:prstGeom>
+          <a:solidFill>
+            <a:srgbClr val="FFFFFF"/>
+          </a:solidFill>
+          <a:ln>
+            <a:noFill/>
+          </a:ln>
+        </p:spPr>
+        <p:style>
+          <a:lnRef idx="1">
+            <a:schemeClr val="accent1"/>
+          </a:lnRef>
+          <a:fillRef idx="3">
+            <a:schemeClr val="accent1"/>
+          </a:fillRef>
+          <a:effectRef idx="2">
+            <a:schemeClr val="accent1"/>
+          </a:effectRef>
+          <a:fontRef idx="minor">
+            <a:schemeClr val="lt1"/>
+          </a:fontRef>
+        </p:style>
+        <p:txBody>
+          <a:bodyPr rtlCol="0" anchor="ctr"/>
+          <a:lstStyle/>
+          <a:p>
+            <a:pPr algn="ctr"/>
+          </a:p>
+        </p:txBody>
+      </p:sp>
+      <p:sp>
+        <p:nvSpPr>
+          <p:cNvPr id="3" name="TextBox 2"/>
+          <p:cNvSpPr txBox="1"/>
+          <p:nvPr/>
+        </p:nvSpPr>
+        <p:spPr>
+          <a:xfrm>
+            <a:off x="700000" y="250000"/>
+            <a:ext cx="11200000" cy="550000"/>
+          </a:xfrm>
+          <a:prstGeom prst="rect">
+            <a:avLst/>
+          </a:prstGeom>
+          <a:noFill/>
+        </p:spPr>
+        <p:txBody>
+          <a:bodyPr wrap="square" anchor="t">
+            <a:spAutoFit/>
+          </a:bodyPr>
+          <a:lstStyle/>
+          <a:p>
+            <a:pPr algn="l"/>
+            <a:r>
+              <a:rPr sz="2200" b="1">
+                <a:solidFill>
+                  <a:srgbClr val="333333"/>
+                </a:solidFill>
+                <a:latin typeface="Open Sans"/>
+                <a:ea typeface="Open Sans"/>
+                <a:cs typeface="Open Sans"/>
+              </a:rPr>
+              <a:t>ПАМЯТКА</a:t>
+            </a:r>
+          </a:p>
+        </p:txBody>
+      </p:sp>
+      <p:sp>
+        <p:nvSpPr>
+          <p:cNvPr id="4" name="Rectangle 3"/>
+          <p:cNvSpPr/>
+          <p:nvPr/>
+        </p:nvSpPr>
+        <p:spPr>
+          <a:xfrm>
+            <a:off x="700000" y="850000"/>
+            <a:ext cx="9000000" cy="28000"/>
+          </a:xfrm>
+          <a:prstGeom prst="rect">
+            <a:avLst/>
+          </a:prstGeom>
+          <a:solidFill>
+            <a:srgbClr val="555555"/>
+          </a:solidFill>
+          <a:ln>
+            <a:noFill/>
+          </a:ln>
+        </p:spPr>
+        <p:style>
+          <a:lnRef idx="1">
+            <a:schemeClr val="accent1"/>
+          </a:lnRef>
+          <a:fillRef idx="3">
+            <a:schemeClr val="accent1"/>
+          </a:fillRef>
+          <a:effectRef idx="2">
+            <a:schemeClr val="accent1"/>
+          </a:effectRef>
+          <a:fontRef idx="minor">
+            <a:schemeClr val="lt1"/>
+          </a:fontRef>
+        </p:style>
+        <p:txBody>
+          <a:bodyPr rtlCol="0" anchor="ctr"/>
+          <a:lstStyle/>
+          <a:p>
+            <a:pPr algn="ctr"/>
+          </a:p>
+        </p:txBody>
+      </p:sp>
+      <p:sp>
+        <p:nvSpPr>
+          <p:cNvPr id="5" name="TextBox 4"/>
+          <p:cNvSpPr txBox="1"/>
+          <p:nvPr/>
+        </p:nvSpPr>
+        <p:spPr>
+          <a:xfrm>
+            <a:off x="700000" y="920000"/>
+            <a:ext cx="11000000" cy="350000"/>
+          </a:xfrm>
+          <a:prstGeom prst="rect">
+            <a:avLst/>
+          </a:prstGeom>
+          <a:noFill/>
+        </p:spPr>
+        <p:txBody>
+          <a:bodyPr wrap="square" anchor="t">
+            <a:spAutoFit/>
+          </a:bodyPr>
+          <a:lstStyle/>
+          <a:p>
+            <a:pPr algn="l"/>
+            <a:r>
+              <a:rPr sz="1200" b="0">
+                <a:solidFill>
+                  <a:srgbClr val="666666"/>
+                </a:solidFill>
+                <a:latin typeface="Open Sans"/>
+                <a:ea typeface="Open Sans"/>
+                <a:cs typeface="Open Sans"/>
+              </a:rPr>
+              <a:t>Оказание первой помощи при травмах, ранениях и поражениях, прочих состояниях</a:t>
+            </a:r>
+          </a:p>
+        </p:txBody>
+      </p:sp>
+      <p:sp>
+        <p:nvSpPr>
+          <p:cNvPr id="6" name="Rectangle 5"/>
+          <p:cNvSpPr/>
+          <p:nvPr/>
+        </p:nvSpPr>
+        <p:spPr>
+          <a:xfrm>
+            <a:off x="0" y="2800000"/>
+            <a:ext cx="420000" cy="420000"/>
+          </a:xfrm>
+          <a:prstGeom prst="rect">
+            <a:avLst/>
+          </a:prstGeom>
+          <a:solidFill>
+            <a:srgbClr val="555555"/>
+          </a:solidFill>
+          <a:ln>
+            <a:noFill/>
+          </a:ln>
+        </p:spPr>
+        <p:style>
+          <a:lnRef idx="1">
+            <a:schemeClr val="accent1"/>
+          </a:lnRef>
+          <a:fillRef idx="3">
+            <a:schemeClr val="accent1"/>
+          </a:fillRef>
+          <a:effectRef idx="2">
+            <a:schemeClr val="accent1"/>
+          </a:effectRef>
+          <a:fontRef idx="minor">
+            <a:schemeClr val="lt1"/>
+          </a:fontRef>
+        </p:style>
+        <p:txBody>
+          <a:bodyPr rtlCol="0" anchor="ctr"/>
+          <a:lstStyle/>
+          <a:p>
+            <a:pPr algn="ctr"/>
+          </a:p>
+        </p:txBody>
+      </p:sp>
+      <p:sp>
+        <p:nvSpPr>
+          <p:cNvPr id="7" name="TextBox 6"/>
+          <p:cNvSpPr txBox="1"/>
+          <p:nvPr/>
+        </p:nvSpPr>
+        <p:spPr>
+          <a:xfrm>
+            <a:off x="0" y="2800000"/>
+            <a:ext cx="420000" cy="420000"/>
+          </a:xfrm>
+          <a:prstGeom prst="rect">
+            <a:avLst/>
+          </a:prstGeom>
+          <a:noFill/>
+        </p:spPr>
+        <p:txBody>
+          <a:bodyPr wrap="square" anchor="ctr">
+            <a:spAutoFit/>
+          </a:bodyPr>
+          <a:lstStyle/>
+          <a:p>
+            <a:pPr algn="ctr"/>
+            <a:r>
+              <a:rPr sz="1400" b="1">
+                <a:solidFill>
+                  <a:srgbClr val="FFFFFF"/>
+                </a:solidFill>
+                <a:latin typeface="Open Sans"/>
+                <a:ea typeface="Open Sans"/>
+                <a:cs typeface="Open Sans"/>
+              </a:rPr>
+              <a:t>14</a:t>
+            </a:r>
+          </a:p>
+        </p:txBody>
+      </p:sp>
+      <p:pic>
+        <p:nvPicPr>
+          <p:cNvPr id="8" name="Picture 7" descr="pamyatka-tema4-polozhenie-psihologiya-16x9.png"/>
+          <p:cNvPicPr>
+            <a:picLocks noChangeAspect="1"/>
+          </p:cNvPicPr>
+          <p:nvPr/>
+        </p:nvPicPr>
+        <p:blipFill>
+          <a:blip r:embed="rId2"/>
+          <a:stretch>
+            <a:fillRect/>
+          </a:stretch>
+        </p:blipFill>
+        <p:spPr>
+          <a:xfrm>
+            <a:off x="2300000" y="1400000"/>
+            <a:ext cx="7800000" cy="5200000"/>
+          </a:xfrm>
+          <a:prstGeom prst="rect">
+            <a:avLst/>
+          </a:prstGeom>
+        </p:spPr>
+      </p:pic>
+    </p:spTree>
+  </p:cSld>
+  <p:clrMapOvr>
+    <a:masterClrMapping/>
+  </p:clrMapOvr>
+</p:sld>
+</file>
+
+<file path=ppt/slides/slide15.xml><?xml version="1.0" encoding="utf-8"?>
+<p:sld xmlns:a="http://schemas.openxmlformats.org/drawingml/2006/main" xmlns:p="http://schemas.openxmlformats.org/presentationml/2006/main" xmlns:r="http://schemas.openxmlformats.org/officeDocument/2006/relationships">
+  <p:cSld>
+    <p:spTree>
+      <p:nvGrpSpPr>
+        <p:cNvPr id="1" name=""/>
+        <p:cNvGrpSpPr/>
+        <p:nvPr/>
+      </p:nvGrpSpPr>
+      <p:grpSpPr/>
+      <p:sp>
+        <p:nvSpPr>
+          <p:cNvPr id="2" name="Rectangle 1"/>
+          <p:cNvSpPr/>
+          <p:nvPr/>
+        </p:nvSpPr>
+        <p:spPr>
+          <a:xfrm>
+            <a:off x="0" y="0"/>
             <a:ext cx="3400000" cy="6858000"/>
           </a:xfrm>
           <a:prstGeom prst="rect">
@@ -3943,7 +7078,7 @@
                 <a:ea typeface="Open Sans"/>
                 <a:cs typeface="Open Sans"/>
               </a:rPr>
-              <a:t>Оптимальное положение</a:t>
+              <a:t>Положение по виду травмы</a:t>
             </a:r>
           </a:p>
         </p:txBody>
@@ -4105,7 +7240,7 @@
                 <a:ea typeface="Open Sans"/>
                 <a:cs typeface="Open Sans"/>
               </a:rPr>
-              <a:t>Контроль состояния</a:t>
+              <a:t>Защита от холода</a:t>
             </a:r>
           </a:p>
         </p:txBody>
@@ -4267,7 +7402,7 @@
                 <a:ea typeface="Open Sans"/>
                 <a:cs typeface="Open Sans"/>
               </a:rPr>
-              <a:t>Основы поддержки</a:t>
+              <a:t>Контроль состояния</a:t>
             </a:r>
           </a:p>
         </p:txBody>
@@ -4429,7 +7564,7 @@
                 <a:ea typeface="Open Sans"/>
                 <a:cs typeface="Open Sans"/>
               </a:rPr>
-              <a:t>Реакции на стресс</a:t>
+              <a:t>Основы поддержки</a:t>
             </a:r>
           </a:p>
         </p:txBody>
@@ -4591,7 +7726,7 @@
                 <a:ea typeface="Open Sans"/>
                 <a:cs typeface="Open Sans"/>
               </a:rPr>
-              <a:t>До прибытия помощи</a:t>
+              <a:t>Реакции на стресс</a:t>
             </a:r>
           </a:p>
         </p:txBody>
@@ -4689,7 +7824,7 @@
                 <a:ea typeface="Open Sans"/>
                 <a:cs typeface="Open Sans"/>
               </a:rPr>
-              <a:t>ОПТИМАЛЬНОЕ ПОЛОЖЕНИЕ ТЕЛА</a:t>
+              <a:t>ТРАВМА ГРУДИ: ПОЛУСИДЯЧЕЕ ПОЛОЖЕНИЕ</a:t>
             </a:r>
           </a:p>
         </p:txBody>
@@ -4854,43 +7989,30 @@
           </a:p>
         </p:txBody>
       </p:sp>
-      <p:sp>
-        <p:nvSpPr>
-          <p:cNvPr id="8" name="TextBox 7"/>
-          <p:cNvSpPr txBox="1"/>
-          <p:nvPr/>
-        </p:nvSpPr>
-        <p:spPr>
-          <a:xfrm>
-            <a:off x="700000" y="1450000"/>
-            <a:ext cx="5400000" cy="400000"/>
-          </a:xfrm>
-          <a:prstGeom prst="rect">
-            <a:avLst/>
-          </a:prstGeom>
-          <a:noFill/>
-        </p:spPr>
-        <p:txBody>
-          <a:bodyPr wrap="square" anchor="t">
-            <a:spAutoFit/>
-          </a:bodyPr>
-          <a:lstStyle/>
-          <a:p>
-            <a:pPr algn="l"/>
-            <a:r>
-              <a:rPr sz="1400" b="1">
-                <a:solidFill>
-                  <a:srgbClr val="333333"/>
-                </a:solidFill>
-                <a:latin typeface="Open Sans"/>
-                <a:ea typeface="Open Sans"/>
-                <a:cs typeface="Open Sans"/>
-              </a:rPr>
-              <a:t>В сознании</a:t>
-            </a:r>
-          </a:p>
-        </p:txBody>
-      </p:sp>
+      <p:pic>
+        <p:nvPicPr>
+          <p:cNvPr id="8" name="Picture 7" descr="fig78.jpeg"/>
+          <p:cNvPicPr>
+            <a:picLocks noChangeAspect="1"/>
+          </p:cNvPicPr>
+          <p:nvPr/>
+        </p:nvPicPr>
+        <p:blipFill>
+          <a:blip r:embed="rId2"/>
+          <a:stretch>
+            <a:fillRect/>
+          </a:stretch>
+        </p:blipFill>
+        <p:spPr>
+          <a:xfrm>
+            <a:off x="1599121" y="1450000"/>
+            <a:ext cx="3001757" cy="4000000"/>
+          </a:xfrm>
+          <a:prstGeom prst="rect">
+            <a:avLst/>
+          </a:prstGeom>
+        </p:spPr>
+      </p:pic>
       <p:sp>
         <p:nvSpPr>
           <p:cNvPr id="9" name="TextBox 8"/>
@@ -4899,45 +8021,8 @@
         </p:nvSpPr>
         <p:spPr>
           <a:xfrm>
-            <a:off x="6600000" y="1450000"/>
-            <a:ext cx="5400000" cy="400000"/>
-          </a:xfrm>
-          <a:prstGeom prst="rect">
-            <a:avLst/>
-          </a:prstGeom>
-          <a:noFill/>
-        </p:spPr>
-        <p:txBody>
-          <a:bodyPr wrap="square" anchor="t">
-            <a:spAutoFit/>
-          </a:bodyPr>
-          <a:lstStyle/>
-          <a:p>
-            <a:pPr algn="l"/>
-            <a:r>
-              <a:rPr sz="1400" b="1">
-                <a:solidFill>
-                  <a:srgbClr val="333333"/>
-                </a:solidFill>
-                <a:latin typeface="Open Sans"/>
-                <a:ea typeface="Open Sans"/>
-                <a:cs typeface="Open Sans"/>
-              </a:rPr>
-              <a:t>Без сознания</a:t>
-            </a:r>
-          </a:p>
-        </p:txBody>
-      </p:sp>
-      <p:sp>
-        <p:nvSpPr>
-          <p:cNvPr id="10" name="TextBox 9"/>
-          <p:cNvSpPr txBox="1"/>
-          <p:nvPr/>
-        </p:nvSpPr>
-        <p:spPr>
-          <a:xfrm>
-            <a:off x="700000" y="1950000"/>
-            <a:ext cx="5400000" cy="4000000"/>
+            <a:off x="6000000" y="1450000"/>
+            <a:ext cx="6200000" cy="3800000"/>
           </a:xfrm>
           <a:prstGeom prst="rect">
             <a:avLst/>
@@ -4964,7 +8049,7 @@
                 <a:ea typeface="Open Sans"/>
                 <a:cs typeface="Open Sans"/>
               </a:rPr>
-              <a:t>•  при травме груди — полусидя</a:t>
+              <a:t>•  Помогите пострадавшему с нормальным сознанием сесть с опорой под спину.</a:t>
             </a:r>
           </a:p>
           <a:p>
@@ -4982,7 +8067,7 @@
                 <a:ea typeface="Open Sans"/>
                 <a:cs typeface="Open Sans"/>
               </a:rPr>
-              <a:t>•  при слабости — лежа в удобном положении</a:t>
+              <a:t>•  Ноги можно слегка согнуть, чтобы положение было устойчивым.</a:t>
             </a:r>
           </a:p>
           <a:p>
@@ -5000,7 +8085,7 @@
                 <a:ea typeface="Open Sans"/>
                 <a:cs typeface="Open Sans"/>
               </a:rPr>
-              <a:t>•  при травме конечности — покой и фиксация</a:t>
+              <a:t>•  При односторонней травме допустим осторожный наклон к поврежденной стороне.</a:t>
             </a:r>
           </a:p>
           <a:p>
@@ -5018,32 +8103,9 @@
                 <a:ea typeface="Open Sans"/>
                 <a:cs typeface="Open Sans"/>
               </a:rPr>
-              <a:t>•  при перегревании — в прохладе</a:t>
-            </a:r>
-          </a:p>
-        </p:txBody>
-      </p:sp>
-      <p:sp>
-        <p:nvSpPr>
-          <p:cNvPr id="11" name="TextBox 10"/>
-          <p:cNvSpPr txBox="1"/>
-          <p:nvPr/>
-        </p:nvSpPr>
-        <p:spPr>
-          <a:xfrm>
-            <a:off x="6600000" y="1950000"/>
-            <a:ext cx="5400000" cy="4000000"/>
-          </a:xfrm>
-          <a:prstGeom prst="rect">
-            <a:avLst/>
-          </a:prstGeom>
-          <a:noFill/>
-        </p:spPr>
-        <p:txBody>
-          <a:bodyPr wrap="square">
-            <a:spAutoFit/>
-          </a:bodyPr>
-          <a:lstStyle/>
+              <a:t>•  Не заставляйте лежать, если в положении сидя дышать легче.</a:t>
+            </a:r>
+          </a:p>
           <a:p>
             <a:pPr algn="l">
               <a:spcAft>
@@ -5059,17 +8121,79 @@
                 <a:ea typeface="Open Sans"/>
                 <a:cs typeface="Open Sans"/>
               </a:rPr>
-              <a:t>•  есть нормальное дыхание — устойчиво на боку</a:t>
-            </a:r>
-          </a:p>
-          <a:p>
-            <a:pPr algn="l">
-              <a:spcAft>
-                <a:spcPts val="800"/>
-              </a:spcAft>
-            </a:pPr>
-            <a:r>
-              <a:rPr sz="1300" b="0">
+              <a:t>•  Контролируйте дыхание, сознание и герметизирующую повязку.</a:t>
+            </a:r>
+          </a:p>
+        </p:txBody>
+      </p:sp>
+      <p:sp>
+        <p:nvSpPr>
+          <p:cNvPr id="10" name="Rounded Rectangle 9"/>
+          <p:cNvSpPr/>
+          <p:nvPr/>
+        </p:nvSpPr>
+        <p:spPr>
+          <a:xfrm>
+            <a:off x="6000000" y="5400000"/>
+            <a:ext cx="6200000" cy="1100000"/>
+          </a:xfrm>
+          <a:prstGeom prst="roundRect">
+            <a:avLst/>
+          </a:prstGeom>
+          <a:solidFill>
+            <a:srgbClr val="F5F0E1"/>
+          </a:solidFill>
+          <a:ln>
+            <a:noFill/>
+          </a:ln>
+        </p:spPr>
+        <p:style>
+          <a:lnRef idx="1">
+            <a:schemeClr val="accent1"/>
+          </a:lnRef>
+          <a:fillRef idx="3">
+            <a:schemeClr val="accent1"/>
+          </a:fillRef>
+          <a:effectRef idx="2">
+            <a:schemeClr val="accent1"/>
+          </a:effectRef>
+          <a:fontRef idx="minor">
+            <a:schemeClr val="lt1"/>
+          </a:fontRef>
+        </p:style>
+        <p:txBody>
+          <a:bodyPr rtlCol="0" anchor="ctr"/>
+          <a:lstStyle/>
+          <a:p>
+            <a:pPr algn="ctr"/>
+          </a:p>
+        </p:txBody>
+      </p:sp>
+      <p:sp>
+        <p:nvSpPr>
+          <p:cNvPr id="11" name="TextBox 10"/>
+          <p:cNvSpPr txBox="1"/>
+          <p:nvPr/>
+        </p:nvSpPr>
+        <p:spPr>
+          <a:xfrm>
+            <a:off x="6250000" y="5600000"/>
+            <a:ext cx="5700000" cy="700000"/>
+          </a:xfrm>
+          <a:prstGeom prst="rect">
+            <a:avLst/>
+          </a:prstGeom>
+          <a:noFill/>
+        </p:spPr>
+        <p:txBody>
+          <a:bodyPr wrap="square" anchor="ctr">
+            <a:spAutoFit/>
+          </a:bodyPr>
+          <a:lstStyle/>
+          <a:p>
+            <a:pPr algn="l"/>
+            <a:r>
+              <a:rPr sz="1200" b="0">
                 <a:solidFill>
                   <a:srgbClr val="333333"/>
                 </a:solidFill>
@@ -5077,43 +8201,7 @@
                 <a:ea typeface="Open Sans"/>
                 <a:cs typeface="Open Sans"/>
               </a:rPr>
-              <a:t>•  нет нормального дыхания — на спине для реанимации</a:t>
-            </a:r>
-          </a:p>
-          <a:p>
-            <a:pPr algn="l">
-              <a:spcAft>
-                <a:spcPts val="800"/>
-              </a:spcAft>
-            </a:pPr>
-            <a:r>
-              <a:rPr sz="1300" b="0">
-                <a:solidFill>
-                  <a:srgbClr val="333333"/>
-                </a:solidFill>
-                <a:latin typeface="Open Sans"/>
-                <a:ea typeface="Open Sans"/>
-                <a:cs typeface="Open Sans"/>
-              </a:rPr>
-              <a:t>•  при подозрении на позвоночник избегайте лишних движений</a:t>
-            </a:r>
-          </a:p>
-          <a:p>
-            <a:pPr algn="l">
-              <a:spcAft>
-                <a:spcPts val="800"/>
-              </a:spcAft>
-            </a:pPr>
-            <a:r>
-              <a:rPr sz="1300" b="0">
-                <a:solidFill>
-                  <a:srgbClr val="333333"/>
-                </a:solidFill>
-                <a:latin typeface="Open Sans"/>
-                <a:ea typeface="Open Sans"/>
-                <a:cs typeface="Open Sans"/>
-              </a:rPr>
-              <a:t>•  дыхательные пути всегда важнее положения</a:t>
+              <a:t>При ухудшении сознания положение немедленно пересматривают.</a:t>
             </a:r>
           </a:p>
         </p:txBody>
@@ -5211,7 +8299,7 @@
                 <a:ea typeface="Open Sans"/>
                 <a:cs typeface="Open Sans"/>
               </a:rPr>
-              <a:t>КОНТРОЛЬ ДО ПРИБЫТИЯ СКОРОЙ ПОМОЩИ</a:t>
+              <a:t>ТРАВМА ТАЗА: НОГИ СОГНУТЫ</a:t>
             </a:r>
           </a:p>
         </p:txBody>
@@ -5376,22 +8464,159 @@
           </a:p>
         </p:txBody>
       </p:sp>
-      <p:sp>
-        <p:nvSpPr>
-          <p:cNvPr id="8" name="Oval 7"/>
+      <p:pic>
+        <p:nvPicPr>
+          <p:cNvPr id="8" name="Picture 7" descr="fig79.jpeg"/>
+          <p:cNvPicPr>
+            <a:picLocks noChangeAspect="1"/>
+          </p:cNvPicPr>
+          <p:nvPr/>
+        </p:nvPicPr>
+        <p:blipFill>
+          <a:blip r:embed="rId2"/>
+          <a:stretch>
+            <a:fillRect/>
+          </a:stretch>
+        </p:blipFill>
+        <p:spPr>
+          <a:xfrm>
+            <a:off x="500000" y="2494898"/>
+            <a:ext cx="5200000" cy="1910204"/>
+          </a:xfrm>
+          <a:prstGeom prst="rect">
+            <a:avLst/>
+          </a:prstGeom>
+        </p:spPr>
+      </p:pic>
+      <p:sp>
+        <p:nvSpPr>
+          <p:cNvPr id="9" name="TextBox 8"/>
+          <p:cNvSpPr txBox="1"/>
+          <p:nvPr/>
+        </p:nvSpPr>
+        <p:spPr>
+          <a:xfrm>
+            <a:off x="6000000" y="1450000"/>
+            <a:ext cx="6200000" cy="3800000"/>
+          </a:xfrm>
+          <a:prstGeom prst="rect">
+            <a:avLst/>
+          </a:prstGeom>
+          <a:noFill/>
+        </p:spPr>
+        <p:txBody>
+          <a:bodyPr wrap="square">
+            <a:spAutoFit/>
+          </a:bodyPr>
+          <a:lstStyle/>
+          <a:p>
+            <a:pPr algn="l">
+              <a:spcAft>
+                <a:spcPts val="800"/>
+              </a:spcAft>
+            </a:pPr>
+            <a:r>
+              <a:rPr sz="1300" b="0">
+                <a:solidFill>
+                  <a:srgbClr val="333333"/>
+                </a:solidFill>
+                <a:latin typeface="Open Sans"/>
+                <a:ea typeface="Open Sans"/>
+                <a:cs typeface="Open Sans"/>
+              </a:rPr>
+              <a:t>•  Уложите пострадавшего на спину на ровную поверхность.</a:t>
+            </a:r>
+          </a:p>
+          <a:p>
+            <a:pPr algn="l">
+              <a:spcAft>
+                <a:spcPts val="800"/>
+              </a:spcAft>
+            </a:pPr>
+            <a:r>
+              <a:rPr sz="1300" b="0">
+                <a:solidFill>
+                  <a:srgbClr val="333333"/>
+                </a:solidFill>
+                <a:latin typeface="Open Sans"/>
+                <a:ea typeface="Open Sans"/>
+                <a:cs typeface="Open Sans"/>
+              </a:rPr>
+              <a:t>•  Осторожно согните и немного разведите ноги, если это не усиливает боль.</a:t>
+            </a:r>
+          </a:p>
+          <a:p>
+            <a:pPr algn="l">
+              <a:spcAft>
+                <a:spcPts val="800"/>
+              </a:spcAft>
+            </a:pPr>
+            <a:r>
+              <a:rPr sz="1300" b="0">
+                <a:solidFill>
+                  <a:srgbClr val="333333"/>
+                </a:solidFill>
+                <a:latin typeface="Open Sans"/>
+                <a:ea typeface="Open Sans"/>
+                <a:cs typeface="Open Sans"/>
+              </a:rPr>
+              <a:t>•  Под колени поместите валик из одежды или одеяла.</a:t>
+            </a:r>
+          </a:p>
+          <a:p>
+            <a:pPr algn="l">
+              <a:spcAft>
+                <a:spcPts val="800"/>
+              </a:spcAft>
+            </a:pPr>
+            <a:r>
+              <a:rPr sz="1300" b="0">
+                <a:solidFill>
+                  <a:srgbClr val="333333"/>
+                </a:solidFill>
+                <a:latin typeface="Open Sans"/>
+                <a:ea typeface="Open Sans"/>
+                <a:cs typeface="Open Sans"/>
+              </a:rPr>
+              <a:t>•  Не сдавливайте таз и не проверяйте его подвижность.</a:t>
+            </a:r>
+          </a:p>
+          <a:p>
+            <a:pPr algn="l">
+              <a:spcAft>
+                <a:spcPts val="800"/>
+              </a:spcAft>
+            </a:pPr>
+            <a:r>
+              <a:rPr sz="1300" b="0">
+                <a:solidFill>
+                  <a:srgbClr val="333333"/>
+                </a:solidFill>
+                <a:latin typeface="Open Sans"/>
+                <a:ea typeface="Open Sans"/>
+                <a:cs typeface="Open Sans"/>
+              </a:rPr>
+              <a:t>•  Не разрешайте вставать, садиться или поворачиваться самостоятельно.</a:t>
+            </a:r>
+          </a:p>
+        </p:txBody>
+      </p:sp>
+      <p:sp>
+        <p:nvSpPr>
+          <p:cNvPr id="10" name="Rounded Rectangle 9"/>
           <p:cNvSpPr/>
           <p:nvPr/>
         </p:nvSpPr>
         <p:spPr>
           <a:xfrm>
-            <a:off x="700000" y="1450000"/>
-            <a:ext cx="550000" cy="550000"/>
-          </a:xfrm>
-          <a:prstGeom prst="ellipse">
+            <a:off x="6000000" y="5400000"/>
+            <a:ext cx="6200000" cy="1100000"/>
+          </a:xfrm>
+          <a:prstGeom prst="roundRect">
             <a:avLst/>
           </a:prstGeom>
           <a:solidFill>
-            <a:srgbClr val="CC0000"/>
+            <a:srgbClr val="F5F0E1"/>
           </a:solidFill>
           <a:ln>
             <a:noFill/>
@@ -5421,14 +8646,14 @@
       </p:sp>
       <p:sp>
         <p:nvSpPr>
-          <p:cNvPr id="9" name="TextBox 8"/>
+          <p:cNvPr id="11" name="TextBox 10"/>
           <p:cNvSpPr txBox="1"/>
           <p:nvPr/>
         </p:nvSpPr>
         <p:spPr>
           <a:xfrm>
-            <a:off x="700000" y="1450000"/>
-            <a:ext cx="550000" cy="550000"/>
+            <a:off x="6250000" y="5600000"/>
+            <a:ext cx="5700000" cy="700000"/>
           </a:xfrm>
           <a:prstGeom prst="rect">
             <a:avLst/>
@@ -5441,91 +8666,9 @@
           </a:bodyPr>
           <a:lstStyle/>
           <a:p>
-            <a:pPr algn="ctr"/>
-            <a:r>
-              <a:rPr sz="1400" b="1">
-                <a:solidFill>
-                  <a:srgbClr val="FFFFFF"/>
-                </a:solidFill>
-                <a:latin typeface="Open Sans"/>
-                <a:ea typeface="Open Sans"/>
-                <a:cs typeface="Open Sans"/>
-              </a:rPr>
-              <a:t>1</a:t>
-            </a:r>
-          </a:p>
-        </p:txBody>
-      </p:sp>
-      <p:sp>
-        <p:nvSpPr>
-          <p:cNvPr id="10" name="Rectangle 9"/>
-          <p:cNvSpPr/>
-          <p:nvPr/>
-        </p:nvSpPr>
-        <p:spPr>
-          <a:xfrm>
-            <a:off x="1450000" y="1450000"/>
-            <a:ext cx="10500000" cy="550000"/>
-          </a:xfrm>
-          <a:prstGeom prst="rect">
-            <a:avLst/>
-          </a:prstGeom>
-          <a:solidFill>
-            <a:srgbClr val="FFFFFF"/>
-          </a:solidFill>
-          <a:ln w="12700">
-            <a:solidFill>
-              <a:srgbClr val="999999"/>
-            </a:solidFill>
-          </a:ln>
-        </p:spPr>
-        <p:style>
-          <a:lnRef idx="1">
-            <a:schemeClr val="accent1"/>
-          </a:lnRef>
-          <a:fillRef idx="3">
-            <a:schemeClr val="accent1"/>
-          </a:fillRef>
-          <a:effectRef idx="2">
-            <a:schemeClr val="accent1"/>
-          </a:effectRef>
-          <a:fontRef idx="minor">
-            <a:schemeClr val="lt1"/>
-          </a:fontRef>
-        </p:style>
-        <p:txBody>
-          <a:bodyPr rtlCol="0" anchor="ctr"/>
-          <a:lstStyle/>
-          <a:p>
-            <a:pPr algn="ctr"/>
-          </a:p>
-        </p:txBody>
-      </p:sp>
-      <p:sp>
-        <p:nvSpPr>
-          <p:cNvPr id="11" name="TextBox 10"/>
-          <p:cNvSpPr txBox="1"/>
-          <p:nvPr/>
-        </p:nvSpPr>
-        <p:spPr>
-          <a:xfrm>
-            <a:off x="1650000" y="1450000"/>
-            <a:ext cx="10100000" cy="550000"/>
-          </a:xfrm>
-          <a:prstGeom prst="rect">
-            <a:avLst/>
-          </a:prstGeom>
-          <a:noFill/>
-        </p:spPr>
-        <p:txBody>
-          <a:bodyPr wrap="square" anchor="ctr">
-            <a:spAutoFit/>
-          </a:bodyPr>
-          <a:lstStyle/>
-          <a:p>
             <a:pPr algn="l"/>
             <a:r>
-              <a:rPr sz="1300" b="0">
+              <a:rPr sz="1200" b="0">
                 <a:solidFill>
                   <a:srgbClr val="333333"/>
                 </a:solidFill>
@@ -5533,817 +8676,7 @@
                 <a:ea typeface="Open Sans"/>
                 <a:cs typeface="Open Sans"/>
               </a:rPr>
-              <a:t>Регулярно проверяйте сознание.</a:t>
-            </a:r>
-          </a:p>
-        </p:txBody>
-      </p:sp>
-      <p:sp>
-        <p:nvSpPr>
-          <p:cNvPr id="12" name="Oval 11"/>
-          <p:cNvSpPr/>
-          <p:nvPr/>
-        </p:nvSpPr>
-        <p:spPr>
-          <a:xfrm>
-            <a:off x="700000" y="2320000"/>
-            <a:ext cx="550000" cy="550000"/>
-          </a:xfrm>
-          <a:prstGeom prst="ellipse">
-            <a:avLst/>
-          </a:prstGeom>
-          <a:solidFill>
-            <a:srgbClr val="555555"/>
-          </a:solidFill>
-          <a:ln>
-            <a:noFill/>
-          </a:ln>
-        </p:spPr>
-        <p:style>
-          <a:lnRef idx="1">
-            <a:schemeClr val="accent1"/>
-          </a:lnRef>
-          <a:fillRef idx="3">
-            <a:schemeClr val="accent1"/>
-          </a:fillRef>
-          <a:effectRef idx="2">
-            <a:schemeClr val="accent1"/>
-          </a:effectRef>
-          <a:fontRef idx="minor">
-            <a:schemeClr val="lt1"/>
-          </a:fontRef>
-        </p:style>
-        <p:txBody>
-          <a:bodyPr rtlCol="0" anchor="ctr"/>
-          <a:lstStyle/>
-          <a:p>
-            <a:pPr algn="ctr"/>
-          </a:p>
-        </p:txBody>
-      </p:sp>
-      <p:sp>
-        <p:nvSpPr>
-          <p:cNvPr id="13" name="TextBox 12"/>
-          <p:cNvSpPr txBox="1"/>
-          <p:nvPr/>
-        </p:nvSpPr>
-        <p:spPr>
-          <a:xfrm>
-            <a:off x="700000" y="2320000"/>
-            <a:ext cx="550000" cy="550000"/>
-          </a:xfrm>
-          <a:prstGeom prst="rect">
-            <a:avLst/>
-          </a:prstGeom>
-          <a:noFill/>
-        </p:spPr>
-        <p:txBody>
-          <a:bodyPr wrap="square" anchor="ctr">
-            <a:spAutoFit/>
-          </a:bodyPr>
-          <a:lstStyle/>
-          <a:p>
-            <a:pPr algn="ctr"/>
-            <a:r>
-              <a:rPr sz="1400" b="1">
-                <a:solidFill>
-                  <a:srgbClr val="FFFFFF"/>
-                </a:solidFill>
-                <a:latin typeface="Open Sans"/>
-                <a:ea typeface="Open Sans"/>
-                <a:cs typeface="Open Sans"/>
-              </a:rPr>
-              <a:t>2</a:t>
-            </a:r>
-          </a:p>
-        </p:txBody>
-      </p:sp>
-      <p:sp>
-        <p:nvSpPr>
-          <p:cNvPr id="14" name="Rectangle 13"/>
-          <p:cNvSpPr/>
-          <p:nvPr/>
-        </p:nvSpPr>
-        <p:spPr>
-          <a:xfrm>
-            <a:off x="1450000" y="2320000"/>
-            <a:ext cx="10500000" cy="550000"/>
-          </a:xfrm>
-          <a:prstGeom prst="rect">
-            <a:avLst/>
-          </a:prstGeom>
-          <a:solidFill>
-            <a:srgbClr val="FFFFFF"/>
-          </a:solidFill>
-          <a:ln w="12700">
-            <a:solidFill>
-              <a:srgbClr val="999999"/>
-            </a:solidFill>
-          </a:ln>
-        </p:spPr>
-        <p:style>
-          <a:lnRef idx="1">
-            <a:schemeClr val="accent1"/>
-          </a:lnRef>
-          <a:fillRef idx="3">
-            <a:schemeClr val="accent1"/>
-          </a:fillRef>
-          <a:effectRef idx="2">
-            <a:schemeClr val="accent1"/>
-          </a:effectRef>
-          <a:fontRef idx="minor">
-            <a:schemeClr val="lt1"/>
-          </a:fontRef>
-        </p:style>
-        <p:txBody>
-          <a:bodyPr rtlCol="0" anchor="ctr"/>
-          <a:lstStyle/>
-          <a:p>
-            <a:pPr algn="ctr"/>
-          </a:p>
-        </p:txBody>
-      </p:sp>
-      <p:sp>
-        <p:nvSpPr>
-          <p:cNvPr id="15" name="TextBox 14"/>
-          <p:cNvSpPr txBox="1"/>
-          <p:nvPr/>
-        </p:nvSpPr>
-        <p:spPr>
-          <a:xfrm>
-            <a:off x="1650000" y="2320000"/>
-            <a:ext cx="10100000" cy="550000"/>
-          </a:xfrm>
-          <a:prstGeom prst="rect">
-            <a:avLst/>
-          </a:prstGeom>
-          <a:noFill/>
-        </p:spPr>
-        <p:txBody>
-          <a:bodyPr wrap="square" anchor="ctr">
-            <a:spAutoFit/>
-          </a:bodyPr>
-          <a:lstStyle/>
-          <a:p>
-            <a:pPr algn="l"/>
-            <a:r>
-              <a:rPr sz="1300" b="0">
-                <a:solidFill>
-                  <a:srgbClr val="333333"/>
-                </a:solidFill>
-                <a:latin typeface="Open Sans"/>
-                <a:ea typeface="Open Sans"/>
-                <a:cs typeface="Open Sans"/>
-              </a:rPr>
-              <a:t>Наблюдайте за частотой и характером дыхания.</a:t>
-            </a:r>
-          </a:p>
-        </p:txBody>
-      </p:sp>
-      <p:sp>
-        <p:nvSpPr>
-          <p:cNvPr id="16" name="Oval 15"/>
-          <p:cNvSpPr/>
-          <p:nvPr/>
-        </p:nvSpPr>
-        <p:spPr>
-          <a:xfrm>
-            <a:off x="700000" y="3190000"/>
-            <a:ext cx="550000" cy="550000"/>
-          </a:xfrm>
-          <a:prstGeom prst="ellipse">
-            <a:avLst/>
-          </a:prstGeom>
-          <a:solidFill>
-            <a:srgbClr val="555555"/>
-          </a:solidFill>
-          <a:ln>
-            <a:noFill/>
-          </a:ln>
-        </p:spPr>
-        <p:style>
-          <a:lnRef idx="1">
-            <a:schemeClr val="accent1"/>
-          </a:lnRef>
-          <a:fillRef idx="3">
-            <a:schemeClr val="accent1"/>
-          </a:fillRef>
-          <a:effectRef idx="2">
-            <a:schemeClr val="accent1"/>
-          </a:effectRef>
-          <a:fontRef idx="minor">
-            <a:schemeClr val="lt1"/>
-          </a:fontRef>
-        </p:style>
-        <p:txBody>
-          <a:bodyPr rtlCol="0" anchor="ctr"/>
-          <a:lstStyle/>
-          <a:p>
-            <a:pPr algn="ctr"/>
-          </a:p>
-        </p:txBody>
-      </p:sp>
-      <p:sp>
-        <p:nvSpPr>
-          <p:cNvPr id="17" name="TextBox 16"/>
-          <p:cNvSpPr txBox="1"/>
-          <p:nvPr/>
-        </p:nvSpPr>
-        <p:spPr>
-          <a:xfrm>
-            <a:off x="700000" y="3190000"/>
-            <a:ext cx="550000" cy="550000"/>
-          </a:xfrm>
-          <a:prstGeom prst="rect">
-            <a:avLst/>
-          </a:prstGeom>
-          <a:noFill/>
-        </p:spPr>
-        <p:txBody>
-          <a:bodyPr wrap="square" anchor="ctr">
-            <a:spAutoFit/>
-          </a:bodyPr>
-          <a:lstStyle/>
-          <a:p>
-            <a:pPr algn="ctr"/>
-            <a:r>
-              <a:rPr sz="1400" b="1">
-                <a:solidFill>
-                  <a:srgbClr val="FFFFFF"/>
-                </a:solidFill>
-                <a:latin typeface="Open Sans"/>
-                <a:ea typeface="Open Sans"/>
-                <a:cs typeface="Open Sans"/>
-              </a:rPr>
-              <a:t>3</a:t>
-            </a:r>
-          </a:p>
-        </p:txBody>
-      </p:sp>
-      <p:sp>
-        <p:nvSpPr>
-          <p:cNvPr id="18" name="Rectangle 17"/>
-          <p:cNvSpPr/>
-          <p:nvPr/>
-        </p:nvSpPr>
-        <p:spPr>
-          <a:xfrm>
-            <a:off x="1450000" y="3190000"/>
-            <a:ext cx="10500000" cy="550000"/>
-          </a:xfrm>
-          <a:prstGeom prst="rect">
-            <a:avLst/>
-          </a:prstGeom>
-          <a:solidFill>
-            <a:srgbClr val="FFFFFF"/>
-          </a:solidFill>
-          <a:ln w="12700">
-            <a:solidFill>
-              <a:srgbClr val="999999"/>
-            </a:solidFill>
-          </a:ln>
-        </p:spPr>
-        <p:style>
-          <a:lnRef idx="1">
-            <a:schemeClr val="accent1"/>
-          </a:lnRef>
-          <a:fillRef idx="3">
-            <a:schemeClr val="accent1"/>
-          </a:fillRef>
-          <a:effectRef idx="2">
-            <a:schemeClr val="accent1"/>
-          </a:effectRef>
-          <a:fontRef idx="minor">
-            <a:schemeClr val="lt1"/>
-          </a:fontRef>
-        </p:style>
-        <p:txBody>
-          <a:bodyPr rtlCol="0" anchor="ctr"/>
-          <a:lstStyle/>
-          <a:p>
-            <a:pPr algn="ctr"/>
-          </a:p>
-        </p:txBody>
-      </p:sp>
-      <p:sp>
-        <p:nvSpPr>
-          <p:cNvPr id="19" name="TextBox 18"/>
-          <p:cNvSpPr txBox="1"/>
-          <p:nvPr/>
-        </p:nvSpPr>
-        <p:spPr>
-          <a:xfrm>
-            <a:off x="1650000" y="3190000"/>
-            <a:ext cx="10100000" cy="550000"/>
-          </a:xfrm>
-          <a:prstGeom prst="rect">
-            <a:avLst/>
-          </a:prstGeom>
-          <a:noFill/>
-        </p:spPr>
-        <p:txBody>
-          <a:bodyPr wrap="square" anchor="ctr">
-            <a:spAutoFit/>
-          </a:bodyPr>
-          <a:lstStyle/>
-          <a:p>
-            <a:pPr algn="l"/>
-            <a:r>
-              <a:rPr sz="1300" b="0">
-                <a:solidFill>
-                  <a:srgbClr val="333333"/>
-                </a:solidFill>
-                <a:latin typeface="Open Sans"/>
-                <a:ea typeface="Open Sans"/>
-                <a:cs typeface="Open Sans"/>
-              </a:rPr>
-              <a:t>Следите за цветом и температурой кожи.</a:t>
-            </a:r>
-          </a:p>
-        </p:txBody>
-      </p:sp>
-      <p:sp>
-        <p:nvSpPr>
-          <p:cNvPr id="20" name="Oval 19"/>
-          <p:cNvSpPr/>
-          <p:nvPr/>
-        </p:nvSpPr>
-        <p:spPr>
-          <a:xfrm>
-            <a:off x="700000" y="4060000"/>
-            <a:ext cx="550000" cy="550000"/>
-          </a:xfrm>
-          <a:prstGeom prst="ellipse">
-            <a:avLst/>
-          </a:prstGeom>
-          <a:solidFill>
-            <a:srgbClr val="555555"/>
-          </a:solidFill>
-          <a:ln>
-            <a:noFill/>
-          </a:ln>
-        </p:spPr>
-        <p:style>
-          <a:lnRef idx="1">
-            <a:schemeClr val="accent1"/>
-          </a:lnRef>
-          <a:fillRef idx="3">
-            <a:schemeClr val="accent1"/>
-          </a:fillRef>
-          <a:effectRef idx="2">
-            <a:schemeClr val="accent1"/>
-          </a:effectRef>
-          <a:fontRef idx="minor">
-            <a:schemeClr val="lt1"/>
-          </a:fontRef>
-        </p:style>
-        <p:txBody>
-          <a:bodyPr rtlCol="0" anchor="ctr"/>
-          <a:lstStyle/>
-          <a:p>
-            <a:pPr algn="ctr"/>
-          </a:p>
-        </p:txBody>
-      </p:sp>
-      <p:sp>
-        <p:nvSpPr>
-          <p:cNvPr id="21" name="TextBox 20"/>
-          <p:cNvSpPr txBox="1"/>
-          <p:nvPr/>
-        </p:nvSpPr>
-        <p:spPr>
-          <a:xfrm>
-            <a:off x="700000" y="4060000"/>
-            <a:ext cx="550000" cy="550000"/>
-          </a:xfrm>
-          <a:prstGeom prst="rect">
-            <a:avLst/>
-          </a:prstGeom>
-          <a:noFill/>
-        </p:spPr>
-        <p:txBody>
-          <a:bodyPr wrap="square" anchor="ctr">
-            <a:spAutoFit/>
-          </a:bodyPr>
-          <a:lstStyle/>
-          <a:p>
-            <a:pPr algn="ctr"/>
-            <a:r>
-              <a:rPr sz="1400" b="1">
-                <a:solidFill>
-                  <a:srgbClr val="FFFFFF"/>
-                </a:solidFill>
-                <a:latin typeface="Open Sans"/>
-                <a:ea typeface="Open Sans"/>
-                <a:cs typeface="Open Sans"/>
-              </a:rPr>
-              <a:t>4</a:t>
-            </a:r>
-          </a:p>
-        </p:txBody>
-      </p:sp>
-      <p:sp>
-        <p:nvSpPr>
-          <p:cNvPr id="22" name="Rectangle 21"/>
-          <p:cNvSpPr/>
-          <p:nvPr/>
-        </p:nvSpPr>
-        <p:spPr>
-          <a:xfrm>
-            <a:off x="1450000" y="4060000"/>
-            <a:ext cx="10500000" cy="550000"/>
-          </a:xfrm>
-          <a:prstGeom prst="rect">
-            <a:avLst/>
-          </a:prstGeom>
-          <a:solidFill>
-            <a:srgbClr val="FFFFFF"/>
-          </a:solidFill>
-          <a:ln w="12700">
-            <a:solidFill>
-              <a:srgbClr val="999999"/>
-            </a:solidFill>
-          </a:ln>
-        </p:spPr>
-        <p:style>
-          <a:lnRef idx="1">
-            <a:schemeClr val="accent1"/>
-          </a:lnRef>
-          <a:fillRef idx="3">
-            <a:schemeClr val="accent1"/>
-          </a:fillRef>
-          <a:effectRef idx="2">
-            <a:schemeClr val="accent1"/>
-          </a:effectRef>
-          <a:fontRef idx="minor">
-            <a:schemeClr val="lt1"/>
-          </a:fontRef>
-        </p:style>
-        <p:txBody>
-          <a:bodyPr rtlCol="0" anchor="ctr"/>
-          <a:lstStyle/>
-          <a:p>
-            <a:pPr algn="ctr"/>
-          </a:p>
-        </p:txBody>
-      </p:sp>
-      <p:sp>
-        <p:nvSpPr>
-          <p:cNvPr id="23" name="TextBox 22"/>
-          <p:cNvSpPr txBox="1"/>
-          <p:nvPr/>
-        </p:nvSpPr>
-        <p:spPr>
-          <a:xfrm>
-            <a:off x="1650000" y="4060000"/>
-            <a:ext cx="10100000" cy="550000"/>
-          </a:xfrm>
-          <a:prstGeom prst="rect">
-            <a:avLst/>
-          </a:prstGeom>
-          <a:noFill/>
-        </p:spPr>
-        <p:txBody>
-          <a:bodyPr wrap="square" anchor="ctr">
-            <a:spAutoFit/>
-          </a:bodyPr>
-          <a:lstStyle/>
-          <a:p>
-            <a:pPr algn="l"/>
-            <a:r>
-              <a:rPr sz="1300" b="0">
-                <a:solidFill>
-                  <a:srgbClr val="333333"/>
-                </a:solidFill>
-                <a:latin typeface="Open Sans"/>
-                <a:ea typeface="Open Sans"/>
-                <a:cs typeface="Open Sans"/>
-              </a:rPr>
-              <a:t>Проверяйте повязки и остановленное кровотечение.</a:t>
-            </a:r>
-          </a:p>
-        </p:txBody>
-      </p:sp>
-      <p:sp>
-        <p:nvSpPr>
-          <p:cNvPr id="24" name="Oval 23"/>
-          <p:cNvSpPr/>
-          <p:nvPr/>
-        </p:nvSpPr>
-        <p:spPr>
-          <a:xfrm>
-            <a:off x="700000" y="4930000"/>
-            <a:ext cx="550000" cy="550000"/>
-          </a:xfrm>
-          <a:prstGeom prst="ellipse">
-            <a:avLst/>
-          </a:prstGeom>
-          <a:solidFill>
-            <a:srgbClr val="555555"/>
-          </a:solidFill>
-          <a:ln>
-            <a:noFill/>
-          </a:ln>
-        </p:spPr>
-        <p:style>
-          <a:lnRef idx="1">
-            <a:schemeClr val="accent1"/>
-          </a:lnRef>
-          <a:fillRef idx="3">
-            <a:schemeClr val="accent1"/>
-          </a:fillRef>
-          <a:effectRef idx="2">
-            <a:schemeClr val="accent1"/>
-          </a:effectRef>
-          <a:fontRef idx="minor">
-            <a:schemeClr val="lt1"/>
-          </a:fontRef>
-        </p:style>
-        <p:txBody>
-          <a:bodyPr rtlCol="0" anchor="ctr"/>
-          <a:lstStyle/>
-          <a:p>
-            <a:pPr algn="ctr"/>
-          </a:p>
-        </p:txBody>
-      </p:sp>
-      <p:sp>
-        <p:nvSpPr>
-          <p:cNvPr id="25" name="TextBox 24"/>
-          <p:cNvSpPr txBox="1"/>
-          <p:nvPr/>
-        </p:nvSpPr>
-        <p:spPr>
-          <a:xfrm>
-            <a:off x="700000" y="4930000"/>
-            <a:ext cx="550000" cy="550000"/>
-          </a:xfrm>
-          <a:prstGeom prst="rect">
-            <a:avLst/>
-          </a:prstGeom>
-          <a:noFill/>
-        </p:spPr>
-        <p:txBody>
-          <a:bodyPr wrap="square" anchor="ctr">
-            <a:spAutoFit/>
-          </a:bodyPr>
-          <a:lstStyle/>
-          <a:p>
-            <a:pPr algn="ctr"/>
-            <a:r>
-              <a:rPr sz="1400" b="1">
-                <a:solidFill>
-                  <a:srgbClr val="FFFFFF"/>
-                </a:solidFill>
-                <a:latin typeface="Open Sans"/>
-                <a:ea typeface="Open Sans"/>
-                <a:cs typeface="Open Sans"/>
-              </a:rPr>
-              <a:t>5</a:t>
-            </a:r>
-          </a:p>
-        </p:txBody>
-      </p:sp>
-      <p:sp>
-        <p:nvSpPr>
-          <p:cNvPr id="26" name="Rectangle 25"/>
-          <p:cNvSpPr/>
-          <p:nvPr/>
-        </p:nvSpPr>
-        <p:spPr>
-          <a:xfrm>
-            <a:off x="1450000" y="4930000"/>
-            <a:ext cx="10500000" cy="550000"/>
-          </a:xfrm>
-          <a:prstGeom prst="rect">
-            <a:avLst/>
-          </a:prstGeom>
-          <a:solidFill>
-            <a:srgbClr val="FFFFFF"/>
-          </a:solidFill>
-          <a:ln w="12700">
-            <a:solidFill>
-              <a:srgbClr val="999999"/>
-            </a:solidFill>
-          </a:ln>
-        </p:spPr>
-        <p:style>
-          <a:lnRef idx="1">
-            <a:schemeClr val="accent1"/>
-          </a:lnRef>
-          <a:fillRef idx="3">
-            <a:schemeClr val="accent1"/>
-          </a:fillRef>
-          <a:effectRef idx="2">
-            <a:schemeClr val="accent1"/>
-          </a:effectRef>
-          <a:fontRef idx="minor">
-            <a:schemeClr val="lt1"/>
-          </a:fontRef>
-        </p:style>
-        <p:txBody>
-          <a:bodyPr rtlCol="0" anchor="ctr"/>
-          <a:lstStyle/>
-          <a:p>
-            <a:pPr algn="ctr"/>
-          </a:p>
-        </p:txBody>
-      </p:sp>
-      <p:sp>
-        <p:nvSpPr>
-          <p:cNvPr id="27" name="TextBox 26"/>
-          <p:cNvSpPr txBox="1"/>
-          <p:nvPr/>
-        </p:nvSpPr>
-        <p:spPr>
-          <a:xfrm>
-            <a:off x="1650000" y="4930000"/>
-            <a:ext cx="10100000" cy="550000"/>
-          </a:xfrm>
-          <a:prstGeom prst="rect">
-            <a:avLst/>
-          </a:prstGeom>
-          <a:noFill/>
-        </p:spPr>
-        <p:txBody>
-          <a:bodyPr wrap="square" anchor="ctr">
-            <a:spAutoFit/>
-          </a:bodyPr>
-          <a:lstStyle/>
-          <a:p>
-            <a:pPr algn="l"/>
-            <a:r>
-              <a:rPr sz="1300" b="0">
-                <a:solidFill>
-                  <a:srgbClr val="333333"/>
-                </a:solidFill>
-                <a:latin typeface="Open Sans"/>
-                <a:ea typeface="Open Sans"/>
-                <a:cs typeface="Open Sans"/>
-              </a:rPr>
-              <a:t>Отмечайте новые жалобы и изменения.</a:t>
-            </a:r>
-          </a:p>
-        </p:txBody>
-      </p:sp>
-      <p:sp>
-        <p:nvSpPr>
-          <p:cNvPr id="28" name="Oval 27"/>
-          <p:cNvSpPr/>
-          <p:nvPr/>
-        </p:nvSpPr>
-        <p:spPr>
-          <a:xfrm>
-            <a:off x="700000" y="5800000"/>
-            <a:ext cx="550000" cy="550000"/>
-          </a:xfrm>
-          <a:prstGeom prst="ellipse">
-            <a:avLst/>
-          </a:prstGeom>
-          <a:solidFill>
-            <a:srgbClr val="555555"/>
-          </a:solidFill>
-          <a:ln>
-            <a:noFill/>
-          </a:ln>
-        </p:spPr>
-        <p:style>
-          <a:lnRef idx="1">
-            <a:schemeClr val="accent1"/>
-          </a:lnRef>
-          <a:fillRef idx="3">
-            <a:schemeClr val="accent1"/>
-          </a:fillRef>
-          <a:effectRef idx="2">
-            <a:schemeClr val="accent1"/>
-          </a:effectRef>
-          <a:fontRef idx="minor">
-            <a:schemeClr val="lt1"/>
-          </a:fontRef>
-        </p:style>
-        <p:txBody>
-          <a:bodyPr rtlCol="0" anchor="ctr"/>
-          <a:lstStyle/>
-          <a:p>
-            <a:pPr algn="ctr"/>
-          </a:p>
-        </p:txBody>
-      </p:sp>
-      <p:sp>
-        <p:nvSpPr>
-          <p:cNvPr id="29" name="TextBox 28"/>
-          <p:cNvSpPr txBox="1"/>
-          <p:nvPr/>
-        </p:nvSpPr>
-        <p:spPr>
-          <a:xfrm>
-            <a:off x="700000" y="5800000"/>
-            <a:ext cx="550000" cy="550000"/>
-          </a:xfrm>
-          <a:prstGeom prst="rect">
-            <a:avLst/>
-          </a:prstGeom>
-          <a:noFill/>
-        </p:spPr>
-        <p:txBody>
-          <a:bodyPr wrap="square" anchor="ctr">
-            <a:spAutoFit/>
-          </a:bodyPr>
-          <a:lstStyle/>
-          <a:p>
-            <a:pPr algn="ctr"/>
-            <a:r>
-              <a:rPr sz="1400" b="1">
-                <a:solidFill>
-                  <a:srgbClr val="FFFFFF"/>
-                </a:solidFill>
-                <a:latin typeface="Open Sans"/>
-                <a:ea typeface="Open Sans"/>
-                <a:cs typeface="Open Sans"/>
-              </a:rPr>
-              <a:t>6</a:t>
-            </a:r>
-          </a:p>
-        </p:txBody>
-      </p:sp>
-      <p:sp>
-        <p:nvSpPr>
-          <p:cNvPr id="30" name="Rectangle 29"/>
-          <p:cNvSpPr/>
-          <p:nvPr/>
-        </p:nvSpPr>
-        <p:spPr>
-          <a:xfrm>
-            <a:off x="1450000" y="5800000"/>
-            <a:ext cx="10500000" cy="550000"/>
-          </a:xfrm>
-          <a:prstGeom prst="rect">
-            <a:avLst/>
-          </a:prstGeom>
-          <a:solidFill>
-            <a:srgbClr val="FFFFFF"/>
-          </a:solidFill>
-          <a:ln w="12700">
-            <a:solidFill>
-              <a:srgbClr val="999999"/>
-            </a:solidFill>
-          </a:ln>
-        </p:spPr>
-        <p:style>
-          <a:lnRef idx="1">
-            <a:schemeClr val="accent1"/>
-          </a:lnRef>
-          <a:fillRef idx="3">
-            <a:schemeClr val="accent1"/>
-          </a:fillRef>
-          <a:effectRef idx="2">
-            <a:schemeClr val="accent1"/>
-          </a:effectRef>
-          <a:fontRef idx="minor">
-            <a:schemeClr val="lt1"/>
-          </a:fontRef>
-        </p:style>
-        <p:txBody>
-          <a:bodyPr rtlCol="0" anchor="ctr"/>
-          <a:lstStyle/>
-          <a:p>
-            <a:pPr algn="ctr"/>
-          </a:p>
-        </p:txBody>
-      </p:sp>
-      <p:sp>
-        <p:nvSpPr>
-          <p:cNvPr id="31" name="TextBox 30"/>
-          <p:cNvSpPr txBox="1"/>
-          <p:nvPr/>
-        </p:nvSpPr>
-        <p:spPr>
-          <a:xfrm>
-            <a:off x="1650000" y="5800000"/>
-            <a:ext cx="10100000" cy="550000"/>
-          </a:xfrm>
-          <a:prstGeom prst="rect">
-            <a:avLst/>
-          </a:prstGeom>
-          <a:noFill/>
-        </p:spPr>
-        <p:txBody>
-          <a:bodyPr wrap="square" anchor="ctr">
-            <a:spAutoFit/>
-          </a:bodyPr>
-          <a:lstStyle/>
-          <a:p>
-            <a:pPr algn="l"/>
-            <a:r>
-              <a:rPr sz="1300" b="0">
-                <a:solidFill>
-                  <a:srgbClr val="333333"/>
-                </a:solidFill>
-                <a:latin typeface="Open Sans"/>
-                <a:ea typeface="Open Sans"/>
-                <a:cs typeface="Open Sans"/>
-              </a:rPr>
-              <a:t>Будьте готовы изменить положение или начать реанимацию.</a:t>
+              <a:t>Положение уменьшает напряжение мышц, но его не навязывают при резкой боли или сочетанной травме.</a:t>
             </a:r>
           </a:p>
         </p:txBody>
@@ -6441,7 +8774,7 @@
                 <a:ea typeface="Open Sans"/>
                 <a:cs typeface="Open Sans"/>
               </a:rPr>
-              <a:t>ПСИХОЛОГИЧЕСКАЯ ПОДДЕРЖКА</a:t>
+              <a:t>БЕЗ СОЗНАНИЯ, НО ДЫШИТ: НА БОК</a:t>
             </a:r>
           </a:p>
         </p:txBody>
@@ -6606,27 +8939,162 @@
           </a:p>
         </p:txBody>
       </p:sp>
-      <p:sp>
-        <p:nvSpPr>
-          <p:cNvPr id="8" name="Rectangle 7"/>
+      <p:pic>
+        <p:nvPicPr>
+          <p:cNvPr id="8" name="Picture 7" descr="fig80.jpeg"/>
+          <p:cNvPicPr>
+            <a:picLocks noChangeAspect="1"/>
+          </p:cNvPicPr>
+          <p:nvPr/>
+        </p:nvPicPr>
+        <p:blipFill>
+          <a:blip r:embed="rId2"/>
+          <a:stretch>
+            <a:fillRect/>
+          </a:stretch>
+        </p:blipFill>
+        <p:spPr>
+          <a:xfrm>
+            <a:off x="500000" y="1993594"/>
+            <a:ext cx="5200000" cy="2912812"/>
+          </a:xfrm>
+          <a:prstGeom prst="rect">
+            <a:avLst/>
+          </a:prstGeom>
+        </p:spPr>
+      </p:pic>
+      <p:sp>
+        <p:nvSpPr>
+          <p:cNvPr id="9" name="TextBox 8"/>
+          <p:cNvSpPr txBox="1"/>
+          <p:nvPr/>
+        </p:nvSpPr>
+        <p:spPr>
+          <a:xfrm>
+            <a:off x="6000000" y="1450000"/>
+            <a:ext cx="6200000" cy="3800000"/>
+          </a:xfrm>
+          <a:prstGeom prst="rect">
+            <a:avLst/>
+          </a:prstGeom>
+          <a:noFill/>
+        </p:spPr>
+        <p:txBody>
+          <a:bodyPr wrap="square">
+            <a:spAutoFit/>
+          </a:bodyPr>
+          <a:lstStyle/>
+          <a:p>
+            <a:pPr algn="l">
+              <a:spcAft>
+                <a:spcPts val="800"/>
+              </a:spcAft>
+            </a:pPr>
+            <a:r>
+              <a:rPr sz="1300" b="0">
+                <a:solidFill>
+                  <a:srgbClr val="333333"/>
+                </a:solidFill>
+                <a:latin typeface="Open Sans"/>
+                <a:ea typeface="Open Sans"/>
+                <a:cs typeface="Open Sans"/>
+              </a:rPr>
+              <a:t>•  Убедитесь, что дыхание нормальное.</a:t>
+            </a:r>
+          </a:p>
+          <a:p>
+            <a:pPr algn="l">
+              <a:spcAft>
+                <a:spcPts val="800"/>
+              </a:spcAft>
+            </a:pPr>
+            <a:r>
+              <a:rPr sz="1300" b="0">
+                <a:solidFill>
+                  <a:srgbClr val="333333"/>
+                </a:solidFill>
+                <a:latin typeface="Open Sans"/>
+                <a:ea typeface="Open Sans"/>
+                <a:cs typeface="Open Sans"/>
+              </a:rPr>
+              <a:t>•  Поверните пострадавшего в устойчивое боковое положение.</a:t>
+            </a:r>
+          </a:p>
+          <a:p>
+            <a:pPr algn="l">
+              <a:spcAft>
+                <a:spcPts val="800"/>
+              </a:spcAft>
+            </a:pPr>
+            <a:r>
+              <a:rPr sz="1300" b="0">
+                <a:solidFill>
+                  <a:srgbClr val="333333"/>
+                </a:solidFill>
+                <a:latin typeface="Open Sans"/>
+                <a:ea typeface="Open Sans"/>
+                <a:cs typeface="Open Sans"/>
+              </a:rPr>
+              <a:t>•  Откройте рот и направьте лицо вниз для свободного оттока жидкости.</a:t>
+            </a:r>
+          </a:p>
+          <a:p>
+            <a:pPr algn="l">
+              <a:spcAft>
+                <a:spcPts val="800"/>
+              </a:spcAft>
+            </a:pPr>
+            <a:r>
+              <a:rPr sz="1300" b="0">
+                <a:solidFill>
+                  <a:srgbClr val="333333"/>
+                </a:solidFill>
+                <a:latin typeface="Open Sans"/>
+                <a:ea typeface="Open Sans"/>
+                <a:cs typeface="Open Sans"/>
+              </a:rPr>
+              <a:t>•  Поддерживайте проходимость дыхательных путей и избегайте давления на грудь.</a:t>
+            </a:r>
+          </a:p>
+          <a:p>
+            <a:pPr algn="l">
+              <a:spcAft>
+                <a:spcPts val="800"/>
+              </a:spcAft>
+            </a:pPr>
+            <a:r>
+              <a:rPr sz="1300" b="0">
+                <a:solidFill>
+                  <a:srgbClr val="333333"/>
+                </a:solidFill>
+                <a:latin typeface="Open Sans"/>
+                <a:ea typeface="Open Sans"/>
+                <a:cs typeface="Open Sans"/>
+              </a:rPr>
+              <a:t>•  Регулярно проверяйте дыхание; при его прекращении переверните на спину.</a:t>
+            </a:r>
+          </a:p>
+        </p:txBody>
+      </p:sp>
+      <p:sp>
+        <p:nvSpPr>
+          <p:cNvPr id="10" name="Rounded Rectangle 9"/>
           <p:cNvSpPr/>
           <p:nvPr/>
         </p:nvSpPr>
         <p:spPr>
           <a:xfrm>
-            <a:off x="700000" y="1450000"/>
-            <a:ext cx="5375000" cy="2300000"/>
-          </a:xfrm>
-          <a:prstGeom prst="rect">
+            <a:off x="6000000" y="5400000"/>
+            <a:ext cx="6200000" cy="1100000"/>
+          </a:xfrm>
+          <a:prstGeom prst="roundRect">
             <a:avLst/>
           </a:prstGeom>
           <a:solidFill>
-            <a:srgbClr val="FFFFFF"/>
+            <a:srgbClr val="F5F0E1"/>
           </a:solidFill>
-          <a:ln w="12700">
-            <a:solidFill>
-              <a:srgbClr val="999999"/>
-            </a:solidFill>
+          <a:ln>
+            <a:noFill/>
           </a:ln>
         </p:spPr>
         <p:style>
@@ -6653,57 +9121,14 @@
       </p:sp>
       <p:sp>
         <p:nvSpPr>
-          <p:cNvPr id="9" name="Oval 8"/>
-          <p:cNvSpPr/>
-          <p:nvPr/>
-        </p:nvSpPr>
-        <p:spPr>
-          <a:xfrm>
-            <a:off x="850000" y="1650000"/>
-            <a:ext cx="500000" cy="500000"/>
-          </a:xfrm>
-          <a:prstGeom prst="ellipse">
-            <a:avLst/>
-          </a:prstGeom>
-          <a:solidFill>
-            <a:srgbClr val="555555"/>
-          </a:solidFill>
-          <a:ln>
-            <a:noFill/>
-          </a:ln>
-        </p:spPr>
-        <p:style>
-          <a:lnRef idx="1">
-            <a:schemeClr val="accent1"/>
-          </a:lnRef>
-          <a:fillRef idx="3">
-            <a:schemeClr val="accent1"/>
-          </a:fillRef>
-          <a:effectRef idx="2">
-            <a:schemeClr val="accent1"/>
-          </a:effectRef>
-          <a:fontRef idx="minor">
-            <a:schemeClr val="lt1"/>
-          </a:fontRef>
-        </p:style>
-        <p:txBody>
-          <a:bodyPr rtlCol="0" anchor="ctr"/>
-          <a:lstStyle/>
-          <a:p>
-            <a:pPr algn="ctr"/>
-          </a:p>
-        </p:txBody>
-      </p:sp>
-      <p:sp>
-        <p:nvSpPr>
-          <p:cNvPr id="10" name="TextBox 9"/>
+          <p:cNvPr id="11" name="TextBox 10"/>
           <p:cNvSpPr txBox="1"/>
           <p:nvPr/>
         </p:nvSpPr>
         <p:spPr>
           <a:xfrm>
-            <a:off x="850000" y="1650000"/>
-            <a:ext cx="500000" cy="500000"/>
+            <a:off x="6250000" y="5600000"/>
+            <a:ext cx="5700000" cy="700000"/>
           </a:xfrm>
           <a:prstGeom prst="rect">
             <a:avLst/>
@@ -6716,46 +9141,9 @@
           </a:bodyPr>
           <a:lstStyle/>
           <a:p>
-            <a:pPr algn="ctr"/>
-            <a:r>
-              <a:rPr sz="1400" b="1">
-                <a:solidFill>
-                  <a:srgbClr val="FFFFFF"/>
-                </a:solidFill>
-                <a:latin typeface="Open Sans"/>
-                <a:ea typeface="Open Sans"/>
-                <a:cs typeface="Open Sans"/>
-              </a:rPr>
-              <a:t>1</a:t>
-            </a:r>
-          </a:p>
-        </p:txBody>
-      </p:sp>
-      <p:sp>
-        <p:nvSpPr>
-          <p:cNvPr id="11" name="TextBox 10"/>
-          <p:cNvSpPr txBox="1"/>
-          <p:nvPr/>
-        </p:nvSpPr>
-        <p:spPr>
-          <a:xfrm>
-            <a:off x="1450000" y="1700000"/>
-            <a:ext cx="4475000" cy="450000"/>
-          </a:xfrm>
-          <a:prstGeom prst="rect">
-            <a:avLst/>
-          </a:prstGeom>
-          <a:noFill/>
-        </p:spPr>
-        <p:txBody>
-          <a:bodyPr wrap="square" anchor="t">
-            <a:spAutoFit/>
-          </a:bodyPr>
-          <a:lstStyle/>
-          <a:p>
             <a:pPr algn="l"/>
             <a:r>
-              <a:rPr sz="1300" b="1">
+              <a:rPr sz="1200" b="0">
                 <a:solidFill>
                   <a:srgbClr val="333333"/>
                 </a:solidFill>
@@ -6763,641 +9151,7 @@
                 <a:ea typeface="Open Sans"/>
                 <a:cs typeface="Open Sans"/>
               </a:rPr>
-              <a:t>Слушайте</a:t>
-            </a:r>
-          </a:p>
-        </p:txBody>
-      </p:sp>
-      <p:sp>
-        <p:nvSpPr>
-          <p:cNvPr id="12" name="TextBox 11"/>
-          <p:cNvSpPr txBox="1"/>
-          <p:nvPr/>
-        </p:nvSpPr>
-        <p:spPr>
-          <a:xfrm>
-            <a:off x="850000" y="2300000"/>
-            <a:ext cx="5075000" cy="1300000"/>
-          </a:xfrm>
-          <a:prstGeom prst="rect">
-            <a:avLst/>
-          </a:prstGeom>
-          <a:noFill/>
-        </p:spPr>
-        <p:txBody>
-          <a:bodyPr wrap="square" anchor="t">
-            <a:spAutoFit/>
-          </a:bodyPr>
-          <a:lstStyle/>
-          <a:p>
-            <a:pPr algn="l"/>
-            <a:r>
-              <a:rPr sz="1200" b="0">
-                <a:solidFill>
-                  <a:srgbClr val="666666"/>
-                </a:solidFill>
-                <a:latin typeface="Open Sans"/>
-                <a:ea typeface="Open Sans"/>
-                <a:cs typeface="Open Sans"/>
-              </a:rPr>
-              <a:t>Дайте человеку говорить, не перебивайте и не спорьте.</a:t>
-            </a:r>
-          </a:p>
-        </p:txBody>
-      </p:sp>
-      <p:sp>
-        <p:nvSpPr>
-          <p:cNvPr id="13" name="Rectangle 12"/>
-          <p:cNvSpPr/>
-          <p:nvPr/>
-        </p:nvSpPr>
-        <p:spPr>
-          <a:xfrm>
-            <a:off x="6325000" y="1450000"/>
-            <a:ext cx="5375000" cy="2300000"/>
-          </a:xfrm>
-          <a:prstGeom prst="rect">
-            <a:avLst/>
-          </a:prstGeom>
-          <a:solidFill>
-            <a:srgbClr val="FFFFFF"/>
-          </a:solidFill>
-          <a:ln w="12700">
-            <a:solidFill>
-              <a:srgbClr val="999999"/>
-            </a:solidFill>
-          </a:ln>
-        </p:spPr>
-        <p:style>
-          <a:lnRef idx="1">
-            <a:schemeClr val="accent1"/>
-          </a:lnRef>
-          <a:fillRef idx="3">
-            <a:schemeClr val="accent1"/>
-          </a:fillRef>
-          <a:effectRef idx="2">
-            <a:schemeClr val="accent1"/>
-          </a:effectRef>
-          <a:fontRef idx="minor">
-            <a:schemeClr val="lt1"/>
-          </a:fontRef>
-        </p:style>
-        <p:txBody>
-          <a:bodyPr rtlCol="0" anchor="ctr"/>
-          <a:lstStyle/>
-          <a:p>
-            <a:pPr algn="ctr"/>
-          </a:p>
-        </p:txBody>
-      </p:sp>
-      <p:sp>
-        <p:nvSpPr>
-          <p:cNvPr id="14" name="Oval 13"/>
-          <p:cNvSpPr/>
-          <p:nvPr/>
-        </p:nvSpPr>
-        <p:spPr>
-          <a:xfrm>
-            <a:off x="6475000" y="1650000"/>
-            <a:ext cx="500000" cy="500000"/>
-          </a:xfrm>
-          <a:prstGeom prst="ellipse">
-            <a:avLst/>
-          </a:prstGeom>
-          <a:solidFill>
-            <a:srgbClr val="555555"/>
-          </a:solidFill>
-          <a:ln>
-            <a:noFill/>
-          </a:ln>
-        </p:spPr>
-        <p:style>
-          <a:lnRef idx="1">
-            <a:schemeClr val="accent1"/>
-          </a:lnRef>
-          <a:fillRef idx="3">
-            <a:schemeClr val="accent1"/>
-          </a:fillRef>
-          <a:effectRef idx="2">
-            <a:schemeClr val="accent1"/>
-          </a:effectRef>
-          <a:fontRef idx="minor">
-            <a:schemeClr val="lt1"/>
-          </a:fontRef>
-        </p:style>
-        <p:txBody>
-          <a:bodyPr rtlCol="0" anchor="ctr"/>
-          <a:lstStyle/>
-          <a:p>
-            <a:pPr algn="ctr"/>
-          </a:p>
-        </p:txBody>
-      </p:sp>
-      <p:sp>
-        <p:nvSpPr>
-          <p:cNvPr id="15" name="TextBox 14"/>
-          <p:cNvSpPr txBox="1"/>
-          <p:nvPr/>
-        </p:nvSpPr>
-        <p:spPr>
-          <a:xfrm>
-            <a:off x="6475000" y="1650000"/>
-            <a:ext cx="500000" cy="500000"/>
-          </a:xfrm>
-          <a:prstGeom prst="rect">
-            <a:avLst/>
-          </a:prstGeom>
-          <a:noFill/>
-        </p:spPr>
-        <p:txBody>
-          <a:bodyPr wrap="square" anchor="ctr">
-            <a:spAutoFit/>
-          </a:bodyPr>
-          <a:lstStyle/>
-          <a:p>
-            <a:pPr algn="ctr"/>
-            <a:r>
-              <a:rPr sz="1400" b="1">
-                <a:solidFill>
-                  <a:srgbClr val="FFFFFF"/>
-                </a:solidFill>
-                <a:latin typeface="Open Sans"/>
-                <a:ea typeface="Open Sans"/>
-                <a:cs typeface="Open Sans"/>
-              </a:rPr>
-              <a:t>2</a:t>
-            </a:r>
-          </a:p>
-        </p:txBody>
-      </p:sp>
-      <p:sp>
-        <p:nvSpPr>
-          <p:cNvPr id="16" name="TextBox 15"/>
-          <p:cNvSpPr txBox="1"/>
-          <p:nvPr/>
-        </p:nvSpPr>
-        <p:spPr>
-          <a:xfrm>
-            <a:off x="7075000" y="1700000"/>
-            <a:ext cx="4475000" cy="450000"/>
-          </a:xfrm>
-          <a:prstGeom prst="rect">
-            <a:avLst/>
-          </a:prstGeom>
-          <a:noFill/>
-        </p:spPr>
-        <p:txBody>
-          <a:bodyPr wrap="square" anchor="t">
-            <a:spAutoFit/>
-          </a:bodyPr>
-          <a:lstStyle/>
-          <a:p>
-            <a:pPr algn="l"/>
-            <a:r>
-              <a:rPr sz="1300" b="1">
-                <a:solidFill>
-                  <a:srgbClr val="333333"/>
-                </a:solidFill>
-                <a:latin typeface="Open Sans"/>
-                <a:ea typeface="Open Sans"/>
-                <a:cs typeface="Open Sans"/>
-              </a:rPr>
-              <a:t>Успокаивайте</a:t>
-            </a:r>
-          </a:p>
-        </p:txBody>
-      </p:sp>
-      <p:sp>
-        <p:nvSpPr>
-          <p:cNvPr id="17" name="TextBox 16"/>
-          <p:cNvSpPr txBox="1"/>
-          <p:nvPr/>
-        </p:nvSpPr>
-        <p:spPr>
-          <a:xfrm>
-            <a:off x="6475000" y="2300000"/>
-            <a:ext cx="5075000" cy="1300000"/>
-          </a:xfrm>
-          <a:prstGeom prst="rect">
-            <a:avLst/>
-          </a:prstGeom>
-          <a:noFill/>
-        </p:spPr>
-        <p:txBody>
-          <a:bodyPr wrap="square" anchor="t">
-            <a:spAutoFit/>
-          </a:bodyPr>
-          <a:lstStyle/>
-          <a:p>
-            <a:pPr algn="l"/>
-            <a:r>
-              <a:rPr sz="1200" b="0">
-                <a:solidFill>
-                  <a:srgbClr val="666666"/>
-                </a:solidFill>
-                <a:latin typeface="Open Sans"/>
-                <a:ea typeface="Open Sans"/>
-                <a:cs typeface="Open Sans"/>
-              </a:rPr>
-              <a:t>Говорите ровно, короткими и понятными фразами.</a:t>
-            </a:r>
-          </a:p>
-        </p:txBody>
-      </p:sp>
-      <p:sp>
-        <p:nvSpPr>
-          <p:cNvPr id="18" name="Rectangle 17"/>
-          <p:cNvSpPr/>
-          <p:nvPr/>
-        </p:nvSpPr>
-        <p:spPr>
-          <a:xfrm>
-            <a:off x="700000" y="3950000"/>
-            <a:ext cx="5375000" cy="2300000"/>
-          </a:xfrm>
-          <a:prstGeom prst="rect">
-            <a:avLst/>
-          </a:prstGeom>
-          <a:solidFill>
-            <a:srgbClr val="FFFFFF"/>
-          </a:solidFill>
-          <a:ln w="12700">
-            <a:solidFill>
-              <a:srgbClr val="999999"/>
-            </a:solidFill>
-          </a:ln>
-        </p:spPr>
-        <p:style>
-          <a:lnRef idx="1">
-            <a:schemeClr val="accent1"/>
-          </a:lnRef>
-          <a:fillRef idx="3">
-            <a:schemeClr val="accent1"/>
-          </a:fillRef>
-          <a:effectRef idx="2">
-            <a:schemeClr val="accent1"/>
-          </a:effectRef>
-          <a:fontRef idx="minor">
-            <a:schemeClr val="lt1"/>
-          </a:fontRef>
-        </p:style>
-        <p:txBody>
-          <a:bodyPr rtlCol="0" anchor="ctr"/>
-          <a:lstStyle/>
-          <a:p>
-            <a:pPr algn="ctr"/>
-          </a:p>
-        </p:txBody>
-      </p:sp>
-      <p:sp>
-        <p:nvSpPr>
-          <p:cNvPr id="19" name="Oval 18"/>
-          <p:cNvSpPr/>
-          <p:nvPr/>
-        </p:nvSpPr>
-        <p:spPr>
-          <a:xfrm>
-            <a:off x="850000" y="4150000"/>
-            <a:ext cx="500000" cy="500000"/>
-          </a:xfrm>
-          <a:prstGeom prst="ellipse">
-            <a:avLst/>
-          </a:prstGeom>
-          <a:solidFill>
-            <a:srgbClr val="555555"/>
-          </a:solidFill>
-          <a:ln>
-            <a:noFill/>
-          </a:ln>
-        </p:spPr>
-        <p:style>
-          <a:lnRef idx="1">
-            <a:schemeClr val="accent1"/>
-          </a:lnRef>
-          <a:fillRef idx="3">
-            <a:schemeClr val="accent1"/>
-          </a:fillRef>
-          <a:effectRef idx="2">
-            <a:schemeClr val="accent1"/>
-          </a:effectRef>
-          <a:fontRef idx="minor">
-            <a:schemeClr val="lt1"/>
-          </a:fontRef>
-        </p:style>
-        <p:txBody>
-          <a:bodyPr rtlCol="0" anchor="ctr"/>
-          <a:lstStyle/>
-          <a:p>
-            <a:pPr algn="ctr"/>
-          </a:p>
-        </p:txBody>
-      </p:sp>
-      <p:sp>
-        <p:nvSpPr>
-          <p:cNvPr id="20" name="TextBox 19"/>
-          <p:cNvSpPr txBox="1"/>
-          <p:nvPr/>
-        </p:nvSpPr>
-        <p:spPr>
-          <a:xfrm>
-            <a:off x="850000" y="4150000"/>
-            <a:ext cx="500000" cy="500000"/>
-          </a:xfrm>
-          <a:prstGeom prst="rect">
-            <a:avLst/>
-          </a:prstGeom>
-          <a:noFill/>
-        </p:spPr>
-        <p:txBody>
-          <a:bodyPr wrap="square" anchor="ctr">
-            <a:spAutoFit/>
-          </a:bodyPr>
-          <a:lstStyle/>
-          <a:p>
-            <a:pPr algn="ctr"/>
-            <a:r>
-              <a:rPr sz="1400" b="1">
-                <a:solidFill>
-                  <a:srgbClr val="FFFFFF"/>
-                </a:solidFill>
-                <a:latin typeface="Open Sans"/>
-                <a:ea typeface="Open Sans"/>
-                <a:cs typeface="Open Sans"/>
-              </a:rPr>
-              <a:t>3</a:t>
-            </a:r>
-          </a:p>
-        </p:txBody>
-      </p:sp>
-      <p:sp>
-        <p:nvSpPr>
-          <p:cNvPr id="21" name="TextBox 20"/>
-          <p:cNvSpPr txBox="1"/>
-          <p:nvPr/>
-        </p:nvSpPr>
-        <p:spPr>
-          <a:xfrm>
-            <a:off x="1450000" y="4200000"/>
-            <a:ext cx="4475000" cy="450000"/>
-          </a:xfrm>
-          <a:prstGeom prst="rect">
-            <a:avLst/>
-          </a:prstGeom>
-          <a:noFill/>
-        </p:spPr>
-        <p:txBody>
-          <a:bodyPr wrap="square" anchor="t">
-            <a:spAutoFit/>
-          </a:bodyPr>
-          <a:lstStyle/>
-          <a:p>
-            <a:pPr algn="l"/>
-            <a:r>
-              <a:rPr sz="1300" b="1">
-                <a:solidFill>
-                  <a:srgbClr val="333333"/>
-                </a:solidFill>
-                <a:latin typeface="Open Sans"/>
-                <a:ea typeface="Open Sans"/>
-                <a:cs typeface="Open Sans"/>
-              </a:rPr>
-              <a:t>Информируйте</a:t>
-            </a:r>
-          </a:p>
-        </p:txBody>
-      </p:sp>
-      <p:sp>
-        <p:nvSpPr>
-          <p:cNvPr id="22" name="TextBox 21"/>
-          <p:cNvSpPr txBox="1"/>
-          <p:nvPr/>
-        </p:nvSpPr>
-        <p:spPr>
-          <a:xfrm>
-            <a:off x="850000" y="4800000"/>
-            <a:ext cx="5075000" cy="1300000"/>
-          </a:xfrm>
-          <a:prstGeom prst="rect">
-            <a:avLst/>
-          </a:prstGeom>
-          <a:noFill/>
-        </p:spPr>
-        <p:txBody>
-          <a:bodyPr wrap="square" anchor="t">
-            <a:spAutoFit/>
-          </a:bodyPr>
-          <a:lstStyle/>
-          <a:p>
-            <a:pPr algn="l"/>
-            <a:r>
-              <a:rPr sz="1200" b="0">
-                <a:solidFill>
-                  <a:srgbClr val="666666"/>
-                </a:solidFill>
-                <a:latin typeface="Open Sans"/>
-                <a:ea typeface="Open Sans"/>
-                <a:cs typeface="Open Sans"/>
-              </a:rPr>
-              <a:t>Объясняйте, что делаете и какая помощь уже вызвана.</a:t>
-            </a:r>
-          </a:p>
-        </p:txBody>
-      </p:sp>
-      <p:sp>
-        <p:nvSpPr>
-          <p:cNvPr id="23" name="Rectangle 22"/>
-          <p:cNvSpPr/>
-          <p:nvPr/>
-        </p:nvSpPr>
-        <p:spPr>
-          <a:xfrm>
-            <a:off x="6325000" y="3950000"/>
-            <a:ext cx="5375000" cy="2300000"/>
-          </a:xfrm>
-          <a:prstGeom prst="rect">
-            <a:avLst/>
-          </a:prstGeom>
-          <a:solidFill>
-            <a:srgbClr val="FFFFFF"/>
-          </a:solidFill>
-          <a:ln w="12700">
-            <a:solidFill>
-              <a:srgbClr val="999999"/>
-            </a:solidFill>
-          </a:ln>
-        </p:spPr>
-        <p:style>
-          <a:lnRef idx="1">
-            <a:schemeClr val="accent1"/>
-          </a:lnRef>
-          <a:fillRef idx="3">
-            <a:schemeClr val="accent1"/>
-          </a:fillRef>
-          <a:effectRef idx="2">
-            <a:schemeClr val="accent1"/>
-          </a:effectRef>
-          <a:fontRef idx="minor">
-            <a:schemeClr val="lt1"/>
-          </a:fontRef>
-        </p:style>
-        <p:txBody>
-          <a:bodyPr rtlCol="0" anchor="ctr"/>
-          <a:lstStyle/>
-          <a:p>
-            <a:pPr algn="ctr"/>
-          </a:p>
-        </p:txBody>
-      </p:sp>
-      <p:sp>
-        <p:nvSpPr>
-          <p:cNvPr id="24" name="Oval 23"/>
-          <p:cNvSpPr/>
-          <p:nvPr/>
-        </p:nvSpPr>
-        <p:spPr>
-          <a:xfrm>
-            <a:off x="6475000" y="4150000"/>
-            <a:ext cx="500000" cy="500000"/>
-          </a:xfrm>
-          <a:prstGeom prst="ellipse">
-            <a:avLst/>
-          </a:prstGeom>
-          <a:solidFill>
-            <a:srgbClr val="555555"/>
-          </a:solidFill>
-          <a:ln>
-            <a:noFill/>
-          </a:ln>
-        </p:spPr>
-        <p:style>
-          <a:lnRef idx="1">
-            <a:schemeClr val="accent1"/>
-          </a:lnRef>
-          <a:fillRef idx="3">
-            <a:schemeClr val="accent1"/>
-          </a:fillRef>
-          <a:effectRef idx="2">
-            <a:schemeClr val="accent1"/>
-          </a:effectRef>
-          <a:fontRef idx="minor">
-            <a:schemeClr val="lt1"/>
-          </a:fontRef>
-        </p:style>
-        <p:txBody>
-          <a:bodyPr rtlCol="0" anchor="ctr"/>
-          <a:lstStyle/>
-          <a:p>
-            <a:pPr algn="ctr"/>
-          </a:p>
-        </p:txBody>
-      </p:sp>
-      <p:sp>
-        <p:nvSpPr>
-          <p:cNvPr id="25" name="TextBox 24"/>
-          <p:cNvSpPr txBox="1"/>
-          <p:nvPr/>
-        </p:nvSpPr>
-        <p:spPr>
-          <a:xfrm>
-            <a:off x="6475000" y="4150000"/>
-            <a:ext cx="500000" cy="500000"/>
-          </a:xfrm>
-          <a:prstGeom prst="rect">
-            <a:avLst/>
-          </a:prstGeom>
-          <a:noFill/>
-        </p:spPr>
-        <p:txBody>
-          <a:bodyPr wrap="square" anchor="ctr">
-            <a:spAutoFit/>
-          </a:bodyPr>
-          <a:lstStyle/>
-          <a:p>
-            <a:pPr algn="ctr"/>
-            <a:r>
-              <a:rPr sz="1400" b="1">
-                <a:solidFill>
-                  <a:srgbClr val="FFFFFF"/>
-                </a:solidFill>
-                <a:latin typeface="Open Sans"/>
-                <a:ea typeface="Open Sans"/>
-                <a:cs typeface="Open Sans"/>
-              </a:rPr>
-              <a:t>4</a:t>
-            </a:r>
-          </a:p>
-        </p:txBody>
-      </p:sp>
-      <p:sp>
-        <p:nvSpPr>
-          <p:cNvPr id="26" name="TextBox 25"/>
-          <p:cNvSpPr txBox="1"/>
-          <p:nvPr/>
-        </p:nvSpPr>
-        <p:spPr>
-          <a:xfrm>
-            <a:off x="7075000" y="4200000"/>
-            <a:ext cx="4475000" cy="450000"/>
-          </a:xfrm>
-          <a:prstGeom prst="rect">
-            <a:avLst/>
-          </a:prstGeom>
-          <a:noFill/>
-        </p:spPr>
-        <p:txBody>
-          <a:bodyPr wrap="square" anchor="t">
-            <a:spAutoFit/>
-          </a:bodyPr>
-          <a:lstStyle/>
-          <a:p>
-            <a:pPr algn="l"/>
-            <a:r>
-              <a:rPr sz="1300" b="1">
-                <a:solidFill>
-                  <a:srgbClr val="333333"/>
-                </a:solidFill>
-                <a:latin typeface="Open Sans"/>
-                <a:ea typeface="Open Sans"/>
-                <a:cs typeface="Open Sans"/>
-              </a:rPr>
-              <a:t>Будьте рядом</a:t>
-            </a:r>
-          </a:p>
-        </p:txBody>
-      </p:sp>
-      <p:sp>
-        <p:nvSpPr>
-          <p:cNvPr id="27" name="TextBox 26"/>
-          <p:cNvSpPr txBox="1"/>
-          <p:nvPr/>
-        </p:nvSpPr>
-        <p:spPr>
-          <a:xfrm>
-            <a:off x="6475000" y="4800000"/>
-            <a:ext cx="5075000" cy="1300000"/>
-          </a:xfrm>
-          <a:prstGeom prst="rect">
-            <a:avLst/>
-          </a:prstGeom>
-          <a:noFill/>
-        </p:spPr>
-        <p:txBody>
-          <a:bodyPr wrap="square" anchor="t">
-            <a:spAutoFit/>
-          </a:bodyPr>
-          <a:lstStyle/>
-          <a:p>
-            <a:pPr algn="l"/>
-            <a:r>
-              <a:rPr sz="1200" b="0">
-                <a:solidFill>
-                  <a:srgbClr val="666666"/>
-                </a:solidFill>
-                <a:latin typeface="Open Sans"/>
-                <a:ea typeface="Open Sans"/>
-                <a:cs typeface="Open Sans"/>
-              </a:rPr>
-              <a:t>Не оставляйте пострадавшего одного без необходимости.</a:t>
+              <a:t>При подозрении на позвоночник поворачивайте только для защиты дыхательных путей, по возможности несколькими помощниками.</a:t>
             </a:r>
           </a:p>
         </p:txBody>
@@ -7495,7 +9249,7 @@
                 <a:ea typeface="Open Sans"/>
                 <a:cs typeface="Open Sans"/>
               </a:rPr>
-              <a:t>ОСТРЫЕ РЕАКЦИИ НА СТРЕСС</a:t>
+              <a:t>ПРИЗНАКИ ШОКА: НОГИ ПРИПОДНЯТЫ</a:t>
             </a:r>
           </a:p>
         </p:txBody>
@@ -7660,16 +9414,40 @@
           </a:p>
         </p:txBody>
       </p:sp>
-      <p:sp>
-        <p:nvSpPr>
-          <p:cNvPr id="8" name="TextBox 7"/>
+      <p:pic>
+        <p:nvPicPr>
+          <p:cNvPr id="8" name="Picture 7" descr="fig81.jpeg"/>
+          <p:cNvPicPr>
+            <a:picLocks noChangeAspect="1"/>
+          </p:cNvPicPr>
+          <p:nvPr/>
+        </p:nvPicPr>
+        <p:blipFill>
+          <a:blip r:embed="rId2"/>
+          <a:stretch>
+            <a:fillRect/>
+          </a:stretch>
+        </p:blipFill>
+        <p:spPr>
+          <a:xfrm>
+            <a:off x="500000" y="2478869"/>
+            <a:ext cx="5200000" cy="1942261"/>
+          </a:xfrm>
+          <a:prstGeom prst="rect">
+            <a:avLst/>
+          </a:prstGeom>
+        </p:spPr>
+      </p:pic>
+      <p:sp>
+        <p:nvSpPr>
+          <p:cNvPr id="9" name="TextBox 8"/>
           <p:cNvSpPr txBox="1"/>
           <p:nvPr/>
         </p:nvSpPr>
         <p:spPr>
           <a:xfrm>
-            <a:off x="700000" y="1500000"/>
-            <a:ext cx="11000000" cy="4200000"/>
+            <a:off x="6000000" y="1450000"/>
+            <a:ext cx="6200000" cy="3800000"/>
           </a:xfrm>
           <a:prstGeom prst="rect">
             <a:avLst/>
@@ -7688,7 +9466,7 @@
               </a:spcAft>
             </a:pPr>
             <a:r>
-              <a:rPr sz="1400" b="0">
+              <a:rPr sz="1300" b="0">
                 <a:solidFill>
                   <a:srgbClr val="333333"/>
                 </a:solidFill>
@@ -7696,7 +9474,7 @@
                 <a:ea typeface="Open Sans"/>
                 <a:cs typeface="Open Sans"/>
               </a:rPr>
-              <a:t>•  страх, плач или тревога</a:t>
+              <a:t>•  Уложите пострадавшего на спину, если дыхание и характер травм это позволяют.</a:t>
             </a:r>
           </a:p>
           <a:p>
@@ -7706,7 +9484,7 @@
               </a:spcAft>
             </a:pPr>
             <a:r>
-              <a:rPr sz="1400" b="0">
+              <a:rPr sz="1300" b="0">
                 <a:solidFill>
                   <a:srgbClr val="333333"/>
                 </a:solidFill>
@@ -7714,7 +9492,7 @@
                 <a:ea typeface="Open Sans"/>
                 <a:cs typeface="Open Sans"/>
               </a:rPr>
-              <a:t>•  растерянность и заторможенность</a:t>
+              <a:t>•  Можно умеренно приподнять ноги при отсутствии травмы таза, позвоночника и конечностей.</a:t>
             </a:r>
           </a:p>
           <a:p>
@@ -7724,7 +9502,7 @@
               </a:spcAft>
             </a:pPr>
             <a:r>
-              <a:rPr sz="1400" b="0">
+              <a:rPr sz="1300" b="0">
                 <a:solidFill>
                   <a:srgbClr val="333333"/>
                 </a:solidFill>
@@ -7732,7 +9510,7 @@
                 <a:ea typeface="Open Sans"/>
                 <a:cs typeface="Open Sans"/>
               </a:rPr>
-              <a:t>•  возбуждение или агрессия</a:t>
+              <a:t>•  Остановите кровотечение, укройте и успокаивайте человека.</a:t>
             </a:r>
           </a:p>
           <a:p>
@@ -7742,7 +9520,7 @@
               </a:spcAft>
             </a:pPr>
             <a:r>
-              <a:rPr sz="1400" b="0">
+              <a:rPr sz="1300" b="0">
                 <a:solidFill>
                   <a:srgbClr val="333333"/>
                 </a:solidFill>
@@ -7750,7 +9528,7 @@
                 <a:ea typeface="Open Sans"/>
                 <a:cs typeface="Open Sans"/>
               </a:rPr>
-              <a:t>•  дрожь и повторяющиеся движения</a:t>
+              <a:t>•  Не давайте пищу или питье при тяжелой травме и возможной операции.</a:t>
             </a:r>
           </a:p>
           <a:p>
@@ -7760,7 +9538,7 @@
               </a:spcAft>
             </a:pPr>
             <a:r>
-              <a:rPr sz="1400" b="0">
+              <a:rPr sz="1300" b="0">
                 <a:solidFill>
                   <a:srgbClr val="333333"/>
                 </a:solidFill>
@@ -7768,21 +9546,21 @@
                 <a:ea typeface="Open Sans"/>
                 <a:cs typeface="Open Sans"/>
               </a:rPr>
-              <a:t>•  отсутствие внешней реакции</a:t>
-            </a:r>
-          </a:p>
-        </p:txBody>
-      </p:sp>
-      <p:sp>
-        <p:nvSpPr>
-          <p:cNvPr id="9" name="Rounded Rectangle 8"/>
+              <a:t>•  Контролируйте сознание и дыхание до прибытия скорой помощи.</a:t>
+            </a:r>
+          </a:p>
+        </p:txBody>
+      </p:sp>
+      <p:sp>
+        <p:nvSpPr>
+          <p:cNvPr id="10" name="Rounded Rectangle 9"/>
           <p:cNvSpPr/>
           <p:nvPr/>
         </p:nvSpPr>
         <p:spPr>
           <a:xfrm>
-            <a:off x="700000" y="5600000"/>
-            <a:ext cx="11000000" cy="1000000"/>
+            <a:off x="6000000" y="5400000"/>
+            <a:ext cx="6200000" cy="1100000"/>
           </a:xfrm>
           <a:prstGeom prst="roundRect">
             <a:avLst/>
@@ -7818,14 +9596,14 @@
       </p:sp>
       <p:sp>
         <p:nvSpPr>
-          <p:cNvPr id="10" name="TextBox 9"/>
+          <p:cNvPr id="11" name="TextBox 10"/>
           <p:cNvSpPr txBox="1"/>
           <p:nvPr/>
         </p:nvSpPr>
         <p:spPr>
           <a:xfrm>
-            <a:off x="950000" y="5800000"/>
-            <a:ext cx="10500000" cy="600000"/>
+            <a:off x="6250000" y="5600000"/>
+            <a:ext cx="5700000" cy="700000"/>
           </a:xfrm>
           <a:prstGeom prst="rect">
             <a:avLst/>
@@ -7840,7 +9618,7 @@
           <a:p>
             <a:pPr algn="l"/>
             <a:r>
-              <a:rPr sz="1300" b="0">
+              <a:rPr sz="1200" b="0">
                 <a:solidFill>
                   <a:srgbClr val="333333"/>
                 </a:solidFill>
@@ -7848,7 +9626,7 @@
                 <a:ea typeface="Open Sans"/>
                 <a:cs typeface="Open Sans"/>
               </a:rPr>
-              <a:t>Сохраняйте спокойствие, безопасность и уважение к человеку.</a:t>
+              <a:t>Не поднимайте ноги при боли, одышке, травме груди, живота, таза, позвоночника или нижних конечностей.</a:t>
             </a:r>
           </a:p>
         </p:txBody>
@@ -7946,7 +9724,7 @@
                 <a:ea typeface="Open Sans"/>
                 <a:cs typeface="Open Sans"/>
               </a:rPr>
-              <a:t>ЧЕГО ИЗБЕГАТЬ</a:t>
+              <a:t>ТРАВМА ПОЗВОНОЧНИКА: ТВЕРДАЯ ПОВЕРХНОСТЬ</a:t>
             </a:r>
           </a:p>
         </p:txBody>
@@ -8111,16 +9889,40 @@
           </a:p>
         </p:txBody>
       </p:sp>
-      <p:sp>
-        <p:nvSpPr>
-          <p:cNvPr id="8" name="TextBox 7"/>
+      <p:pic>
+        <p:nvPicPr>
+          <p:cNvPr id="8" name="Picture 7" descr="fig82.jpeg"/>
+          <p:cNvPicPr>
+            <a:picLocks noChangeAspect="1"/>
+          </p:cNvPicPr>
+          <p:nvPr/>
+        </p:nvPicPr>
+        <p:blipFill>
+          <a:blip r:embed="rId2"/>
+          <a:stretch>
+            <a:fillRect/>
+          </a:stretch>
+        </p:blipFill>
+        <p:spPr>
+          <a:xfrm>
+            <a:off x="500000" y="1757869"/>
+            <a:ext cx="5200000" cy="3384262"/>
+          </a:xfrm>
+          <a:prstGeom prst="rect">
+            <a:avLst/>
+          </a:prstGeom>
+        </p:spPr>
+      </p:pic>
+      <p:sp>
+        <p:nvSpPr>
+          <p:cNvPr id="9" name="TextBox 8"/>
           <p:cNvSpPr txBox="1"/>
           <p:nvPr/>
         </p:nvSpPr>
         <p:spPr>
           <a:xfrm>
-            <a:off x="700000" y="1500000"/>
-            <a:ext cx="11000000" cy="4200000"/>
+            <a:off x="6000000" y="1450000"/>
+            <a:ext cx="6200000" cy="3800000"/>
           </a:xfrm>
           <a:prstGeom prst="rect">
             <a:avLst/>
@@ -8139,15 +9941,15 @@
               </a:spcAft>
             </a:pPr>
             <a:r>
-              <a:rPr sz="1400" b="1">
-                <a:solidFill>
-                  <a:srgbClr val="CC0000"/>
-                </a:solidFill>
-                <a:latin typeface="Open Sans"/>
-                <a:ea typeface="Open Sans"/>
-                <a:cs typeface="Open Sans"/>
-              </a:rPr>
-              <a:t>•  Не обесценивайте страх и боль</a:t>
+              <a:rPr sz="1300" b="0">
+                <a:solidFill>
+                  <a:srgbClr val="333333"/>
+                </a:solidFill>
+                <a:latin typeface="Open Sans"/>
+                <a:ea typeface="Open Sans"/>
+                <a:cs typeface="Open Sans"/>
+              </a:rPr>
+              <a:t>•  Если место безопасно, не перемещайте пострадавшего без необходимости.</a:t>
             </a:r>
           </a:p>
           <a:p>
@@ -8157,15 +9959,15 @@
               </a:spcAft>
             </a:pPr>
             <a:r>
-              <a:rPr sz="1400" b="1">
-                <a:solidFill>
-                  <a:srgbClr val="CC0000"/>
-                </a:solidFill>
-                <a:latin typeface="Open Sans"/>
-                <a:ea typeface="Open Sans"/>
-                <a:cs typeface="Open Sans"/>
-              </a:rPr>
-              <a:t>•  Не давайте обещаний, в которых не уверены</a:t>
+              <a:rPr sz="1300" b="0">
+                <a:solidFill>
+                  <a:srgbClr val="333333"/>
+                </a:solidFill>
+                <a:latin typeface="Open Sans"/>
+                <a:ea typeface="Open Sans"/>
+                <a:cs typeface="Open Sans"/>
+              </a:rPr>
+              <a:t>•  Удерживайте голову и попросите человека сохранять неподвижность.</a:t>
             </a:r>
           </a:p>
           <a:p>
@@ -8175,15 +9977,15 @@
               </a:spcAft>
             </a:pPr>
             <a:r>
-              <a:rPr sz="1400" b="1">
-                <a:solidFill>
-                  <a:srgbClr val="CC0000"/>
-                </a:solidFill>
-                <a:latin typeface="Open Sans"/>
-                <a:ea typeface="Open Sans"/>
-                <a:cs typeface="Open Sans"/>
-              </a:rPr>
-              <a:t>•  Не сообщайте пугающие предположения</a:t>
+              <a:rPr sz="1300" b="0">
+                <a:solidFill>
+                  <a:srgbClr val="333333"/>
+                </a:solidFill>
+                <a:latin typeface="Open Sans"/>
+                <a:ea typeface="Open Sans"/>
+                <a:cs typeface="Open Sans"/>
+              </a:rPr>
+              <a:t>•  Для вынужденного переноса используйте жесткую ровную поверхность.</a:t>
             </a:r>
           </a:p>
           <a:p>
@@ -8193,15 +9995,15 @@
               </a:spcAft>
             </a:pPr>
             <a:r>
-              <a:rPr sz="1400" b="1">
-                <a:solidFill>
-                  <a:srgbClr val="CC0000"/>
-                </a:solidFill>
-                <a:latin typeface="Open Sans"/>
-                <a:ea typeface="Open Sans"/>
-                <a:cs typeface="Open Sans"/>
-              </a:rPr>
-              <a:t>•  Не заставляйте подробно рассказывать о событии</a:t>
+              <a:rPr sz="1300" b="0">
+                <a:solidFill>
+                  <a:srgbClr val="333333"/>
+                </a:solidFill>
+                <a:latin typeface="Open Sans"/>
+                <a:ea typeface="Open Sans"/>
+                <a:cs typeface="Open Sans"/>
+              </a:rPr>
+              <a:t>•  Голову, шею и туловище перемещайте по одной оси.</a:t>
             </a:r>
           </a:p>
           <a:p>
@@ -8211,15 +10013,95 @@
               </a:spcAft>
             </a:pPr>
             <a:r>
-              <a:rPr sz="1400" b="1">
-                <a:solidFill>
-                  <a:srgbClr val="CC0000"/>
-                </a:solidFill>
-                <a:latin typeface="Open Sans"/>
-                <a:ea typeface="Open Sans"/>
-                <a:cs typeface="Open Sans"/>
-              </a:rPr>
-              <a:t>•  Не оставляйте человека без наблюдения</a:t>
+              <a:rPr sz="1300" b="0">
+                <a:solidFill>
+                  <a:srgbClr val="333333"/>
+                </a:solidFill>
+                <a:latin typeface="Open Sans"/>
+                <a:ea typeface="Open Sans"/>
+                <a:cs typeface="Open Sans"/>
+              </a:rPr>
+              <a:t>•  После укладки заполните пустоты мягкими валиками и продолжайте контроль.</a:t>
+            </a:r>
+          </a:p>
+        </p:txBody>
+      </p:sp>
+      <p:sp>
+        <p:nvSpPr>
+          <p:cNvPr id="10" name="Rounded Rectangle 9"/>
+          <p:cNvSpPr/>
+          <p:nvPr/>
+        </p:nvSpPr>
+        <p:spPr>
+          <a:xfrm>
+            <a:off x="6000000" y="5400000"/>
+            <a:ext cx="6200000" cy="1100000"/>
+          </a:xfrm>
+          <a:prstGeom prst="roundRect">
+            <a:avLst/>
+          </a:prstGeom>
+          <a:solidFill>
+            <a:srgbClr val="F5F0E1"/>
+          </a:solidFill>
+          <a:ln>
+            <a:noFill/>
+          </a:ln>
+        </p:spPr>
+        <p:style>
+          <a:lnRef idx="1">
+            <a:schemeClr val="accent1"/>
+          </a:lnRef>
+          <a:fillRef idx="3">
+            <a:schemeClr val="accent1"/>
+          </a:fillRef>
+          <a:effectRef idx="2">
+            <a:schemeClr val="accent1"/>
+          </a:effectRef>
+          <a:fontRef idx="minor">
+            <a:schemeClr val="lt1"/>
+          </a:fontRef>
+        </p:style>
+        <p:txBody>
+          <a:bodyPr rtlCol="0" anchor="ctr"/>
+          <a:lstStyle/>
+          <a:p>
+            <a:pPr algn="ctr"/>
+          </a:p>
+        </p:txBody>
+      </p:sp>
+      <p:sp>
+        <p:nvSpPr>
+          <p:cNvPr id="11" name="TextBox 10"/>
+          <p:cNvSpPr txBox="1"/>
+          <p:nvPr/>
+        </p:nvSpPr>
+        <p:spPr>
+          <a:xfrm>
+            <a:off x="6250000" y="5600000"/>
+            <a:ext cx="5700000" cy="700000"/>
+          </a:xfrm>
+          <a:prstGeom prst="rect">
+            <a:avLst/>
+          </a:prstGeom>
+          <a:noFill/>
+        </p:spPr>
+        <p:txBody>
+          <a:bodyPr wrap="square" anchor="ctr">
+            <a:spAutoFit/>
+          </a:bodyPr>
+          <a:lstStyle/>
+          <a:p>
+            <a:pPr algn="l"/>
+            <a:r>
+              <a:rPr sz="1200" b="0">
+                <a:solidFill>
+                  <a:srgbClr val="333333"/>
+                </a:solidFill>
+                <a:latin typeface="Open Sans"/>
+                <a:ea typeface="Open Sans"/>
+                <a:cs typeface="Open Sans"/>
+              </a:rPr>
+              <a:t>Дыхательные пути и реанимация имеют приоритет перед иммобилизацией.</a:t>
             </a:r>
           </a:p>
         </p:txBody>
@@ -8317,7 +10199,7 @@
                 <a:ea typeface="Open Sans"/>
                 <a:cs typeface="Open Sans"/>
               </a:rPr>
-              <a:t>ГЛАВНОЕ ЗАПОМНИТЬ</a:t>
+              <a:t>ЗАЩИТА ОТ ХОЛОДА: УКУТЫВАНИЕ</a:t>
             </a:r>
           </a:p>
         </p:txBody>
@@ -8482,27 +10364,162 @@
           </a:p>
         </p:txBody>
       </p:sp>
-      <p:sp>
-        <p:nvSpPr>
-          <p:cNvPr id="8" name="Rectangle 7"/>
+      <p:pic>
+        <p:nvPicPr>
+          <p:cNvPr id="8" name="Picture 7" descr="fig83.jpeg"/>
+          <p:cNvPicPr>
+            <a:picLocks noChangeAspect="1"/>
+          </p:cNvPicPr>
+          <p:nvPr/>
+        </p:nvPicPr>
+        <p:blipFill>
+          <a:blip r:embed="rId2"/>
+          <a:stretch>
+            <a:fillRect/>
+          </a:stretch>
+        </p:blipFill>
+        <p:spPr>
+          <a:xfrm>
+            <a:off x="500000" y="2523598"/>
+            <a:ext cx="5200000" cy="1852803"/>
+          </a:xfrm>
+          <a:prstGeom prst="rect">
+            <a:avLst/>
+          </a:prstGeom>
+        </p:spPr>
+      </p:pic>
+      <p:sp>
+        <p:nvSpPr>
+          <p:cNvPr id="9" name="TextBox 8"/>
+          <p:cNvSpPr txBox="1"/>
+          <p:nvPr/>
+        </p:nvSpPr>
+        <p:spPr>
+          <a:xfrm>
+            <a:off x="6000000" y="1450000"/>
+            <a:ext cx="6200000" cy="3800000"/>
+          </a:xfrm>
+          <a:prstGeom prst="rect">
+            <a:avLst/>
+          </a:prstGeom>
+          <a:noFill/>
+        </p:spPr>
+        <p:txBody>
+          <a:bodyPr wrap="square">
+            <a:spAutoFit/>
+          </a:bodyPr>
+          <a:lstStyle/>
+          <a:p>
+            <a:pPr algn="l">
+              <a:spcAft>
+                <a:spcPts val="800"/>
+              </a:spcAft>
+            </a:pPr>
+            <a:r>
+              <a:rPr sz="1300" b="0">
+                <a:solidFill>
+                  <a:srgbClr val="333333"/>
+                </a:solidFill>
+                <a:latin typeface="Open Sans"/>
+                <a:ea typeface="Open Sans"/>
+                <a:cs typeface="Open Sans"/>
+              </a:rPr>
+              <a:t>•  Изолируйте пострадавшего от холодной земли и ветра.</a:t>
+            </a:r>
+          </a:p>
+          <a:p>
+            <a:pPr algn="l">
+              <a:spcAft>
+                <a:spcPts val="800"/>
+              </a:spcAft>
+            </a:pPr>
+            <a:r>
+              <a:rPr sz="1300" b="0">
+                <a:solidFill>
+                  <a:srgbClr val="333333"/>
+                </a:solidFill>
+                <a:latin typeface="Open Sans"/>
+                <a:ea typeface="Open Sans"/>
+                <a:cs typeface="Open Sans"/>
+              </a:rPr>
+              <a:t>•  Укройте одеялом, одеждой или теплоизолирующим покрывалом.</a:t>
+            </a:r>
+          </a:p>
+          <a:p>
+            <a:pPr algn="l">
+              <a:spcAft>
+                <a:spcPts val="800"/>
+              </a:spcAft>
+            </a:pPr>
+            <a:r>
+              <a:rPr sz="1300" b="0">
+                <a:solidFill>
+                  <a:srgbClr val="333333"/>
+                </a:solidFill>
+                <a:latin typeface="Open Sans"/>
+                <a:ea typeface="Open Sans"/>
+                <a:cs typeface="Open Sans"/>
+              </a:rPr>
+              <a:t>•  Оставьте лицо открытым и не затрудняйте наблюдение за дыханием.</a:t>
+            </a:r>
+          </a:p>
+          <a:p>
+            <a:pPr algn="l">
+              <a:spcAft>
+                <a:spcPts val="800"/>
+              </a:spcAft>
+            </a:pPr>
+            <a:r>
+              <a:rPr sz="1300" b="0">
+                <a:solidFill>
+                  <a:srgbClr val="333333"/>
+                </a:solidFill>
+                <a:latin typeface="Open Sans"/>
+                <a:ea typeface="Open Sans"/>
+                <a:cs typeface="Open Sans"/>
+              </a:rPr>
+              <a:t>•  Не закрывайте доступ к повязкам, жгуту и поврежденной конечности.</a:t>
+            </a:r>
+          </a:p>
+          <a:p>
+            <a:pPr algn="l">
+              <a:spcAft>
+                <a:spcPts val="800"/>
+              </a:spcAft>
+            </a:pPr>
+            <a:r>
+              <a:rPr sz="1300" b="0">
+                <a:solidFill>
+                  <a:srgbClr val="333333"/>
+                </a:solidFill>
+                <a:latin typeface="Open Sans"/>
+                <a:ea typeface="Open Sans"/>
+                <a:cs typeface="Open Sans"/>
+              </a:rPr>
+              <a:t>•  Не перегревайте человека и не помещайте источник сильного тепла на поврежденную кожу.</a:t>
+            </a:r>
+          </a:p>
+        </p:txBody>
+      </p:sp>
+      <p:sp>
+        <p:nvSpPr>
+          <p:cNvPr id="10" name="Rounded Rectangle 9"/>
           <p:cNvSpPr/>
           <p:nvPr/>
         </p:nvSpPr>
         <p:spPr>
           <a:xfrm>
-            <a:off x="700000" y="1450000"/>
-            <a:ext cx="11000000" cy="850000"/>
-          </a:xfrm>
-          <a:prstGeom prst="rect">
+            <a:off x="6000000" y="5400000"/>
+            <a:ext cx="6200000" cy="1100000"/>
+          </a:xfrm>
+          <a:prstGeom prst="roundRect">
             <a:avLst/>
           </a:prstGeom>
           <a:solidFill>
-            <a:srgbClr val="FFFFFF"/>
+            <a:srgbClr val="F5F0E1"/>
           </a:solidFill>
-          <a:ln w="12700">
-            <a:solidFill>
-              <a:srgbClr val="999999"/>
-            </a:solidFill>
+          <a:ln>
+            <a:noFill/>
           </a:ln>
         </p:spPr>
         <p:style>
@@ -8529,57 +10546,14 @@
       </p:sp>
       <p:sp>
         <p:nvSpPr>
-          <p:cNvPr id="9" name="Rectangle 8"/>
-          <p:cNvSpPr/>
-          <p:nvPr/>
-        </p:nvSpPr>
-        <p:spPr>
-          <a:xfrm>
-            <a:off x="700000" y="1450000"/>
-            <a:ext cx="90000" cy="850000"/>
-          </a:xfrm>
-          <a:prstGeom prst="rect">
-            <a:avLst/>
-          </a:prstGeom>
-          <a:solidFill>
-            <a:srgbClr val="CC0000"/>
-          </a:solidFill>
-          <a:ln>
-            <a:noFill/>
-          </a:ln>
-        </p:spPr>
-        <p:style>
-          <a:lnRef idx="1">
-            <a:schemeClr val="accent1"/>
-          </a:lnRef>
-          <a:fillRef idx="3">
-            <a:schemeClr val="accent1"/>
-          </a:fillRef>
-          <a:effectRef idx="2">
-            <a:schemeClr val="accent1"/>
-          </a:effectRef>
-          <a:fontRef idx="minor">
-            <a:schemeClr val="lt1"/>
-          </a:fontRef>
-        </p:style>
-        <p:txBody>
-          <a:bodyPr rtlCol="0" anchor="ctr"/>
-          <a:lstStyle/>
-          <a:p>
-            <a:pPr algn="ctr"/>
-          </a:p>
-        </p:txBody>
-      </p:sp>
-      <p:sp>
-        <p:nvSpPr>
-          <p:cNvPr id="10" name="TextBox 9"/>
+          <p:cNvPr id="11" name="TextBox 10"/>
           <p:cNvSpPr txBox="1"/>
           <p:nvPr/>
         </p:nvSpPr>
         <p:spPr>
           <a:xfrm>
-            <a:off x="1000000" y="1550000"/>
-            <a:ext cx="10400000" cy="650000"/>
+            <a:off x="6250000" y="5600000"/>
+            <a:ext cx="5700000" cy="700000"/>
           </a:xfrm>
           <a:prstGeom prst="rect">
             <a:avLst/>
@@ -8594,7 +10568,7 @@
           <a:p>
             <a:pPr algn="l"/>
             <a:r>
-              <a:rPr sz="1300" b="0">
+              <a:rPr sz="1200" b="0">
                 <a:solidFill>
                   <a:srgbClr val="333333"/>
                 </a:solidFill>
@@ -8602,507 +10576,7 @@
                 <a:ea typeface="Open Sans"/>
                 <a:cs typeface="Open Sans"/>
               </a:rPr>
-              <a:t>Положение должно помогать дыханию</a:t>
-            </a:r>
-          </a:p>
-        </p:txBody>
-      </p:sp>
-      <p:sp>
-        <p:nvSpPr>
-          <p:cNvPr id="11" name="Rectangle 10"/>
-          <p:cNvSpPr/>
-          <p:nvPr/>
-        </p:nvSpPr>
-        <p:spPr>
-          <a:xfrm>
-            <a:off x="700000" y="2400000"/>
-            <a:ext cx="11000000" cy="850000"/>
-          </a:xfrm>
-          <a:prstGeom prst="rect">
-            <a:avLst/>
-          </a:prstGeom>
-          <a:solidFill>
-            <a:srgbClr val="FFFFFF"/>
-          </a:solidFill>
-          <a:ln w="12700">
-            <a:solidFill>
-              <a:srgbClr val="999999"/>
-            </a:solidFill>
-          </a:ln>
-        </p:spPr>
-        <p:style>
-          <a:lnRef idx="1">
-            <a:schemeClr val="accent1"/>
-          </a:lnRef>
-          <a:fillRef idx="3">
-            <a:schemeClr val="accent1"/>
-          </a:fillRef>
-          <a:effectRef idx="2">
-            <a:schemeClr val="accent1"/>
-          </a:effectRef>
-          <a:fontRef idx="minor">
-            <a:schemeClr val="lt1"/>
-          </a:fontRef>
-        </p:style>
-        <p:txBody>
-          <a:bodyPr rtlCol="0" anchor="ctr"/>
-          <a:lstStyle/>
-          <a:p>
-            <a:pPr algn="ctr"/>
-          </a:p>
-        </p:txBody>
-      </p:sp>
-      <p:sp>
-        <p:nvSpPr>
-          <p:cNvPr id="12" name="Rectangle 11"/>
-          <p:cNvSpPr/>
-          <p:nvPr/>
-        </p:nvSpPr>
-        <p:spPr>
-          <a:xfrm>
-            <a:off x="700000" y="2400000"/>
-            <a:ext cx="90000" cy="850000"/>
-          </a:xfrm>
-          <a:prstGeom prst="rect">
-            <a:avLst/>
-          </a:prstGeom>
-          <a:solidFill>
-            <a:srgbClr val="CC0000"/>
-          </a:solidFill>
-          <a:ln>
-            <a:noFill/>
-          </a:ln>
-        </p:spPr>
-        <p:style>
-          <a:lnRef idx="1">
-            <a:schemeClr val="accent1"/>
-          </a:lnRef>
-          <a:fillRef idx="3">
-            <a:schemeClr val="accent1"/>
-          </a:fillRef>
-          <a:effectRef idx="2">
-            <a:schemeClr val="accent1"/>
-          </a:effectRef>
-          <a:fontRef idx="minor">
-            <a:schemeClr val="lt1"/>
-          </a:fontRef>
-        </p:style>
-        <p:txBody>
-          <a:bodyPr rtlCol="0" anchor="ctr"/>
-          <a:lstStyle/>
-          <a:p>
-            <a:pPr algn="ctr"/>
-          </a:p>
-        </p:txBody>
-      </p:sp>
-      <p:sp>
-        <p:nvSpPr>
-          <p:cNvPr id="13" name="TextBox 12"/>
-          <p:cNvSpPr txBox="1"/>
-          <p:nvPr/>
-        </p:nvSpPr>
-        <p:spPr>
-          <a:xfrm>
-            <a:off x="1000000" y="2500000"/>
-            <a:ext cx="10400000" cy="650000"/>
-          </a:xfrm>
-          <a:prstGeom prst="rect">
-            <a:avLst/>
-          </a:prstGeom>
-          <a:noFill/>
-        </p:spPr>
-        <p:txBody>
-          <a:bodyPr wrap="square" anchor="ctr">
-            <a:spAutoFit/>
-          </a:bodyPr>
-          <a:lstStyle/>
-          <a:p>
-            <a:pPr algn="l"/>
-            <a:r>
-              <a:rPr sz="1300" b="0">
-                <a:solidFill>
-                  <a:srgbClr val="333333"/>
-                </a:solidFill>
-                <a:latin typeface="Open Sans"/>
-                <a:ea typeface="Open Sans"/>
-                <a:cs typeface="Open Sans"/>
-              </a:rPr>
-              <a:t>Без сознания, но дышит — на бок</a:t>
-            </a:r>
-          </a:p>
-        </p:txBody>
-      </p:sp>
-      <p:sp>
-        <p:nvSpPr>
-          <p:cNvPr id="14" name="Rectangle 13"/>
-          <p:cNvSpPr/>
-          <p:nvPr/>
-        </p:nvSpPr>
-        <p:spPr>
-          <a:xfrm>
-            <a:off x="700000" y="3350000"/>
-            <a:ext cx="11000000" cy="850000"/>
-          </a:xfrm>
-          <a:prstGeom prst="rect">
-            <a:avLst/>
-          </a:prstGeom>
-          <a:solidFill>
-            <a:srgbClr val="FFFFFF"/>
-          </a:solidFill>
-          <a:ln w="12700">
-            <a:solidFill>
-              <a:srgbClr val="999999"/>
-            </a:solidFill>
-          </a:ln>
-        </p:spPr>
-        <p:style>
-          <a:lnRef idx="1">
-            <a:schemeClr val="accent1"/>
-          </a:lnRef>
-          <a:fillRef idx="3">
-            <a:schemeClr val="accent1"/>
-          </a:fillRef>
-          <a:effectRef idx="2">
-            <a:schemeClr val="accent1"/>
-          </a:effectRef>
-          <a:fontRef idx="minor">
-            <a:schemeClr val="lt1"/>
-          </a:fontRef>
-        </p:style>
-        <p:txBody>
-          <a:bodyPr rtlCol="0" anchor="ctr"/>
-          <a:lstStyle/>
-          <a:p>
-            <a:pPr algn="ctr"/>
-          </a:p>
-        </p:txBody>
-      </p:sp>
-      <p:sp>
-        <p:nvSpPr>
-          <p:cNvPr id="15" name="Rectangle 14"/>
-          <p:cNvSpPr/>
-          <p:nvPr/>
-        </p:nvSpPr>
-        <p:spPr>
-          <a:xfrm>
-            <a:off x="700000" y="3350000"/>
-            <a:ext cx="90000" cy="850000"/>
-          </a:xfrm>
-          <a:prstGeom prst="rect">
-            <a:avLst/>
-          </a:prstGeom>
-          <a:solidFill>
-            <a:srgbClr val="CC0000"/>
-          </a:solidFill>
-          <a:ln>
-            <a:noFill/>
-          </a:ln>
-        </p:spPr>
-        <p:style>
-          <a:lnRef idx="1">
-            <a:schemeClr val="accent1"/>
-          </a:lnRef>
-          <a:fillRef idx="3">
-            <a:schemeClr val="accent1"/>
-          </a:fillRef>
-          <a:effectRef idx="2">
-            <a:schemeClr val="accent1"/>
-          </a:effectRef>
-          <a:fontRef idx="minor">
-            <a:schemeClr val="lt1"/>
-          </a:fontRef>
-        </p:style>
-        <p:txBody>
-          <a:bodyPr rtlCol="0" anchor="ctr"/>
-          <a:lstStyle/>
-          <a:p>
-            <a:pPr algn="ctr"/>
-          </a:p>
-        </p:txBody>
-      </p:sp>
-      <p:sp>
-        <p:nvSpPr>
-          <p:cNvPr id="16" name="TextBox 15"/>
-          <p:cNvSpPr txBox="1"/>
-          <p:nvPr/>
-        </p:nvSpPr>
-        <p:spPr>
-          <a:xfrm>
-            <a:off x="1000000" y="3450000"/>
-            <a:ext cx="10400000" cy="650000"/>
-          </a:xfrm>
-          <a:prstGeom prst="rect">
-            <a:avLst/>
-          </a:prstGeom>
-          <a:noFill/>
-        </p:spPr>
-        <p:txBody>
-          <a:bodyPr wrap="square" anchor="ctr">
-            <a:spAutoFit/>
-          </a:bodyPr>
-          <a:lstStyle/>
-          <a:p>
-            <a:pPr algn="l"/>
-            <a:r>
-              <a:rPr sz="1300" b="0">
-                <a:solidFill>
-                  <a:srgbClr val="333333"/>
-                </a:solidFill>
-                <a:latin typeface="Open Sans"/>
-                <a:ea typeface="Open Sans"/>
-                <a:cs typeface="Open Sans"/>
-              </a:rPr>
-              <a:t>Регулярно проверяйте дыхание</a:t>
-            </a:r>
-          </a:p>
-        </p:txBody>
-      </p:sp>
-      <p:sp>
-        <p:nvSpPr>
-          <p:cNvPr id="17" name="Rectangle 16"/>
-          <p:cNvSpPr/>
-          <p:nvPr/>
-        </p:nvSpPr>
-        <p:spPr>
-          <a:xfrm>
-            <a:off x="700000" y="4300000"/>
-            <a:ext cx="11000000" cy="850000"/>
-          </a:xfrm>
-          <a:prstGeom prst="rect">
-            <a:avLst/>
-          </a:prstGeom>
-          <a:solidFill>
-            <a:srgbClr val="FFFFFF"/>
-          </a:solidFill>
-          <a:ln w="12700">
-            <a:solidFill>
-              <a:srgbClr val="999999"/>
-            </a:solidFill>
-          </a:ln>
-        </p:spPr>
-        <p:style>
-          <a:lnRef idx="1">
-            <a:schemeClr val="accent1"/>
-          </a:lnRef>
-          <a:fillRef idx="3">
-            <a:schemeClr val="accent1"/>
-          </a:fillRef>
-          <a:effectRef idx="2">
-            <a:schemeClr val="accent1"/>
-          </a:effectRef>
-          <a:fontRef idx="minor">
-            <a:schemeClr val="lt1"/>
-          </a:fontRef>
-        </p:style>
-        <p:txBody>
-          <a:bodyPr rtlCol="0" anchor="ctr"/>
-          <a:lstStyle/>
-          <a:p>
-            <a:pPr algn="ctr"/>
-          </a:p>
-        </p:txBody>
-      </p:sp>
-      <p:sp>
-        <p:nvSpPr>
-          <p:cNvPr id="18" name="Rectangle 17"/>
-          <p:cNvSpPr/>
-          <p:nvPr/>
-        </p:nvSpPr>
-        <p:spPr>
-          <a:xfrm>
-            <a:off x="700000" y="4300000"/>
-            <a:ext cx="90000" cy="850000"/>
-          </a:xfrm>
-          <a:prstGeom prst="rect">
-            <a:avLst/>
-          </a:prstGeom>
-          <a:solidFill>
-            <a:srgbClr val="CC0000"/>
-          </a:solidFill>
-          <a:ln>
-            <a:noFill/>
-          </a:ln>
-        </p:spPr>
-        <p:style>
-          <a:lnRef idx="1">
-            <a:schemeClr val="accent1"/>
-          </a:lnRef>
-          <a:fillRef idx="3">
-            <a:schemeClr val="accent1"/>
-          </a:fillRef>
-          <a:effectRef idx="2">
-            <a:schemeClr val="accent1"/>
-          </a:effectRef>
-          <a:fontRef idx="minor">
-            <a:schemeClr val="lt1"/>
-          </a:fontRef>
-        </p:style>
-        <p:txBody>
-          <a:bodyPr rtlCol="0" anchor="ctr"/>
-          <a:lstStyle/>
-          <a:p>
-            <a:pPr algn="ctr"/>
-          </a:p>
-        </p:txBody>
-      </p:sp>
-      <p:sp>
-        <p:nvSpPr>
-          <p:cNvPr id="19" name="TextBox 18"/>
-          <p:cNvSpPr txBox="1"/>
-          <p:nvPr/>
-        </p:nvSpPr>
-        <p:spPr>
-          <a:xfrm>
-            <a:off x="1000000" y="4400000"/>
-            <a:ext cx="10400000" cy="650000"/>
-          </a:xfrm>
-          <a:prstGeom prst="rect">
-            <a:avLst/>
-          </a:prstGeom>
-          <a:noFill/>
-        </p:spPr>
-        <p:txBody>
-          <a:bodyPr wrap="square" anchor="ctr">
-            <a:spAutoFit/>
-          </a:bodyPr>
-          <a:lstStyle/>
-          <a:p>
-            <a:pPr algn="l"/>
-            <a:r>
-              <a:rPr sz="1300" b="0">
-                <a:solidFill>
-                  <a:srgbClr val="333333"/>
-                </a:solidFill>
-                <a:latin typeface="Open Sans"/>
-                <a:ea typeface="Open Sans"/>
-                <a:cs typeface="Open Sans"/>
-              </a:rPr>
-              <a:t>Говорите спокойно и понятно</a:t>
-            </a:r>
-          </a:p>
-        </p:txBody>
-      </p:sp>
-      <p:sp>
-        <p:nvSpPr>
-          <p:cNvPr id="20" name="Rectangle 19"/>
-          <p:cNvSpPr/>
-          <p:nvPr/>
-        </p:nvSpPr>
-        <p:spPr>
-          <a:xfrm>
-            <a:off x="700000" y="5250000"/>
-            <a:ext cx="11000000" cy="850000"/>
-          </a:xfrm>
-          <a:prstGeom prst="rect">
-            <a:avLst/>
-          </a:prstGeom>
-          <a:solidFill>
-            <a:srgbClr val="FFFFFF"/>
-          </a:solidFill>
-          <a:ln w="12700">
-            <a:solidFill>
-              <a:srgbClr val="999999"/>
-            </a:solidFill>
-          </a:ln>
-        </p:spPr>
-        <p:style>
-          <a:lnRef idx="1">
-            <a:schemeClr val="accent1"/>
-          </a:lnRef>
-          <a:fillRef idx="3">
-            <a:schemeClr val="accent1"/>
-          </a:fillRef>
-          <a:effectRef idx="2">
-            <a:schemeClr val="accent1"/>
-          </a:effectRef>
-          <a:fontRef idx="minor">
-            <a:schemeClr val="lt1"/>
-          </a:fontRef>
-        </p:style>
-        <p:txBody>
-          <a:bodyPr rtlCol="0" anchor="ctr"/>
-          <a:lstStyle/>
-          <a:p>
-            <a:pPr algn="ctr"/>
-          </a:p>
-        </p:txBody>
-      </p:sp>
-      <p:sp>
-        <p:nvSpPr>
-          <p:cNvPr id="21" name="Rectangle 20"/>
-          <p:cNvSpPr/>
-          <p:nvPr/>
-        </p:nvSpPr>
-        <p:spPr>
-          <a:xfrm>
-            <a:off x="700000" y="5250000"/>
-            <a:ext cx="90000" cy="850000"/>
-          </a:xfrm>
-          <a:prstGeom prst="rect">
-            <a:avLst/>
-          </a:prstGeom>
-          <a:solidFill>
-            <a:srgbClr val="CC0000"/>
-          </a:solidFill>
-          <a:ln>
-            <a:noFill/>
-          </a:ln>
-        </p:spPr>
-        <p:style>
-          <a:lnRef idx="1">
-            <a:schemeClr val="accent1"/>
-          </a:lnRef>
-          <a:fillRef idx="3">
-            <a:schemeClr val="accent1"/>
-          </a:fillRef>
-          <a:effectRef idx="2">
-            <a:schemeClr val="accent1"/>
-          </a:effectRef>
-          <a:fontRef idx="minor">
-            <a:schemeClr val="lt1"/>
-          </a:fontRef>
-        </p:style>
-        <p:txBody>
-          <a:bodyPr rtlCol="0" anchor="ctr"/>
-          <a:lstStyle/>
-          <a:p>
-            <a:pPr algn="ctr"/>
-          </a:p>
-        </p:txBody>
-      </p:sp>
-      <p:sp>
-        <p:nvSpPr>
-          <p:cNvPr id="22" name="TextBox 21"/>
-          <p:cNvSpPr txBox="1"/>
-          <p:nvPr/>
-        </p:nvSpPr>
-        <p:spPr>
-          <a:xfrm>
-            <a:off x="1000000" y="5350000"/>
-            <a:ext cx="10400000" cy="650000"/>
-          </a:xfrm>
-          <a:prstGeom prst="rect">
-            <a:avLst/>
-          </a:prstGeom>
-          <a:noFill/>
-        </p:spPr>
-        <p:txBody>
-          <a:bodyPr wrap="square" anchor="ctr">
-            <a:spAutoFit/>
-          </a:bodyPr>
-          <a:lstStyle/>
-          <a:p>
-            <a:pPr algn="l"/>
-            <a:r>
-              <a:rPr sz="1300" b="0">
-                <a:solidFill>
-                  <a:srgbClr val="333333"/>
-                </a:solidFill>
-                <a:latin typeface="Open Sans"/>
-                <a:ea typeface="Open Sans"/>
-                <a:cs typeface="Open Sans"/>
-              </a:rPr>
-              <a:t>Не оставляйте пострадавшего одного</a:t>
+              <a:t>Сохранение тепла особенно важно при кровопотере, ожоге, травме и длительном ожидании помощи.</a:t>
             </a:r>
           </a:p>
         </p:txBody>
@@ -9200,7 +10674,7 @@
                 <a:ea typeface="Open Sans"/>
                 <a:cs typeface="Open Sans"/>
               </a:rPr>
-              <a:t>ПАМЯТКА</a:t>
+              <a:t>КОНТРОЛЬ СОСТОЯНИЯ</a:t>
             </a:r>
           </a:p>
         </p:txBody>
@@ -9365,30 +10839,978 @@
           </a:p>
         </p:txBody>
       </p:sp>
-      <p:pic>
-        <p:nvPicPr>
-          <p:cNvPr id="8" name="Picture 7" descr="pamyatka-tema4-polozhenie-psihologiya-16x9.png"/>
-          <p:cNvPicPr>
-            <a:picLocks noChangeAspect="1"/>
-          </p:cNvPicPr>
-          <p:nvPr/>
-        </p:nvPicPr>
-        <p:blipFill>
-          <a:blip r:embed="rId2"/>
-          <a:stretch>
-            <a:fillRect/>
-          </a:stretch>
-        </p:blipFill>
-        <p:spPr>
-          <a:xfrm>
-            <a:off x="2300000" y="1400000"/>
-            <a:ext cx="7800000" cy="5200000"/>
-          </a:xfrm>
-          <a:prstGeom prst="rect">
-            <a:avLst/>
-          </a:prstGeom>
-        </p:spPr>
-      </p:pic>
+      <p:sp>
+        <p:nvSpPr>
+          <p:cNvPr id="8" name="Oval 7"/>
+          <p:cNvSpPr/>
+          <p:nvPr/>
+        </p:nvSpPr>
+        <p:spPr>
+          <a:xfrm>
+            <a:off x="700000" y="1400000"/>
+            <a:ext cx="500000" cy="500000"/>
+          </a:xfrm>
+          <a:prstGeom prst="ellipse">
+            <a:avLst/>
+          </a:prstGeom>
+          <a:solidFill>
+            <a:srgbClr val="CC0000"/>
+          </a:solidFill>
+          <a:ln>
+            <a:noFill/>
+          </a:ln>
+        </p:spPr>
+        <p:style>
+          <a:lnRef idx="1">
+            <a:schemeClr val="accent1"/>
+          </a:lnRef>
+          <a:fillRef idx="3">
+            <a:schemeClr val="accent1"/>
+          </a:fillRef>
+          <a:effectRef idx="2">
+            <a:schemeClr val="accent1"/>
+          </a:effectRef>
+          <a:fontRef idx="minor">
+            <a:schemeClr val="lt1"/>
+          </a:fontRef>
+        </p:style>
+        <p:txBody>
+          <a:bodyPr rtlCol="0" anchor="ctr"/>
+          <a:lstStyle/>
+          <a:p>
+            <a:pPr algn="ctr"/>
+          </a:p>
+        </p:txBody>
+      </p:sp>
+      <p:sp>
+        <p:nvSpPr>
+          <p:cNvPr id="9" name="TextBox 8"/>
+          <p:cNvSpPr txBox="1"/>
+          <p:nvPr/>
+        </p:nvSpPr>
+        <p:spPr>
+          <a:xfrm>
+            <a:off x="700000" y="1400000"/>
+            <a:ext cx="500000" cy="500000"/>
+          </a:xfrm>
+          <a:prstGeom prst="rect">
+            <a:avLst/>
+          </a:prstGeom>
+          <a:noFill/>
+        </p:spPr>
+        <p:txBody>
+          <a:bodyPr wrap="square" anchor="ctr">
+            <a:spAutoFit/>
+          </a:bodyPr>
+          <a:lstStyle/>
+          <a:p>
+            <a:pPr algn="ctr"/>
+            <a:r>
+              <a:rPr sz="1300" b="1">
+                <a:solidFill>
+                  <a:srgbClr val="FFFFFF"/>
+                </a:solidFill>
+                <a:latin typeface="Open Sans"/>
+                <a:ea typeface="Open Sans"/>
+                <a:cs typeface="Open Sans"/>
+              </a:rPr>
+              <a:t>1</a:t>
+            </a:r>
+          </a:p>
+        </p:txBody>
+      </p:sp>
+      <p:sp>
+        <p:nvSpPr>
+          <p:cNvPr id="10" name="Rectangle 9"/>
+          <p:cNvSpPr/>
+          <p:nvPr/>
+        </p:nvSpPr>
+        <p:spPr>
+          <a:xfrm>
+            <a:off x="1400000" y="1400000"/>
+            <a:ext cx="10550000" cy="620000"/>
+          </a:xfrm>
+          <a:prstGeom prst="rect">
+            <a:avLst/>
+          </a:prstGeom>
+          <a:solidFill>
+            <a:srgbClr val="FFFFFF"/>
+          </a:solidFill>
+          <a:ln w="12700">
+            <a:solidFill>
+              <a:srgbClr val="999999"/>
+            </a:solidFill>
+          </a:ln>
+        </p:spPr>
+        <p:style>
+          <a:lnRef idx="1">
+            <a:schemeClr val="accent1"/>
+          </a:lnRef>
+          <a:fillRef idx="3">
+            <a:schemeClr val="accent1"/>
+          </a:fillRef>
+          <a:effectRef idx="2">
+            <a:schemeClr val="accent1"/>
+          </a:effectRef>
+          <a:fontRef idx="minor">
+            <a:schemeClr val="lt1"/>
+          </a:fontRef>
+        </p:style>
+        <p:txBody>
+          <a:bodyPr rtlCol="0" anchor="ctr"/>
+          <a:lstStyle/>
+          <a:p>
+            <a:pPr algn="ctr"/>
+          </a:p>
+        </p:txBody>
+      </p:sp>
+      <p:sp>
+        <p:nvSpPr>
+          <p:cNvPr id="11" name="TextBox 10"/>
+          <p:cNvSpPr txBox="1"/>
+          <p:nvPr/>
+        </p:nvSpPr>
+        <p:spPr>
+          <a:xfrm>
+            <a:off x="1600000" y="1400000"/>
+            <a:ext cx="10150000" cy="620000"/>
+          </a:xfrm>
+          <a:prstGeom prst="rect">
+            <a:avLst/>
+          </a:prstGeom>
+          <a:noFill/>
+        </p:spPr>
+        <p:txBody>
+          <a:bodyPr wrap="square" anchor="ctr">
+            <a:spAutoFit/>
+          </a:bodyPr>
+          <a:lstStyle/>
+          <a:p>
+            <a:pPr algn="l"/>
+            <a:r>
+              <a:rPr sz="1300" b="0">
+                <a:solidFill>
+                  <a:srgbClr val="333333"/>
+                </a:solidFill>
+                <a:latin typeface="Open Sans"/>
+                <a:ea typeface="Open Sans"/>
+                <a:cs typeface="Open Sans"/>
+              </a:rPr>
+              <a:t>Регулярно обращайтесь к пострадавшему и оценивайте уровень сознания.</a:t>
+            </a:r>
+          </a:p>
+        </p:txBody>
+      </p:sp>
+      <p:sp>
+        <p:nvSpPr>
+          <p:cNvPr id="12" name="Oval 11"/>
+          <p:cNvSpPr/>
+          <p:nvPr/>
+        </p:nvSpPr>
+        <p:spPr>
+          <a:xfrm>
+            <a:off x="700000" y="2100000"/>
+            <a:ext cx="500000" cy="500000"/>
+          </a:xfrm>
+          <a:prstGeom prst="ellipse">
+            <a:avLst/>
+          </a:prstGeom>
+          <a:solidFill>
+            <a:srgbClr val="555555"/>
+          </a:solidFill>
+          <a:ln>
+            <a:noFill/>
+          </a:ln>
+        </p:spPr>
+        <p:style>
+          <a:lnRef idx="1">
+            <a:schemeClr val="accent1"/>
+          </a:lnRef>
+          <a:fillRef idx="3">
+            <a:schemeClr val="accent1"/>
+          </a:fillRef>
+          <a:effectRef idx="2">
+            <a:schemeClr val="accent1"/>
+          </a:effectRef>
+          <a:fontRef idx="minor">
+            <a:schemeClr val="lt1"/>
+          </a:fontRef>
+        </p:style>
+        <p:txBody>
+          <a:bodyPr rtlCol="0" anchor="ctr"/>
+          <a:lstStyle/>
+          <a:p>
+            <a:pPr algn="ctr"/>
+          </a:p>
+        </p:txBody>
+      </p:sp>
+      <p:sp>
+        <p:nvSpPr>
+          <p:cNvPr id="13" name="TextBox 12"/>
+          <p:cNvSpPr txBox="1"/>
+          <p:nvPr/>
+        </p:nvSpPr>
+        <p:spPr>
+          <a:xfrm>
+            <a:off x="700000" y="2100000"/>
+            <a:ext cx="500000" cy="500000"/>
+          </a:xfrm>
+          <a:prstGeom prst="rect">
+            <a:avLst/>
+          </a:prstGeom>
+          <a:noFill/>
+        </p:spPr>
+        <p:txBody>
+          <a:bodyPr wrap="square" anchor="ctr">
+            <a:spAutoFit/>
+          </a:bodyPr>
+          <a:lstStyle/>
+          <a:p>
+            <a:pPr algn="ctr"/>
+            <a:r>
+              <a:rPr sz="1300" b="1">
+                <a:solidFill>
+                  <a:srgbClr val="FFFFFF"/>
+                </a:solidFill>
+                <a:latin typeface="Open Sans"/>
+                <a:ea typeface="Open Sans"/>
+                <a:cs typeface="Open Sans"/>
+              </a:rPr>
+              <a:t>2</a:t>
+            </a:r>
+          </a:p>
+        </p:txBody>
+      </p:sp>
+      <p:sp>
+        <p:nvSpPr>
+          <p:cNvPr id="14" name="Rectangle 13"/>
+          <p:cNvSpPr/>
+          <p:nvPr/>
+        </p:nvSpPr>
+        <p:spPr>
+          <a:xfrm>
+            <a:off x="1400000" y="2100000"/>
+            <a:ext cx="10550000" cy="620000"/>
+          </a:xfrm>
+          <a:prstGeom prst="rect">
+            <a:avLst/>
+          </a:prstGeom>
+          <a:solidFill>
+            <a:srgbClr val="FFFFFF"/>
+          </a:solidFill>
+          <a:ln w="12700">
+            <a:solidFill>
+              <a:srgbClr val="999999"/>
+            </a:solidFill>
+          </a:ln>
+        </p:spPr>
+        <p:style>
+          <a:lnRef idx="1">
+            <a:schemeClr val="accent1"/>
+          </a:lnRef>
+          <a:fillRef idx="3">
+            <a:schemeClr val="accent1"/>
+          </a:fillRef>
+          <a:effectRef idx="2">
+            <a:schemeClr val="accent1"/>
+          </a:effectRef>
+          <a:fontRef idx="minor">
+            <a:schemeClr val="lt1"/>
+          </a:fontRef>
+        </p:style>
+        <p:txBody>
+          <a:bodyPr rtlCol="0" anchor="ctr"/>
+          <a:lstStyle/>
+          <a:p>
+            <a:pPr algn="ctr"/>
+          </a:p>
+        </p:txBody>
+      </p:sp>
+      <p:sp>
+        <p:nvSpPr>
+          <p:cNvPr id="15" name="TextBox 14"/>
+          <p:cNvSpPr txBox="1"/>
+          <p:nvPr/>
+        </p:nvSpPr>
+        <p:spPr>
+          <a:xfrm>
+            <a:off x="1600000" y="2100000"/>
+            <a:ext cx="10150000" cy="620000"/>
+          </a:xfrm>
+          <a:prstGeom prst="rect">
+            <a:avLst/>
+          </a:prstGeom>
+          <a:noFill/>
+        </p:spPr>
+        <p:txBody>
+          <a:bodyPr wrap="square" anchor="ctr">
+            <a:spAutoFit/>
+          </a:bodyPr>
+          <a:lstStyle/>
+          <a:p>
+            <a:pPr algn="l"/>
+            <a:r>
+              <a:rPr sz="1300" b="0">
+                <a:solidFill>
+                  <a:srgbClr val="333333"/>
+                </a:solidFill>
+                <a:latin typeface="Open Sans"/>
+                <a:ea typeface="Open Sans"/>
+                <a:cs typeface="Open Sans"/>
+              </a:rPr>
+              <a:t>Наблюдайте за частотой, глубиной и шумностью дыхания.</a:t>
+            </a:r>
+          </a:p>
+        </p:txBody>
+      </p:sp>
+      <p:sp>
+        <p:nvSpPr>
+          <p:cNvPr id="16" name="Oval 15"/>
+          <p:cNvSpPr/>
+          <p:nvPr/>
+        </p:nvSpPr>
+        <p:spPr>
+          <a:xfrm>
+            <a:off x="700000" y="2800000"/>
+            <a:ext cx="500000" cy="500000"/>
+          </a:xfrm>
+          <a:prstGeom prst="ellipse">
+            <a:avLst/>
+          </a:prstGeom>
+          <a:solidFill>
+            <a:srgbClr val="555555"/>
+          </a:solidFill>
+          <a:ln>
+            <a:noFill/>
+          </a:ln>
+        </p:spPr>
+        <p:style>
+          <a:lnRef idx="1">
+            <a:schemeClr val="accent1"/>
+          </a:lnRef>
+          <a:fillRef idx="3">
+            <a:schemeClr val="accent1"/>
+          </a:fillRef>
+          <a:effectRef idx="2">
+            <a:schemeClr val="accent1"/>
+          </a:effectRef>
+          <a:fontRef idx="minor">
+            <a:schemeClr val="lt1"/>
+          </a:fontRef>
+        </p:style>
+        <p:txBody>
+          <a:bodyPr rtlCol="0" anchor="ctr"/>
+          <a:lstStyle/>
+          <a:p>
+            <a:pPr algn="ctr"/>
+          </a:p>
+        </p:txBody>
+      </p:sp>
+      <p:sp>
+        <p:nvSpPr>
+          <p:cNvPr id="17" name="TextBox 16"/>
+          <p:cNvSpPr txBox="1"/>
+          <p:nvPr/>
+        </p:nvSpPr>
+        <p:spPr>
+          <a:xfrm>
+            <a:off x="700000" y="2800000"/>
+            <a:ext cx="500000" cy="500000"/>
+          </a:xfrm>
+          <a:prstGeom prst="rect">
+            <a:avLst/>
+          </a:prstGeom>
+          <a:noFill/>
+        </p:spPr>
+        <p:txBody>
+          <a:bodyPr wrap="square" anchor="ctr">
+            <a:spAutoFit/>
+          </a:bodyPr>
+          <a:lstStyle/>
+          <a:p>
+            <a:pPr algn="ctr"/>
+            <a:r>
+              <a:rPr sz="1300" b="1">
+                <a:solidFill>
+                  <a:srgbClr val="FFFFFF"/>
+                </a:solidFill>
+                <a:latin typeface="Open Sans"/>
+                <a:ea typeface="Open Sans"/>
+                <a:cs typeface="Open Sans"/>
+              </a:rPr>
+              <a:t>3</a:t>
+            </a:r>
+          </a:p>
+        </p:txBody>
+      </p:sp>
+      <p:sp>
+        <p:nvSpPr>
+          <p:cNvPr id="18" name="Rectangle 17"/>
+          <p:cNvSpPr/>
+          <p:nvPr/>
+        </p:nvSpPr>
+        <p:spPr>
+          <a:xfrm>
+            <a:off x="1400000" y="2800000"/>
+            <a:ext cx="10550000" cy="620000"/>
+          </a:xfrm>
+          <a:prstGeom prst="rect">
+            <a:avLst/>
+          </a:prstGeom>
+          <a:solidFill>
+            <a:srgbClr val="FFFFFF"/>
+          </a:solidFill>
+          <a:ln w="12700">
+            <a:solidFill>
+              <a:srgbClr val="999999"/>
+            </a:solidFill>
+          </a:ln>
+        </p:spPr>
+        <p:style>
+          <a:lnRef idx="1">
+            <a:schemeClr val="accent1"/>
+          </a:lnRef>
+          <a:fillRef idx="3">
+            <a:schemeClr val="accent1"/>
+          </a:fillRef>
+          <a:effectRef idx="2">
+            <a:schemeClr val="accent1"/>
+          </a:effectRef>
+          <a:fontRef idx="minor">
+            <a:schemeClr val="lt1"/>
+          </a:fontRef>
+        </p:style>
+        <p:txBody>
+          <a:bodyPr rtlCol="0" anchor="ctr"/>
+          <a:lstStyle/>
+          <a:p>
+            <a:pPr algn="ctr"/>
+          </a:p>
+        </p:txBody>
+      </p:sp>
+      <p:sp>
+        <p:nvSpPr>
+          <p:cNvPr id="19" name="TextBox 18"/>
+          <p:cNvSpPr txBox="1"/>
+          <p:nvPr/>
+        </p:nvSpPr>
+        <p:spPr>
+          <a:xfrm>
+            <a:off x="1600000" y="2800000"/>
+            <a:ext cx="10150000" cy="620000"/>
+          </a:xfrm>
+          <a:prstGeom prst="rect">
+            <a:avLst/>
+          </a:prstGeom>
+          <a:noFill/>
+        </p:spPr>
+        <p:txBody>
+          <a:bodyPr wrap="square" anchor="ctr">
+            <a:spAutoFit/>
+          </a:bodyPr>
+          <a:lstStyle/>
+          <a:p>
+            <a:pPr algn="l"/>
+            <a:r>
+              <a:rPr sz="1300" b="0">
+                <a:solidFill>
+                  <a:srgbClr val="333333"/>
+                </a:solidFill>
+                <a:latin typeface="Open Sans"/>
+                <a:ea typeface="Open Sans"/>
+                <a:cs typeface="Open Sans"/>
+              </a:rPr>
+              <a:t>Следите за цветом, температурой и влажностью кожи.</a:t>
+            </a:r>
+          </a:p>
+        </p:txBody>
+      </p:sp>
+      <p:sp>
+        <p:nvSpPr>
+          <p:cNvPr id="20" name="Oval 19"/>
+          <p:cNvSpPr/>
+          <p:nvPr/>
+        </p:nvSpPr>
+        <p:spPr>
+          <a:xfrm>
+            <a:off x="700000" y="3500000"/>
+            <a:ext cx="500000" cy="500000"/>
+          </a:xfrm>
+          <a:prstGeom prst="ellipse">
+            <a:avLst/>
+          </a:prstGeom>
+          <a:solidFill>
+            <a:srgbClr val="555555"/>
+          </a:solidFill>
+          <a:ln>
+            <a:noFill/>
+          </a:ln>
+        </p:spPr>
+        <p:style>
+          <a:lnRef idx="1">
+            <a:schemeClr val="accent1"/>
+          </a:lnRef>
+          <a:fillRef idx="3">
+            <a:schemeClr val="accent1"/>
+          </a:fillRef>
+          <a:effectRef idx="2">
+            <a:schemeClr val="accent1"/>
+          </a:effectRef>
+          <a:fontRef idx="minor">
+            <a:schemeClr val="lt1"/>
+          </a:fontRef>
+        </p:style>
+        <p:txBody>
+          <a:bodyPr rtlCol="0" anchor="ctr"/>
+          <a:lstStyle/>
+          <a:p>
+            <a:pPr algn="ctr"/>
+          </a:p>
+        </p:txBody>
+      </p:sp>
+      <p:sp>
+        <p:nvSpPr>
+          <p:cNvPr id="21" name="TextBox 20"/>
+          <p:cNvSpPr txBox="1"/>
+          <p:nvPr/>
+        </p:nvSpPr>
+        <p:spPr>
+          <a:xfrm>
+            <a:off x="700000" y="3500000"/>
+            <a:ext cx="500000" cy="500000"/>
+          </a:xfrm>
+          <a:prstGeom prst="rect">
+            <a:avLst/>
+          </a:prstGeom>
+          <a:noFill/>
+        </p:spPr>
+        <p:txBody>
+          <a:bodyPr wrap="square" anchor="ctr">
+            <a:spAutoFit/>
+          </a:bodyPr>
+          <a:lstStyle/>
+          <a:p>
+            <a:pPr algn="ctr"/>
+            <a:r>
+              <a:rPr sz="1300" b="1">
+                <a:solidFill>
+                  <a:srgbClr val="FFFFFF"/>
+                </a:solidFill>
+                <a:latin typeface="Open Sans"/>
+                <a:ea typeface="Open Sans"/>
+                <a:cs typeface="Open Sans"/>
+              </a:rPr>
+              <a:t>4</a:t>
+            </a:r>
+          </a:p>
+        </p:txBody>
+      </p:sp>
+      <p:sp>
+        <p:nvSpPr>
+          <p:cNvPr id="22" name="Rectangle 21"/>
+          <p:cNvSpPr/>
+          <p:nvPr/>
+        </p:nvSpPr>
+        <p:spPr>
+          <a:xfrm>
+            <a:off x="1400000" y="3500000"/>
+            <a:ext cx="10550000" cy="620000"/>
+          </a:xfrm>
+          <a:prstGeom prst="rect">
+            <a:avLst/>
+          </a:prstGeom>
+          <a:solidFill>
+            <a:srgbClr val="FFFFFF"/>
+          </a:solidFill>
+          <a:ln w="12700">
+            <a:solidFill>
+              <a:srgbClr val="999999"/>
+            </a:solidFill>
+          </a:ln>
+        </p:spPr>
+        <p:style>
+          <a:lnRef idx="1">
+            <a:schemeClr val="accent1"/>
+          </a:lnRef>
+          <a:fillRef idx="3">
+            <a:schemeClr val="accent1"/>
+          </a:fillRef>
+          <a:effectRef idx="2">
+            <a:schemeClr val="accent1"/>
+          </a:effectRef>
+          <a:fontRef idx="minor">
+            <a:schemeClr val="lt1"/>
+          </a:fontRef>
+        </p:style>
+        <p:txBody>
+          <a:bodyPr rtlCol="0" anchor="ctr"/>
+          <a:lstStyle/>
+          <a:p>
+            <a:pPr algn="ctr"/>
+          </a:p>
+        </p:txBody>
+      </p:sp>
+      <p:sp>
+        <p:nvSpPr>
+          <p:cNvPr id="23" name="TextBox 22"/>
+          <p:cNvSpPr txBox="1"/>
+          <p:nvPr/>
+        </p:nvSpPr>
+        <p:spPr>
+          <a:xfrm>
+            <a:off x="1600000" y="3500000"/>
+            <a:ext cx="10150000" cy="620000"/>
+          </a:xfrm>
+          <a:prstGeom prst="rect">
+            <a:avLst/>
+          </a:prstGeom>
+          <a:noFill/>
+        </p:spPr>
+        <p:txBody>
+          <a:bodyPr wrap="square" anchor="ctr">
+            <a:spAutoFit/>
+          </a:bodyPr>
+          <a:lstStyle/>
+          <a:p>
+            <a:pPr algn="l"/>
+            <a:r>
+              <a:rPr sz="1300" b="0">
+                <a:solidFill>
+                  <a:srgbClr val="333333"/>
+                </a:solidFill>
+                <a:latin typeface="Open Sans"/>
+                <a:ea typeface="Open Sans"/>
+                <a:cs typeface="Open Sans"/>
+              </a:rPr>
+              <a:t>Проверяйте повязки, остановленное кровотечение и время наложения жгута.</a:t>
+            </a:r>
+          </a:p>
+        </p:txBody>
+      </p:sp>
+      <p:sp>
+        <p:nvSpPr>
+          <p:cNvPr id="24" name="Oval 23"/>
+          <p:cNvSpPr/>
+          <p:nvPr/>
+        </p:nvSpPr>
+        <p:spPr>
+          <a:xfrm>
+            <a:off x="700000" y="4200000"/>
+            <a:ext cx="500000" cy="500000"/>
+          </a:xfrm>
+          <a:prstGeom prst="ellipse">
+            <a:avLst/>
+          </a:prstGeom>
+          <a:solidFill>
+            <a:srgbClr val="555555"/>
+          </a:solidFill>
+          <a:ln>
+            <a:noFill/>
+          </a:ln>
+        </p:spPr>
+        <p:style>
+          <a:lnRef idx="1">
+            <a:schemeClr val="accent1"/>
+          </a:lnRef>
+          <a:fillRef idx="3">
+            <a:schemeClr val="accent1"/>
+          </a:fillRef>
+          <a:effectRef idx="2">
+            <a:schemeClr val="accent1"/>
+          </a:effectRef>
+          <a:fontRef idx="minor">
+            <a:schemeClr val="lt1"/>
+          </a:fontRef>
+        </p:style>
+        <p:txBody>
+          <a:bodyPr rtlCol="0" anchor="ctr"/>
+          <a:lstStyle/>
+          <a:p>
+            <a:pPr algn="ctr"/>
+          </a:p>
+        </p:txBody>
+      </p:sp>
+      <p:sp>
+        <p:nvSpPr>
+          <p:cNvPr id="25" name="TextBox 24"/>
+          <p:cNvSpPr txBox="1"/>
+          <p:nvPr/>
+        </p:nvSpPr>
+        <p:spPr>
+          <a:xfrm>
+            <a:off x="700000" y="4200000"/>
+            <a:ext cx="500000" cy="500000"/>
+          </a:xfrm>
+          <a:prstGeom prst="rect">
+            <a:avLst/>
+          </a:prstGeom>
+          <a:noFill/>
+        </p:spPr>
+        <p:txBody>
+          <a:bodyPr wrap="square" anchor="ctr">
+            <a:spAutoFit/>
+          </a:bodyPr>
+          <a:lstStyle/>
+          <a:p>
+            <a:pPr algn="ctr"/>
+            <a:r>
+              <a:rPr sz="1300" b="1">
+                <a:solidFill>
+                  <a:srgbClr val="FFFFFF"/>
+                </a:solidFill>
+                <a:latin typeface="Open Sans"/>
+                <a:ea typeface="Open Sans"/>
+                <a:cs typeface="Open Sans"/>
+              </a:rPr>
+              <a:t>5</a:t>
+            </a:r>
+          </a:p>
+        </p:txBody>
+      </p:sp>
+      <p:sp>
+        <p:nvSpPr>
+          <p:cNvPr id="26" name="Rectangle 25"/>
+          <p:cNvSpPr/>
+          <p:nvPr/>
+        </p:nvSpPr>
+        <p:spPr>
+          <a:xfrm>
+            <a:off x="1400000" y="4200000"/>
+            <a:ext cx="10550000" cy="620000"/>
+          </a:xfrm>
+          <a:prstGeom prst="rect">
+            <a:avLst/>
+          </a:prstGeom>
+          <a:solidFill>
+            <a:srgbClr val="FFFFFF"/>
+          </a:solidFill>
+          <a:ln w="12700">
+            <a:solidFill>
+              <a:srgbClr val="999999"/>
+            </a:solidFill>
+          </a:ln>
+        </p:spPr>
+        <p:style>
+          <a:lnRef idx="1">
+            <a:schemeClr val="accent1"/>
+          </a:lnRef>
+          <a:fillRef idx="3">
+            <a:schemeClr val="accent1"/>
+          </a:fillRef>
+          <a:effectRef idx="2">
+            <a:schemeClr val="accent1"/>
+          </a:effectRef>
+          <a:fontRef idx="minor">
+            <a:schemeClr val="lt1"/>
+          </a:fontRef>
+        </p:style>
+        <p:txBody>
+          <a:bodyPr rtlCol="0" anchor="ctr"/>
+          <a:lstStyle/>
+          <a:p>
+            <a:pPr algn="ctr"/>
+          </a:p>
+        </p:txBody>
+      </p:sp>
+      <p:sp>
+        <p:nvSpPr>
+          <p:cNvPr id="27" name="TextBox 26"/>
+          <p:cNvSpPr txBox="1"/>
+          <p:nvPr/>
+        </p:nvSpPr>
+        <p:spPr>
+          <a:xfrm>
+            <a:off x="1600000" y="4200000"/>
+            <a:ext cx="10150000" cy="620000"/>
+          </a:xfrm>
+          <a:prstGeom prst="rect">
+            <a:avLst/>
+          </a:prstGeom>
+          <a:noFill/>
+        </p:spPr>
+        <p:txBody>
+          <a:bodyPr wrap="square" anchor="ctr">
+            <a:spAutoFit/>
+          </a:bodyPr>
+          <a:lstStyle/>
+          <a:p>
+            <a:pPr algn="l"/>
+            <a:r>
+              <a:rPr sz="1300" b="0">
+                <a:solidFill>
+                  <a:srgbClr val="333333"/>
+                </a:solidFill>
+                <a:latin typeface="Open Sans"/>
+                <a:ea typeface="Open Sans"/>
+                <a:cs typeface="Open Sans"/>
+              </a:rPr>
+              <a:t>Контролируйте цвет, тепло и чувствительность пальцев после иммобилизации.</a:t>
+            </a:r>
+          </a:p>
+        </p:txBody>
+      </p:sp>
+      <p:sp>
+        <p:nvSpPr>
+          <p:cNvPr id="28" name="Oval 27"/>
+          <p:cNvSpPr/>
+          <p:nvPr/>
+        </p:nvSpPr>
+        <p:spPr>
+          <a:xfrm>
+            <a:off x="700000" y="4900000"/>
+            <a:ext cx="500000" cy="500000"/>
+          </a:xfrm>
+          <a:prstGeom prst="ellipse">
+            <a:avLst/>
+          </a:prstGeom>
+          <a:solidFill>
+            <a:srgbClr val="555555"/>
+          </a:solidFill>
+          <a:ln>
+            <a:noFill/>
+          </a:ln>
+        </p:spPr>
+        <p:style>
+          <a:lnRef idx="1">
+            <a:schemeClr val="accent1"/>
+          </a:lnRef>
+          <a:fillRef idx="3">
+            <a:schemeClr val="accent1"/>
+          </a:fillRef>
+          <a:effectRef idx="2">
+            <a:schemeClr val="accent1"/>
+          </a:effectRef>
+          <a:fontRef idx="minor">
+            <a:schemeClr val="lt1"/>
+          </a:fontRef>
+        </p:style>
+        <p:txBody>
+          <a:bodyPr rtlCol="0" anchor="ctr"/>
+          <a:lstStyle/>
+          <a:p>
+            <a:pPr algn="ctr"/>
+          </a:p>
+        </p:txBody>
+      </p:sp>
+      <p:sp>
+        <p:nvSpPr>
+          <p:cNvPr id="29" name="TextBox 28"/>
+          <p:cNvSpPr txBox="1"/>
+          <p:nvPr/>
+        </p:nvSpPr>
+        <p:spPr>
+          <a:xfrm>
+            <a:off x="700000" y="4900000"/>
+            <a:ext cx="500000" cy="500000"/>
+          </a:xfrm>
+          <a:prstGeom prst="rect">
+            <a:avLst/>
+          </a:prstGeom>
+          <a:noFill/>
+        </p:spPr>
+        <p:txBody>
+          <a:bodyPr wrap="square" anchor="ctr">
+            <a:spAutoFit/>
+          </a:bodyPr>
+          <a:lstStyle/>
+          <a:p>
+            <a:pPr algn="ctr"/>
+            <a:r>
+              <a:rPr sz="1300" b="1">
+                <a:solidFill>
+                  <a:srgbClr val="FFFFFF"/>
+                </a:solidFill>
+                <a:latin typeface="Open Sans"/>
+                <a:ea typeface="Open Sans"/>
+                <a:cs typeface="Open Sans"/>
+              </a:rPr>
+              <a:t>6</a:t>
+            </a:r>
+          </a:p>
+        </p:txBody>
+      </p:sp>
+      <p:sp>
+        <p:nvSpPr>
+          <p:cNvPr id="30" name="Rectangle 29"/>
+          <p:cNvSpPr/>
+          <p:nvPr/>
+        </p:nvSpPr>
+        <p:spPr>
+          <a:xfrm>
+            <a:off x="1400000" y="4900000"/>
+            <a:ext cx="10550000" cy="620000"/>
+          </a:xfrm>
+          <a:prstGeom prst="rect">
+            <a:avLst/>
+          </a:prstGeom>
+          <a:solidFill>
+            <a:srgbClr val="FFFFFF"/>
+          </a:solidFill>
+          <a:ln w="12700">
+            <a:solidFill>
+              <a:srgbClr val="999999"/>
+            </a:solidFill>
+          </a:ln>
+        </p:spPr>
+        <p:style>
+          <a:lnRef idx="1">
+            <a:schemeClr val="accent1"/>
+          </a:lnRef>
+          <a:fillRef idx="3">
+            <a:schemeClr val="accent1"/>
+          </a:fillRef>
+          <a:effectRef idx="2">
+            <a:schemeClr val="accent1"/>
+          </a:effectRef>
+          <a:fontRef idx="minor">
+            <a:schemeClr val="lt1"/>
+          </a:fontRef>
+        </p:style>
+        <p:txBody>
+          <a:bodyPr rtlCol="0" anchor="ctr"/>
+          <a:lstStyle/>
+          <a:p>
+            <a:pPr algn="ctr"/>
+          </a:p>
+        </p:txBody>
+      </p:sp>
+      <p:sp>
+        <p:nvSpPr>
+          <p:cNvPr id="31" name="TextBox 30"/>
+          <p:cNvSpPr txBox="1"/>
+          <p:nvPr/>
+        </p:nvSpPr>
+        <p:spPr>
+          <a:xfrm>
+            <a:off x="1600000" y="4900000"/>
+            <a:ext cx="10150000" cy="620000"/>
+          </a:xfrm>
+          <a:prstGeom prst="rect">
+            <a:avLst/>
+          </a:prstGeom>
+          <a:noFill/>
+        </p:spPr>
+        <p:txBody>
+          <a:bodyPr wrap="square" anchor="ctr">
+            <a:spAutoFit/>
+          </a:bodyPr>
+          <a:lstStyle/>
+          <a:p>
+            <a:pPr algn="l"/>
+            <a:r>
+              <a:rPr sz="1300" b="0">
+                <a:solidFill>
+                  <a:srgbClr val="333333"/>
+                </a:solidFill>
+                <a:latin typeface="Open Sans"/>
+                <a:ea typeface="Open Sans"/>
+                <a:cs typeface="Open Sans"/>
+              </a:rPr>
+              <a:t>Отмечайте новые жалобы и будьте готовы изменить положение или начать реанимацию.</a:t>
+            </a:r>
+          </a:p>
+        </p:txBody>
+      </p:sp>
     </p:spTree>
   </p:cSld>
   <p:clrMapOvr>
